--- a/deck/Reporting-Builder.pptx
+++ b/deck/Reporting-Builder.pptx
@@ -2073,7 +2073,7 @@
       </p:sp>
       <p:pic>
         <p:nvPicPr>
-          <p:cNvPr id="4" name="Image 0" descr="/Users/tonygpt/Desktop/PROJECTS/project-reporting-builder/deck/assets/app-icon.png">    </p:cNvPr>
+          <p:cNvPr id="4" name="app-icon.png" descr="The app icon: a blue document card on a white rounded plate.">    </p:cNvPr>
           <p:cNvPicPr>
             <a:picLocks noChangeAspect="1"/>
           </p:cNvPicPr>
@@ -4559,7 +4559,7 @@
       </p:sp>
       <p:pic>
         <p:nvPicPr>
-          <p:cNvPr id="22" name="Image 0" descr="/Users/tonygpt/Desktop/PROJECTS/project-reporting-builder/deck/assets/gallery-fade.png">    </p:cNvPr>
+          <p:cNvPr id="22" name="gallery-fade.png" descr="The published card gallery page, showing the weekly status and milestone templates rendered by the same HTML renderer the app uses for email.">    </p:cNvPr>
           <p:cNvPicPr>
             <a:picLocks noChangeAspect="1"/>
           </p:cNvPicPr>
@@ -6639,7 +6639,7 @@
       </p:sp>
       <p:pic>
         <p:nvPicPr>
-          <p:cNvPr id="7" name="Image 0" descr="/Users/tonygpt/Desktop/PROJECTS/project-reporting-builder/deck/assets/hero.png">    </p:cNvPr>
+          <p:cNvPr id="7" name="hero.png" descr="The app window: a list of cards on the left, a weekly status card being edited in the middle, and the Format inspector on the right showing themes, text size, status and width.">    </p:cNvPr>
           <p:cNvPicPr>
             <a:picLocks noChangeAspect="1"/>
           </p:cNvPicPr>
@@ -7663,7 +7663,7 @@
       </p:sp>
       <p:pic>
         <p:nvPicPr>
-          <p:cNvPr id="24" name="Image 0" descr="/Users/tonygpt/Desktop/PROJECTS/project-reporting-builder/deck/assets/missing.png">    </p:cNvPr>
+          <p:cNvPr id="24" name="missing.png" descr="The same card after a chart is dropped in: the toolbar shield is red, the image carries an Add Description button, and the Accessibility tab reports one error.">    </p:cNvPr>
           <p:cNvPicPr>
             <a:picLocks noChangeAspect="1"/>
           </p:cNvPicPr>
@@ -8979,7 +8979,7 @@
       </p:sp>
       <p:pic>
         <p:nvPicPr>
-          <p:cNvPr id="7" name="Image 0" descr="/Users/tonygpt/Desktop/PROJECTS/project-reporting-builder/deck/assets/before.png">    </p:cNvPr>
+          <p:cNvPr id="7" name="before.png" descr="The first interface: a form of fields on the left and a live preview on the right, with capital-letter labels and boxed tiles.">    </p:cNvPr>
           <p:cNvPicPr>
             <a:picLocks noChangeAspect="1"/>
           </p:cNvPicPr>
@@ -9075,7 +9075,7 @@
       </p:sp>
       <p:pic>
         <p:nvPicPr>
-          <p:cNvPr id="10" name="Image 1" descr="/Users/tonygpt/Desktop/PROJECTS/project-reporting-builder/deck/assets/hero.png">    </p:cNvPr>
+          <p:cNvPr id="10" name="hero.png" descr="The second interface: the card itself edited on a canvas, with its properties moved into a Format inspector.">    </p:cNvPr>
           <p:cNvPicPr>
             <a:picLocks noChangeAspect="1"/>
           </p:cNvPicPr>
@@ -9405,7 +9405,7 @@
       </p:sp>
       <p:pic>
         <p:nvPicPr>
-          <p:cNvPr id="7" name="Image 0" descr="/Users/tonygpt/Desktop/PROJECTS/project-reporting-builder/deck/assets/listen-crop.png">    </p:cNvPr>
+          <p:cNvPr id="7" name="listen-crop.png" descr="The spoken transcript: each line as a screen reader would say it, the line being read marked with a speaker glyph, and “Image. No description.” in red.">    </p:cNvPr>
           <p:cNvPicPr>
             <a:picLocks noChangeAspect="1"/>
           </p:cNvPicPr>
@@ -9540,7 +9540,7 @@
       </p:sp>
       <p:pic>
         <p:nvPicPr>
-          <p:cNvPr id="11" name="Image 1" descr="/Users/tonygpt/Desktop/PROJECTS/project-reporting-builder/deck/assets/cvd-crop.png">    </p:cNvPr>
+          <p:cNvPr id="11" name="cvd-crop.png" descr="The card simulated as seen with deuteranopia: the green and red of the status and the change arrows are gone, but the arrows, the words and the numbers still carry the meaning.">    </p:cNvPr>
           <p:cNvPicPr>
             <a:picLocks noChangeAspect="1"/>
           </p:cNvPicPr>
@@ -9675,7 +9675,7 @@
       </p:sp>
       <p:pic>
         <p:nvPicPr>
-          <p:cNvPr id="15" name="Image 2" descr="/Users/tonygpt/Desktop/PROJECTS/project-reporting-builder/deck/assets/checks-crop.png">    </p:cNvPr>
+          <p:cNvPr id="15" name="checks-crop.png" descr="The Accessibility tab reporting Needs Attention with one error, and the issue beneath it: describe this image for people who cannot see it, or mark it decorative, citing WCAG 1.1.1.">    </p:cNvPr>
           <p:cNvPicPr>
             <a:picLocks noChangeAspect="1"/>
           </p:cNvPicPr>
@@ -10872,7 +10872,7 @@
       </p:sp>
       <p:pic>
         <p:nvPicPr>
-          <p:cNvPr id="7" name="Image 0" descr="/Users/tonygpt/Desktop/PROJECTS/project-reporting-builder/deck/assets/draft.png">    </p:cNvPr>
+          <p:cNvPr id="7" name="draft.png" descr="New Card from Notes: rough meeting notes on the left, and on the right the drafted card with a title, status, summary, highlights, metrics, risks and next steps, above a line saying all fourteen accessibility checks passed.">    </p:cNvPr>
           <p:cNvPicPr>
             <a:picLocks noChangeAspect="1"/>
           </p:cNvPicPr>

--- a/deck/Reporting-Builder.pptx
+++ b/deck/Reporting-Builder.pptx
@@ -19,9 +19,10 @@
     <p:sldId id="267" r:id="rId13"/>
     <p:sldId id="268" r:id="rId14"/>
     <p:sldId id="269" r:id="rId15"/>
+    <p:sldId id="270" r:id="rId16"/>
   </p:sldIdLst>
   <p:notesMasterIdLst>
-    <p:notesMasterId r:id="rId16"/>
+    <p:notesMasterId r:id="rId17"/>
   </p:notesMasterIdLst>
   <p:sldSz cx="12192000" cy="6858000"/>
   <p:notesSz cx="6858000" cy="12192000"/>
@@ -603,7 +604,7 @@
           <a:p>
             <a:r>
               <a:rPr lang="en-US" dirty="0"/>
-              <a:t>Now the part I want to be very clear about. In this demo the model is a public API, DeepSeek. That is for this exercise only. I would not ship it, and I would not use it with real data. Status reports are business data. Sent to a public third-party model, they leave the organisation's control: the provider's retention and training terms apply, in the provider's jurisdiction, with no data-processing agreement, no security review and no audit trail. Pasted notes can carry a prompt injection, and a model can state a wrong number confidently. So why is it there? My Mac runs macOS 15, which can't run Apple's on-device model, and a demo needs a model that answers. But the design assumes the right answer. The provider sits behind a protocol. The first implementation is Apple's Foundation Models, on device, where nothing leaves the Mac. The second is any compatible endpoint, which in a company means an approved internal gateway with authentication, redaction and logging. The feature is off by default, asks consent per host, keeps the key in the Keychain, and one build flag removes it with the network entitlement.</a:t>
+              <a:t>Now the part I want to be very clear about. In this demo the model is a public API, DeepSeek. That is for this exercise only. I would not ship it, and I would not use it with real data. Status reports are business data. Sent to a public third-party model they leave the organisation's control: the provider's retention and training terms apply, in the provider's jurisdiction, with no data-processing agreement, no security review and no audit trail. Pasted notes can carry a prompt injection, and a model can state a wrong number confidently. So why is it here? My Mac runs macOS 15, which cannot run Apple's on-device model, and a demo needs a model that answers. But the design assumes the right answer. The provider sits behind a protocol. The first implementation is Apple's Foundation Models, on device, where nothing leaves the Mac. The second is any compatible endpoint, which in a company means an approved internal gateway with authentication, redaction and logging. The feature is off by default, asks consent per host, and one build flag removes it with the network entitlement.</a:t>
             </a:r>
             <a:endParaRPr lang="en-US" dirty="0"/>
           </a:p>
@@ -691,7 +692,7 @@
           <a:p>
             <a:r>
               <a:rPr lang="en-US" dirty="0"/>
-              <a:t>On engineering. The domain logic is a Swift package with no UI imports, so its tests run in about a second. Everything compiles in Swift 6 mode with strict concurrency. There are about a hundred and forty unit tests: parsers, renderers and the linter in the package; export, the pasteboard, undo, and the assistant against a stubbed network in the app. On top sit UI tests that include XCTest's accessibility audit. Configuration lives in xcconfig files and reaches runtime as feature flags. Lint is clean, CI runs on every push, and there are no third-party dependencies. Twelve short decision records explain the choices someone might question, including the ones I reversed.</a:t>
+              <a:t>On testing, and the split is deliberate. Ninety tests in the package cover everything that is a pure function: parsers, renderers, contrast maths, the fourteen linter rules, and the parser that turns a model's reply into a card. They finish in under a second, so I run them constantly. Forty-seven app tests cover the store and undo, persistence, every export including the tagged PDF, and the assistant against a stubbed HTTP client. Twelve UI tests drive the real app, including XCTest's accessibility audit. Nothing touches your clipboard, your network or your files, with one deliberate exception: the Copy for Email test uses the real pasteboard, because the pasteboard is the thing under test. Three things I do not test, and say so instead: how Mail and Slack really render a paste, the VoiceOver experience, and PDF/UA conformance.</a:t>
             </a:r>
             <a:endParaRPr lang="en-US" dirty="0"/>
           </a:p>
@@ -779,7 +780,7 @@
           <a:p>
             <a:r>
               <a:rPr lang="en-US" dirty="0"/>
-              <a:t>The brief mentions the cloud. A Mac app is distributed rather than hosted, and I keep user data local on purpose. So what goes to the cloud is the software and its output. On every push, GitHub Actions runs tests and lint. A push to main also renders a gallery of every template with the same HTML renderer the app uses for email, and publishes it to GitHub Pages, but only if every card passes the accessibility linter in strict mode. Accessibility becomes a pipeline gate. A version tag is set up to build a release; I have not cut one yet. In an enterprise, the same artifact would be notarised and distributed through Apple Business Manager or MDM.</a:t>
+              <a:t>On the engineering around it. Configuration is not buried in the Xcode project: versions, feature flags and signing live in xcconfig files and reach the running app through one typed accessor. The project file is generated from a YAML spec, so a reviewer can read the build the way they read the code, and one flag removes writing assistance together with its network entitlement. There are no third-party dependencies. And twelve short decision records explain the choices someone might question, including the ones I reversed.</a:t>
             </a:r>
             <a:endParaRPr lang="en-US" dirty="0"/>
           </a:p>
@@ -867,7 +868,7 @@
           <a:p>
             <a:r>
               <a:rPr lang="en-US" dirty="0"/>
-              <a:t>I want to be straightforward about what I can't claim. The on-device model path compiles behind availability checks, but I couldn't run it on macOS 15. The paste matrix separates what I verified by hand from what I expect from each app's documentation. The VoiceOver features are tested for their data, but the experience needs someone who uses VoiceOver every day. The tagged PDF has a structure tree, but I haven't run a PDF/UA validator. And rich text has no alt text, so an image pasted into Mail carries its caption, not its description. Next would be an iPad target on the same core, share links, and localisation.</a:t>
+              <a:t>The brief mentions the cloud. A Mac app is distributed rather than hosted, and user data stays local on purpose, so what ships to the cloud is the software and its output. On every push, GitHub Actions runs the tests and lint. A push to main also renders a gallery of every template, with the same HTML renderer the app uses for email, and publishes it, but only if every card passes the linter in strict mode. Accessibility becomes a pipeline gate. A version tag is set up to build a release; I have not cut one yet. In an enterprise the same artifact would be notarised and distributed through Apple Business Manager or MDM.</a:t>
             </a:r>
             <a:endParaRPr lang="en-US" dirty="0"/>
           </a:p>
@@ -955,7 +956,7 @@
           <a:p>
             <a:r>
               <a:rPr lang="en-US" dirty="0"/>
-              <a:t>Three things to take away. One model, many renderers: what you see is what you paste. Accessibility you can hear and see, not only pass, for the author, the reader and the VoiceOver user. And privacy as a design decision: local by default, AI opt-in, and honest about which parts are a demonstration. Thank you. I'd be glad to go deeper into any part.</a:t>
+              <a:t>I want to be straightforward about what I cannot claim. The on-device model path compiles behind availability checks, but I could not run it on macOS 15. The paste matrix separates what I verified by hand from what I expect from each app's documentation. The VoiceOver features are tested for their data; the experience needs someone who uses VoiceOver every day. The tagged PDF has a structure tree, but I have not run a PDF/UA validator. Next would be an iPad target on the same core, share links, and localisation.</a:t>
             </a:r>
             <a:endParaRPr lang="en-US" dirty="0"/>
           </a:p>
@@ -979,6 +980,94 @@
             <a:fld id="{F7021451-1387-4CA6-816F-3879F97B5CBC}" type="slidenum">
               <a:rPr lang="en-US"/>
               <a:t>14</a:t>
+            </a:fld>
+            <a:endParaRPr lang="en-US"/>
+          </a:p>
+        </p:txBody>
+      </p:sp>
+    </p:spTree>
+    <p:extLst>
+      <p:ext uri="{BB962C8B-B14F-4D97-AF65-F5344CB8AC3E}">
+        <p14:creationId xmlns:p14="http://schemas.microsoft.com/office/powerpoint/2010/main" val="1024086991"/>
+      </p:ext>
+    </p:extLst>
+  </p:cSld>
+  <p:clrMapOvr>
+    <a:masterClrMapping/>
+  </p:clrMapOvr>
+</p:notes>
+</file>
+
+<file path=ppt/notesSlides/notesSlide15.xml><?xml version="1.0" encoding="utf-8"?>
+<p:notes xmlns:a="http://schemas.openxmlformats.org/drawingml/2006/main" xmlns:r="http://schemas.openxmlformats.org/officeDocument/2006/relationships" xmlns:p="http://schemas.openxmlformats.org/presentationml/2006/main">
+  <p:cSld>
+    <p:spTree>
+      <p:nvGrpSpPr>
+        <p:cNvPr id="1" name=""/>
+        <p:cNvGrpSpPr/>
+        <p:nvPr/>
+      </p:nvGrpSpPr>
+      <p:grpSpPr>
+        <a:xfrm>
+          <a:off x="0" y="0"/>
+          <a:ext cx="0" cy="0"/>
+          <a:chOff x="0" y="0"/>
+          <a:chExt cx="0" cy="0"/>
+        </a:xfrm>
+      </p:grpSpPr>
+      <p:sp>
+        <p:nvSpPr>
+          <p:cNvPr id="2" name="Slide Image Placeholder 1"/>
+          <p:cNvSpPr>
+            <a:spLocks noGrp="1" noRot="1" noChangeAspect="1"/>
+          </p:cNvSpPr>
+          <p:nvPr>
+            <p:ph type="sldImg"/>
+          </p:nvPr>
+        </p:nvSpPr>
+        <p:spPr/>
+      </p:sp>
+      <p:sp>
+        <p:nvSpPr>
+          <p:cNvPr id="3" name="Notes Placeholder 2"/>
+          <p:cNvSpPr>
+            <a:spLocks noGrp="1"/>
+          </p:cNvSpPr>
+          <p:nvPr>
+            <p:ph type="body" idx="1"/>
+          </p:nvPr>
+        </p:nvSpPr>
+        <p:spPr/>
+        <p:txBody>
+          <a:bodyPr/>
+          <a:lstStyle/>
+          <a:p>
+            <a:r>
+              <a:rPr lang="en-US" dirty="0"/>
+              <a:t>Three things to take away. One model, many renderers: what you see is what you paste. Accessibility you can hear and see, not only pass, for the author, the reader and the VoiceOver user. And privacy as a design decision: local by default, AI opt-in, and honest about which parts are a demonstration. Thank you. I'd be glad to go deeper into any part.</a:t>
+            </a:r>
+            <a:endParaRPr lang="en-US" dirty="0"/>
+          </a:p>
+        </p:txBody>
+      </p:sp>
+      <p:sp>
+        <p:nvSpPr>
+          <p:cNvPr id="4" name="Slide Number Placeholder 3"/>
+          <p:cNvSpPr>
+            <a:spLocks noGrp="1"/>
+          </p:cNvSpPr>
+          <p:nvPr>
+            <p:ph type="sldNum" sz="quarter" idx="10"/>
+          </p:nvPr>
+        </p:nvSpPr>
+        <p:spPr/>
+        <p:txBody>
+          <a:bodyPr/>
+          <a:lstStyle/>
+          <a:p>
+            <a:fld id="{F7021451-1387-4CA6-816F-3879F97B5CBC}" type="slidenum">
+              <a:rPr lang="en-US"/>
+              <a:t>15</a:t>
             </a:fld>
             <a:endParaRPr lang="en-US"/>
           </a:p>
@@ -1043,7 +1132,7 @@
           <a:p>
             <a:r>
               <a:rPr lang="en-US" dirty="0"/>
-              <a:t>Think of a program manager on a Thursday afternoon. The material for the weekly update is scattered: bullet points in a notes app, numbers in a spreadsheet, a chart as a screenshot. They assemble it for email, then again for Slack, then again for the wiki. And nothing ever asks: can a colleague with a screen reader read this? Does the status still make sense without red and green? Three problems: assembling, re-formatting, and accessibility arriving too late, or never.</a:t>
+              <a:t>Think of a program manager on a Thursday afternoon. The material for the weekly update is scattered: bullet points in a notes app, numbers in a spreadsheet, a chart as a screenshot. They assemble it for email, then again for Slack, then again for the wiki. And nothing ever asks: can a colleague with a screen reader read this? Does the status still make sense without red and green? Three problems: assembling, re-formatting, and accessibility arriving too late.</a:t>
             </a:r>
             <a:endParaRPr lang="en-US" dirty="0"/>
           </a:p>
@@ -1131,7 +1220,7 @@
           <a:p>
             <a:r>
               <a:rPr lang="en-US" dirty="0"/>
-              <a:t>This is Reporting Builder, a native Mac app in Swift and SwiftUI. On the left, your cards. In the middle, the card itself, and that is the editor: you click the title and type, as in Pages or Keynote. On the right, a Format inspector for what you can't see on the card: theme, layout, image descriptions, and the accessibility check. Why native rather than web? Copy and share are the product, and the Mac pasteboard can carry rich text, HTML and plain text at once. And accessibility is a platform feature here, not an add-on.</a:t>
+              <a:t>This is Reporting Builder, a native Mac app in Swift and SwiftUI. On the left, your cards. In the middle, the card itself, and that is the editor: you click the title and type, as in Pages or Keynote. On the right, a Format inspector for what you cannot see on the card: theme, layout, image descriptions, and the accessibility check. Why native rather than web? Copy and share are the product, and the Mac pasteboard carries rich text, HTML and plain text at once. Accessibility is a platform feature here, not an add-on.</a:t>
             </a:r>
             <a:endParaRPr lang="en-US" dirty="0"/>
           </a:p>
@@ -1307,7 +1396,7 @@
           <a:p>
             <a:r>
               <a:rPr lang="en-US" dirty="0"/>
-              <a:t>Three design principles. First: one model, many renderers. A card is a plain value type in a Swift package with no UI dependencies. Every output is a pure function of it: the canvas you edit, the PNG and PDF, inline-styled HTML for email, rich text for Mail and Notes, Markdown for Slack, plain text, even the spoken narration. That's why what you see is what you paste. It also makes a new destination cheap, and it lets the same code run without a window: a command-line tool renders and lints cards in CI.</a:t>
+              <a:t>Three design principles. The first: one model, many renderers. A card is a plain value type with no UI dependencies, and every output is a pure function of it: the canvas you edit, the PNG and the PDF, inline-styled HTML for email, rich text for Mail, Markdown for Slack, plain text, even the spoken narration. That is why what you see is what you paste. It also makes a new destination cheap, and it lets the same code run without a window.</a:t>
             </a:r>
             <a:endParaRPr lang="en-US" dirty="0"/>
           </a:p>
@@ -1395,7 +1484,7 @@
           <a:p>
             <a:r>
               <a:rPr lang="en-US" dirty="0"/>
-              <a:t>The second principle came from throwing my first interface away. Version one, on the left, was a form beside a live preview. It worked, but you described the card in one place and looked at it in another, and the card looked like a dashboard: capital-letter labels, coloured pills, boxed tiles. So I rebuilt it the way Pages and Keynote work. The card is the editor, and properties live in a Format inspector. The card became typographic: one large title, sentence-case headings, status as words beside a small indicator. Both versions are in the repository history, with the decision written down.</a:t>
+              <a:t>Here is the shape of it, because the shape is the argument. At the bottom is one Swift package, ReportCore, that imports nothing but Foundation: the model, the parsers, every renderer, the accessibility linter and the templates. Two things sit on top, and neither knows the other exists: the Mac app, and a command-line tool. Dependencies point one way, and that single rule buys three things. The package's ninety tests run in under a second, so the renderers and the linter stay cheap to change. The same code runs headless, which is how accessibility became a gate in the pipeline. And it already builds for iOS, so an iPad version is a target rather than a rewrite. Inside the app it is Swift 6 with strict concurrency: a card is a Sendable value type, the stores are main-actor observable objects, and the compiler checks it.</a:t>
             </a:r>
             <a:endParaRPr lang="en-US" dirty="0"/>
           </a:p>
@@ -1483,7 +1572,7 @@
           <a:p>
             <a:r>
               <a:rPr lang="en-US" dirty="0"/>
-              <a:t>The third principle is the one I care most about. Passing a checklist is the floor. Most people who write status reports don't use a screen reader, so they can't tell what their report is like for someone who does. So the app lets you experience it. Hear This Card reads the card in the order and words a screen reader uses: heading level one, list of three items, velocity forty-two, up five percent, positive. If an image has no description, you hear the gap. Colour Vision shows the card under the common colour-vision deficiencies. And the linter checks fourteen rules as you type, each mapped to a WCAG criterion. Some are about language: it flags "the items marked in red", and it notices an image that is really a picture of text.</a:t>
+              <a:t>The third principle is the one I care most about. Passing a checklist is the floor. Most people who write status reports do not use a screen reader, so they cannot tell what their report is like for someone who does. So the app lets you experience it. Hear This Card reads the card in the order and words a screen reader uses: heading level one, list of three items, velocity forty-two, up five percent, positive. If an image has no description, you hear the gap. Colour Vision shows the card under the common colour-vision deficiencies. And the linter checks fourteen rules as you type, each mapped to a WCAG criterion, including ones about language: it flags “the items marked in red”.</a:t>
             </a:r>
             <a:endParaRPr lang="en-US" dirty="0"/>
           </a:p>
@@ -1571,7 +1660,7 @@
           <a:p>
             <a:r>
               <a:rPr lang="en-US" dirty="0"/>
-              <a:t>Accessibility has two audiences. For people who receive a card: large print, which every export follows, and a tagged PDF with real text, headings and figure descriptions, so a screen reader treats it as a document, not a picture. For people who use the app with VoiceOver: a metric's trend is an Audio Graph, so you hear the line as pitch, as in Stocks and Health; each block has move and delete actions, and a rotor jumps between blocks. The app honours the system's contrast, colour, transparency and motion settings, and structural edits have named Undo steps.</a:t>
+              <a:t>Accessibility has two audiences. For people who receive a card: large print, which every export follows, and a tagged PDF with real text, headings and figure descriptions, so a screen reader treats it as a document rather than a picture. For people who use the app with VoiceOver: a metric's trend is an Audio Graph, so you hear the line as pitch; each block has move and delete actions, and a rotor jumps between blocks. The app honours the system's contrast, colour, transparency and motion settings.</a:t>
             </a:r>
             <a:endParaRPr lang="en-US" dirty="0"/>
           </a:p>
@@ -1659,7 +1748,7 @@
           <a:p>
             <a:r>
               <a:rPr lang="en-US" dirty="0"/>
-              <a:t>I added one AI feature, because it answers the first sentence of the brief: quickly assemble and structure project progress. You paste rough notes, and the model returns a structured report: title, status, highlights, metrics, risks, next steps. What matters is what happens to the reply. It's treated as untrusted input: parsed defensively, every list bounded, the status mapped onto an enum, and then it goes through the same accessibility linter. The prompt forbids inventing numbers, nothing is saved until you press Create, and the sheet tells you to check every number. Refine does the same for one text block: concise, formal, or fix grammar. I did not rebuild Writing Tools: with Apple Intelligence, the system provides them in every text field.</a:t>
+              <a:t>I added one AI feature, because it answers the first sentence of the brief: quickly assemble and structure project progress. You paste rough notes, and the model returns a structured report: title, status, highlights, metrics, risks, next steps. What matters is what happens to the reply. It is treated as untrusted input: parsed defensively, every list bounded, the status mapped onto an enum, and then it goes through the same accessibility linter. The prompt forbids inventing numbers, nothing is saved until you press Create, and the sheet tells you to check every number. Refine does the same for one text block. I did not rebuild Writing Tools: with Apple Intelligence the system already provides them in every text field.</a:t>
             </a:r>
             <a:endParaRPr lang="en-US" dirty="0"/>
           </a:p>
@@ -2937,7 +3026,7 @@
                 <a:ea typeface="Helvetica Neue" pitchFamily="34" charset="-122"/>
                 <a:cs typeface="Helvetica Neue" pitchFamily="34" charset="-120"/>
               </a:rPr>
-              <a:t>ENGINEERING</a:t>
+              <a:t>TESTING</a:t>
             </a:r>
             <a:endParaRPr lang="en-US" sz="1200" dirty="0"/>
           </a:p>
@@ -2976,7 +3065,7 @@
                 <a:ea typeface="Helvetica Neue" pitchFamily="34" charset="-122"/>
                 <a:cs typeface="Helvetica Neue" pitchFamily="34" charset="-120"/>
               </a:rPr>
-              <a:t>Built to be read, tested and changed</a:t>
+              <a:t>Fast where it is cheap, honest where it is not</a:t>
             </a:r>
             <a:endParaRPr lang="en-US" sz="3400" dirty="0"/>
           </a:p>
@@ -2990,12 +3079,12 @@
         </p:nvSpPr>
         <p:spPr>
           <a:xfrm>
-            <a:off x="640080" y="1508760"/>
-            <a:ext cx="2487854" cy="1783080"/>
+            <a:off x="640080" y="1417320"/>
+            <a:ext cx="2487854" cy="2240280"/>
           </a:xfrm>
           <a:prstGeom prst="roundRect">
             <a:avLst>
-              <a:gd name="adj" fmla="val 9231"/>
+              <a:gd name="adj" fmla="val 7347"/>
             </a:avLst>
           </a:prstGeom>
           <a:solidFill>
@@ -3024,24 +3113,24 @@
         </p:nvSpPr>
         <p:spPr>
           <a:xfrm>
-            <a:off x="914400" y="1691640"/>
-            <a:ext cx="1939214" cy="822960"/>
-          </a:xfrm>
-          <a:prstGeom prst="rect">
-            <a:avLst/>
-          </a:prstGeom>
-          <a:noFill/>
-          <a:ln/>
-        </p:spPr>
-        <p:txBody>
-          <a:bodyPr wrap="square" lIns="0" tIns="0" rIns="0" bIns="0" rtlCol="0" anchor="t"/>
-          <a:lstStyle/>
-          <a:p>
-            <a:pPr indent="0" marL="0">
-              <a:buNone/>
-            </a:pPr>
-            <a:r>
-              <a:rPr lang="en-US" sz="4400" b="1" dirty="0">
+            <a:off x="914400" y="1572768"/>
+            <a:ext cx="1939214" cy="685800"/>
+          </a:xfrm>
+          <a:prstGeom prst="rect">
+            <a:avLst/>
+          </a:prstGeom>
+          <a:noFill/>
+          <a:ln/>
+        </p:spPr>
+        <p:txBody>
+          <a:bodyPr wrap="square" lIns="0" tIns="0" rIns="0" bIns="0" rtlCol="0" anchor="t"/>
+          <a:lstStyle/>
+          <a:p>
+            <a:pPr indent="0" marL="0">
+              <a:buNone/>
+            </a:pPr>
+            <a:r>
+              <a:rPr lang="en-US" sz="4000" b="1" dirty="0">
                 <a:solidFill>
                   <a:srgbClr val="0066CC"/>
                 </a:solidFill>
@@ -3049,9 +3138,9 @@
                 <a:ea typeface="Helvetica Neue" pitchFamily="34" charset="-122"/>
                 <a:cs typeface="Helvetica Neue" pitchFamily="34" charset="-120"/>
               </a:rPr>
-              <a:t>137</a:t>
-            </a:r>
-            <a:endParaRPr lang="en-US" sz="4400" dirty="0"/>
+              <a:t>90</a:t>
+            </a:r>
+            <a:endParaRPr lang="en-US" sz="4000" dirty="0"/>
           </a:p>
         </p:txBody>
       </p:sp>
@@ -3063,24 +3152,63 @@
         </p:nvSpPr>
         <p:spPr>
           <a:xfrm>
-            <a:off x="914400" y="2560320"/>
-            <a:ext cx="1939214" cy="640080"/>
-          </a:xfrm>
-          <a:prstGeom prst="rect">
-            <a:avLst/>
-          </a:prstGeom>
-          <a:noFill/>
-          <a:ln/>
-        </p:spPr>
-        <p:txBody>
-          <a:bodyPr wrap="square" lIns="0" tIns="0" rIns="0" bIns="0" rtlCol="0" anchor="t"/>
-          <a:lstStyle/>
-          <a:p>
-            <a:pPr indent="0" marL="0">
-              <a:buNone/>
-            </a:pPr>
-            <a:r>
-              <a:rPr lang="en-US" sz="1300" dirty="0">
+            <a:off x="914400" y="2249424"/>
+            <a:ext cx="1939214" cy="320040"/>
+          </a:xfrm>
+          <a:prstGeom prst="rect">
+            <a:avLst/>
+          </a:prstGeom>
+          <a:noFill/>
+          <a:ln/>
+        </p:spPr>
+        <p:txBody>
+          <a:bodyPr wrap="square" lIns="0" tIns="0" rIns="0" bIns="0" rtlCol="0" anchor="t"/>
+          <a:lstStyle/>
+          <a:p>
+            <a:pPr indent="0" marL="0">
+              <a:buNone/>
+            </a:pPr>
+            <a:r>
+              <a:rPr lang="en-US" sz="1500" b="1" dirty="0">
+                <a:solidFill>
+                  <a:srgbClr val="1D1D1F"/>
+                </a:solidFill>
+                <a:latin typeface="Helvetica Neue" pitchFamily="34" charset="0"/>
+                <a:ea typeface="Helvetica Neue" pitchFamily="34" charset="-122"/>
+                <a:cs typeface="Helvetica Neue" pitchFamily="34" charset="-120"/>
+              </a:rPr>
+              <a:t>core unit tests</a:t>
+            </a:r>
+            <a:endParaRPr lang="en-US" sz="1500" dirty="0"/>
+          </a:p>
+        </p:txBody>
+      </p:sp>
+      <p:sp>
+        <p:nvSpPr>
+          <p:cNvPr id="9" name="Text 6"/>
+          <p:cNvSpPr txBox="1"/>
+          <p:nvPr/>
+        </p:nvSpPr>
+        <p:spPr>
+          <a:xfrm>
+            <a:off x="914400" y="2615184"/>
+            <a:ext cx="1939214" cy="914400"/>
+          </a:xfrm>
+          <a:prstGeom prst="rect">
+            <a:avLst/>
+          </a:prstGeom>
+          <a:noFill/>
+          <a:ln/>
+        </p:spPr>
+        <p:txBody>
+          <a:bodyPr wrap="square" lIns="0" tIns="0" rIns="0" bIns="0" rtlCol="0" anchor="t"/>
+          <a:lstStyle/>
+          <a:p>
+            <a:pPr indent="0" marL="0">
+              <a:buNone/>
+            </a:pPr>
+            <a:r>
+              <a:rPr lang="en-US" sz="1250" dirty="0">
                 <a:solidFill>
                   <a:srgbClr val="6E6E73"/>
                 </a:solidFill>
@@ -3088,26 +3216,26 @@
                 <a:ea typeface="Helvetica Neue" pitchFamily="34" charset="-122"/>
                 <a:cs typeface="Helvetica Neue" pitchFamily="34" charset="-120"/>
               </a:rPr>
-              <a:t>unit tests, plus 12 UI tests</a:t>
-            </a:r>
-            <a:endParaRPr lang="en-US" sz="1300" dirty="0"/>
-          </a:p>
-        </p:txBody>
-      </p:sp>
-      <p:sp>
-        <p:nvSpPr>
-          <p:cNvPr id="9" name="Shape 6"/>
+              <a:t>Parsers, renderers, contrast maths, the fourteen linter rules, the draft parser. Under one second.</a:t>
+            </a:r>
+            <a:endParaRPr lang="en-US" sz="1250" dirty="0"/>
+          </a:p>
+        </p:txBody>
+      </p:sp>
+      <p:sp>
+        <p:nvSpPr>
+          <p:cNvPr id="10" name="Shape 7"/>
           <p:cNvSpPr/>
           <p:nvPr/>
         </p:nvSpPr>
         <p:spPr>
           <a:xfrm>
-            <a:off x="3447974" y="1508760"/>
-            <a:ext cx="2487854" cy="1783080"/>
+            <a:off x="3447974" y="1417320"/>
+            <a:ext cx="2487854" cy="2240280"/>
           </a:xfrm>
           <a:prstGeom prst="roundRect">
             <a:avLst>
-              <a:gd name="adj" fmla="val 9231"/>
+              <a:gd name="adj" fmla="val 7347"/>
             </a:avLst>
           </a:prstGeom>
           <a:solidFill>
@@ -3130,30 +3258,30 @@
       </p:sp>
       <p:sp>
         <p:nvSpPr>
-          <p:cNvPr id="10" name="Text 7"/>
-          <p:cNvSpPr txBox="1"/>
-          <p:nvPr/>
-        </p:nvSpPr>
-        <p:spPr>
-          <a:xfrm>
-            <a:off x="3722294" y="1691640"/>
-            <a:ext cx="1939214" cy="822960"/>
-          </a:xfrm>
-          <a:prstGeom prst="rect">
-            <a:avLst/>
-          </a:prstGeom>
-          <a:noFill/>
-          <a:ln/>
-        </p:spPr>
-        <p:txBody>
-          <a:bodyPr wrap="square" lIns="0" tIns="0" rIns="0" bIns="0" rtlCol="0" anchor="t"/>
-          <a:lstStyle/>
-          <a:p>
-            <a:pPr indent="0" marL="0">
-              <a:buNone/>
-            </a:pPr>
-            <a:r>
-              <a:rPr lang="en-US" sz="4400" b="1" dirty="0">
+          <p:cNvPr id="11" name="Text 8"/>
+          <p:cNvSpPr txBox="1"/>
+          <p:nvPr/>
+        </p:nvSpPr>
+        <p:spPr>
+          <a:xfrm>
+            <a:off x="3722294" y="1572768"/>
+            <a:ext cx="1939214" cy="685800"/>
+          </a:xfrm>
+          <a:prstGeom prst="rect">
+            <a:avLst/>
+          </a:prstGeom>
+          <a:noFill/>
+          <a:ln/>
+        </p:spPr>
+        <p:txBody>
+          <a:bodyPr wrap="square" lIns="0" tIns="0" rIns="0" bIns="0" rtlCol="0" anchor="t"/>
+          <a:lstStyle/>
+          <a:p>
+            <a:pPr indent="0" marL="0">
+              <a:buNone/>
+            </a:pPr>
+            <a:r>
+              <a:rPr lang="en-US" sz="4000" b="1" dirty="0">
                 <a:solidFill>
                   <a:srgbClr val="0066CC"/>
                 </a:solidFill>
@@ -3161,38 +3289,77 @@
                 <a:ea typeface="Helvetica Neue" pitchFamily="34" charset="-122"/>
                 <a:cs typeface="Helvetica Neue" pitchFamily="34" charset="-120"/>
               </a:rPr>
-              <a:t>14</a:t>
-            </a:r>
-            <a:endParaRPr lang="en-US" sz="4400" dirty="0"/>
-          </a:p>
-        </p:txBody>
-      </p:sp>
-      <p:sp>
-        <p:nvSpPr>
-          <p:cNvPr id="11" name="Text 8"/>
-          <p:cNvSpPr txBox="1"/>
-          <p:nvPr/>
-        </p:nvSpPr>
-        <p:spPr>
-          <a:xfrm>
-            <a:off x="3722294" y="2560320"/>
-            <a:ext cx="1939214" cy="640080"/>
-          </a:xfrm>
-          <a:prstGeom prst="rect">
-            <a:avLst/>
-          </a:prstGeom>
-          <a:noFill/>
-          <a:ln/>
-        </p:spPr>
-        <p:txBody>
-          <a:bodyPr wrap="square" lIns="0" tIns="0" rIns="0" bIns="0" rtlCol="0" anchor="t"/>
-          <a:lstStyle/>
-          <a:p>
-            <a:pPr indent="0" marL="0">
-              <a:buNone/>
-            </a:pPr>
-            <a:r>
-              <a:rPr lang="en-US" sz="1300" dirty="0">
+              <a:t>47</a:t>
+            </a:r>
+            <a:endParaRPr lang="en-US" sz="4000" dirty="0"/>
+          </a:p>
+        </p:txBody>
+      </p:sp>
+      <p:sp>
+        <p:nvSpPr>
+          <p:cNvPr id="12" name="Text 9"/>
+          <p:cNvSpPr txBox="1"/>
+          <p:nvPr/>
+        </p:nvSpPr>
+        <p:spPr>
+          <a:xfrm>
+            <a:off x="3722294" y="2249424"/>
+            <a:ext cx="1939214" cy="320040"/>
+          </a:xfrm>
+          <a:prstGeom prst="rect">
+            <a:avLst/>
+          </a:prstGeom>
+          <a:noFill/>
+          <a:ln/>
+        </p:spPr>
+        <p:txBody>
+          <a:bodyPr wrap="square" lIns="0" tIns="0" rIns="0" bIns="0" rtlCol="0" anchor="t"/>
+          <a:lstStyle/>
+          <a:p>
+            <a:pPr indent="0" marL="0">
+              <a:buNone/>
+            </a:pPr>
+            <a:r>
+              <a:rPr lang="en-US" sz="1500" b="1" dirty="0">
+                <a:solidFill>
+                  <a:srgbClr val="1D1D1F"/>
+                </a:solidFill>
+                <a:latin typeface="Helvetica Neue" pitchFamily="34" charset="0"/>
+                <a:ea typeface="Helvetica Neue" pitchFamily="34" charset="-122"/>
+                <a:cs typeface="Helvetica Neue" pitchFamily="34" charset="-120"/>
+              </a:rPr>
+              <a:t>app unit tests</a:t>
+            </a:r>
+            <a:endParaRPr lang="en-US" sz="1500" dirty="0"/>
+          </a:p>
+        </p:txBody>
+      </p:sp>
+      <p:sp>
+        <p:nvSpPr>
+          <p:cNvPr id="13" name="Text 10"/>
+          <p:cNvSpPr txBox="1"/>
+          <p:nvPr/>
+        </p:nvSpPr>
+        <p:spPr>
+          <a:xfrm>
+            <a:off x="3722294" y="2615184"/>
+            <a:ext cx="1939214" cy="914400"/>
+          </a:xfrm>
+          <a:prstGeom prst="rect">
+            <a:avLst/>
+          </a:prstGeom>
+          <a:noFill/>
+          <a:ln/>
+        </p:spPr>
+        <p:txBody>
+          <a:bodyPr wrap="square" lIns="0" tIns="0" rIns="0" bIns="0" rtlCol="0" anchor="t"/>
+          <a:lstStyle/>
+          <a:p>
+            <a:pPr indent="0" marL="0">
+              <a:buNone/>
+            </a:pPr>
+            <a:r>
+              <a:rPr lang="en-US" sz="1250" dirty="0">
                 <a:solidFill>
                   <a:srgbClr val="6E6E73"/>
                 </a:solidFill>
@@ -3200,26 +3367,26 @@
                 <a:ea typeface="Helvetica Neue" pitchFamily="34" charset="-122"/>
                 <a:cs typeface="Helvetica Neue" pitchFamily="34" charset="-120"/>
               </a:rPr>
-              <a:t>accessibility rules, WCAG-mapped</a:t>
-            </a:r>
-            <a:endParaRPr lang="en-US" sz="1300" dirty="0"/>
-          </a:p>
-        </p:txBody>
-      </p:sp>
-      <p:sp>
-        <p:nvSpPr>
-          <p:cNvPr id="12" name="Shape 9"/>
+              <a:t>Store and undo, persistence, every export including the tagged PDF, pasteboard types, smart paste.</a:t>
+            </a:r>
+            <a:endParaRPr lang="en-US" sz="1250" dirty="0"/>
+          </a:p>
+        </p:txBody>
+      </p:sp>
+      <p:sp>
+        <p:nvSpPr>
+          <p:cNvPr id="14" name="Shape 11"/>
           <p:cNvSpPr/>
           <p:nvPr/>
         </p:nvSpPr>
         <p:spPr>
           <a:xfrm>
-            <a:off x="6255868" y="1508760"/>
-            <a:ext cx="2487854" cy="1783080"/>
+            <a:off x="6255868" y="1417320"/>
+            <a:ext cx="2487854" cy="2240280"/>
           </a:xfrm>
           <a:prstGeom prst="roundRect">
             <a:avLst>
-              <a:gd name="adj" fmla="val 9231"/>
+              <a:gd name="adj" fmla="val 7347"/>
             </a:avLst>
           </a:prstGeom>
           <a:solidFill>
@@ -3242,30 +3409,30 @@
       </p:sp>
       <p:sp>
         <p:nvSpPr>
-          <p:cNvPr id="13" name="Text 10"/>
-          <p:cNvSpPr txBox="1"/>
-          <p:nvPr/>
-        </p:nvSpPr>
-        <p:spPr>
-          <a:xfrm>
-            <a:off x="6530188" y="1691640"/>
-            <a:ext cx="1939214" cy="822960"/>
-          </a:xfrm>
-          <a:prstGeom prst="rect">
-            <a:avLst/>
-          </a:prstGeom>
-          <a:noFill/>
-          <a:ln/>
-        </p:spPr>
-        <p:txBody>
-          <a:bodyPr wrap="square" lIns="0" tIns="0" rIns="0" bIns="0" rtlCol="0" anchor="t"/>
-          <a:lstStyle/>
-          <a:p>
-            <a:pPr indent="0" marL="0">
-              <a:buNone/>
-            </a:pPr>
-            <a:r>
-              <a:rPr lang="en-US" sz="4400" b="1" dirty="0">
+          <p:cNvPr id="15" name="Text 12"/>
+          <p:cNvSpPr txBox="1"/>
+          <p:nvPr/>
+        </p:nvSpPr>
+        <p:spPr>
+          <a:xfrm>
+            <a:off x="6530188" y="1572768"/>
+            <a:ext cx="1939214" cy="685800"/>
+          </a:xfrm>
+          <a:prstGeom prst="rect">
+            <a:avLst/>
+          </a:prstGeom>
+          <a:noFill/>
+          <a:ln/>
+        </p:spPr>
+        <p:txBody>
+          <a:bodyPr wrap="square" lIns="0" tIns="0" rIns="0" bIns="0" rtlCol="0" anchor="t"/>
+          <a:lstStyle/>
+          <a:p>
+            <a:pPr indent="0" marL="0">
+              <a:buNone/>
+            </a:pPr>
+            <a:r>
+              <a:rPr lang="en-US" sz="4000" b="1" dirty="0">
                 <a:solidFill>
                   <a:srgbClr val="0066CC"/>
                 </a:solidFill>
@@ -3275,36 +3442,75 @@
               </a:rPr>
               <a:t>12</a:t>
             </a:r>
-            <a:endParaRPr lang="en-US" sz="4400" dirty="0"/>
-          </a:p>
-        </p:txBody>
-      </p:sp>
-      <p:sp>
-        <p:nvSpPr>
-          <p:cNvPr id="14" name="Text 11"/>
-          <p:cNvSpPr txBox="1"/>
-          <p:nvPr/>
-        </p:nvSpPr>
-        <p:spPr>
-          <a:xfrm>
-            <a:off x="6530188" y="2560320"/>
-            <a:ext cx="1939214" cy="640080"/>
-          </a:xfrm>
-          <a:prstGeom prst="rect">
-            <a:avLst/>
-          </a:prstGeom>
-          <a:noFill/>
-          <a:ln/>
-        </p:spPr>
-        <p:txBody>
-          <a:bodyPr wrap="square" lIns="0" tIns="0" rIns="0" bIns="0" rtlCol="0" anchor="t"/>
-          <a:lstStyle/>
-          <a:p>
-            <a:pPr indent="0" marL="0">
-              <a:buNone/>
-            </a:pPr>
-            <a:r>
-              <a:rPr lang="en-US" sz="1300" dirty="0">
+            <a:endParaRPr lang="en-US" sz="4000" dirty="0"/>
+          </a:p>
+        </p:txBody>
+      </p:sp>
+      <p:sp>
+        <p:nvSpPr>
+          <p:cNvPr id="16" name="Text 13"/>
+          <p:cNvSpPr txBox="1"/>
+          <p:nvPr/>
+        </p:nvSpPr>
+        <p:spPr>
+          <a:xfrm>
+            <a:off x="6530188" y="2249424"/>
+            <a:ext cx="1939214" cy="320040"/>
+          </a:xfrm>
+          <a:prstGeom prst="rect">
+            <a:avLst/>
+          </a:prstGeom>
+          <a:noFill/>
+          <a:ln/>
+        </p:spPr>
+        <p:txBody>
+          <a:bodyPr wrap="square" lIns="0" tIns="0" rIns="0" bIns="0" rtlCol="0" anchor="t"/>
+          <a:lstStyle/>
+          <a:p>
+            <a:pPr indent="0" marL="0">
+              <a:buNone/>
+            </a:pPr>
+            <a:r>
+              <a:rPr lang="en-US" sz="1500" b="1" dirty="0">
+                <a:solidFill>
+                  <a:srgbClr val="1D1D1F"/>
+                </a:solidFill>
+                <a:latin typeface="Helvetica Neue" pitchFamily="34" charset="0"/>
+                <a:ea typeface="Helvetica Neue" pitchFamily="34" charset="-122"/>
+                <a:cs typeface="Helvetica Neue" pitchFamily="34" charset="-120"/>
+              </a:rPr>
+              <a:t>UI tests</a:t>
+            </a:r>
+            <a:endParaRPr lang="en-US" sz="1500" dirty="0"/>
+          </a:p>
+        </p:txBody>
+      </p:sp>
+      <p:sp>
+        <p:nvSpPr>
+          <p:cNvPr id="17" name="Text 14"/>
+          <p:cNvSpPr txBox="1"/>
+          <p:nvPr/>
+        </p:nvSpPr>
+        <p:spPr>
+          <a:xfrm>
+            <a:off x="6530188" y="2615184"/>
+            <a:ext cx="1939214" cy="914400"/>
+          </a:xfrm>
+          <a:prstGeom prst="rect">
+            <a:avLst/>
+          </a:prstGeom>
+          <a:noFill/>
+          <a:ln/>
+        </p:spPr>
+        <p:txBody>
+          <a:bodyPr wrap="square" lIns="0" tIns="0" rIns="0" bIns="0" rtlCol="0" anchor="t"/>
+          <a:lstStyle/>
+          <a:p>
+            <a:pPr indent="0" marL="0">
+              <a:buNone/>
+            </a:pPr>
+            <a:r>
+              <a:rPr lang="en-US" sz="1250" dirty="0">
                 <a:solidFill>
                   <a:srgbClr val="6E6E73"/>
                 </a:solidFill>
@@ -3312,26 +3518,26 @@
                 <a:ea typeface="Helvetica Neue" pitchFamily="34" charset="-122"/>
                 <a:cs typeface="Helvetica Neue" pitchFamily="34" charset="-120"/>
               </a:rPr>
-              <a:t>architecture decision records</a:t>
-            </a:r>
-            <a:endParaRPr lang="en-US" sz="1300" dirty="0"/>
-          </a:p>
-        </p:txBody>
-      </p:sp>
-      <p:sp>
-        <p:nvSpPr>
-          <p:cNvPr id="15" name="Shape 12"/>
+              <a:t>Canvas, inspector, the undescribed image, Hear This Card, Colour Vision, drafting, and XCTest's accessibility audit.</a:t>
+            </a:r>
+            <a:endParaRPr lang="en-US" sz="1250" dirty="0"/>
+          </a:p>
+        </p:txBody>
+      </p:sp>
+      <p:sp>
+        <p:nvSpPr>
+          <p:cNvPr id="18" name="Shape 15"/>
           <p:cNvSpPr/>
           <p:nvPr/>
         </p:nvSpPr>
         <p:spPr>
           <a:xfrm>
-            <a:off x="9063761" y="1508760"/>
-            <a:ext cx="2487854" cy="1783080"/>
+            <a:off x="9063761" y="1417320"/>
+            <a:ext cx="2487854" cy="2240280"/>
           </a:xfrm>
           <a:prstGeom prst="roundRect">
             <a:avLst>
-              <a:gd name="adj" fmla="val 9231"/>
+              <a:gd name="adj" fmla="val 7347"/>
             </a:avLst>
           </a:prstGeom>
           <a:solidFill>
@@ -3354,30 +3560,30 @@
       </p:sp>
       <p:sp>
         <p:nvSpPr>
-          <p:cNvPr id="16" name="Text 13"/>
-          <p:cNvSpPr txBox="1"/>
-          <p:nvPr/>
-        </p:nvSpPr>
-        <p:spPr>
-          <a:xfrm>
-            <a:off x="9338081" y="1691640"/>
-            <a:ext cx="1939214" cy="822960"/>
-          </a:xfrm>
-          <a:prstGeom prst="rect">
-            <a:avLst/>
-          </a:prstGeom>
-          <a:noFill/>
-          <a:ln/>
-        </p:spPr>
-        <p:txBody>
-          <a:bodyPr wrap="square" lIns="0" tIns="0" rIns="0" bIns="0" rtlCol="0" anchor="t"/>
-          <a:lstStyle/>
-          <a:p>
-            <a:pPr indent="0" marL="0">
-              <a:buNone/>
-            </a:pPr>
-            <a:r>
-              <a:rPr lang="en-US" sz="4400" b="1" dirty="0">
+          <p:cNvPr id="19" name="Text 16"/>
+          <p:cNvSpPr txBox="1"/>
+          <p:nvPr/>
+        </p:nvSpPr>
+        <p:spPr>
+          <a:xfrm>
+            <a:off x="9338081" y="1572768"/>
+            <a:ext cx="1939214" cy="685800"/>
+          </a:xfrm>
+          <a:prstGeom prst="rect">
+            <a:avLst/>
+          </a:prstGeom>
+          <a:noFill/>
+          <a:ln/>
+        </p:spPr>
+        <p:txBody>
+          <a:bodyPr wrap="square" lIns="0" tIns="0" rIns="0" bIns="0" rtlCol="0" anchor="t"/>
+          <a:lstStyle/>
+          <a:p>
+            <a:pPr indent="0" marL="0">
+              <a:buNone/>
+            </a:pPr>
+            <a:r>
+              <a:rPr lang="en-US" sz="4000" b="1" dirty="0">
                 <a:solidFill>
                   <a:srgbClr val="0066CC"/>
                 </a:solidFill>
@@ -3385,38 +3591,77 @@
                 <a:ea typeface="Helvetica Neue" pitchFamily="34" charset="-122"/>
                 <a:cs typeface="Helvetica Neue" pitchFamily="34" charset="-120"/>
               </a:rPr>
-              <a:t>0</a:t>
-            </a:r>
-            <a:endParaRPr lang="en-US" sz="4400" dirty="0"/>
-          </a:p>
-        </p:txBody>
-      </p:sp>
-      <p:sp>
-        <p:nvSpPr>
-          <p:cNvPr id="17" name="Text 14"/>
-          <p:cNvSpPr txBox="1"/>
-          <p:nvPr/>
-        </p:nvSpPr>
-        <p:spPr>
-          <a:xfrm>
-            <a:off x="9338081" y="2560320"/>
-            <a:ext cx="1939214" cy="640080"/>
-          </a:xfrm>
-          <a:prstGeom prst="rect">
-            <a:avLst/>
-          </a:prstGeom>
-          <a:noFill/>
-          <a:ln/>
-        </p:spPr>
-        <p:txBody>
-          <a:bodyPr wrap="square" lIns="0" tIns="0" rIns="0" bIns="0" rtlCol="0" anchor="t"/>
-          <a:lstStyle/>
-          <a:p>
-            <a:pPr indent="0" marL="0">
-              <a:buNone/>
-            </a:pPr>
-            <a:r>
-              <a:rPr lang="en-US" sz="1300" dirty="0">
+              <a:t>2</a:t>
+            </a:r>
+            <a:endParaRPr lang="en-US" sz="4000" dirty="0"/>
+          </a:p>
+        </p:txBody>
+      </p:sp>
+      <p:sp>
+        <p:nvSpPr>
+          <p:cNvPr id="20" name="Text 17"/>
+          <p:cNvSpPr txBox="1"/>
+          <p:nvPr/>
+        </p:nvSpPr>
+        <p:spPr>
+          <a:xfrm>
+            <a:off x="9338081" y="2249424"/>
+            <a:ext cx="1939214" cy="320040"/>
+          </a:xfrm>
+          <a:prstGeom prst="rect">
+            <a:avLst/>
+          </a:prstGeom>
+          <a:noFill/>
+          <a:ln/>
+        </p:spPr>
+        <p:txBody>
+          <a:bodyPr wrap="square" lIns="0" tIns="0" rIns="0" bIns="0" rtlCol="0" anchor="t"/>
+          <a:lstStyle/>
+          <a:p>
+            <a:pPr indent="0" marL="0">
+              <a:buNone/>
+            </a:pPr>
+            <a:r>
+              <a:rPr lang="en-US" sz="1500" b="1" dirty="0">
+                <a:solidFill>
+                  <a:srgbClr val="1D1D1F"/>
+                </a:solidFill>
+                <a:latin typeface="Helvetica Neue" pitchFamily="34" charset="0"/>
+                <a:ea typeface="Helvetica Neue" pitchFamily="34" charset="-122"/>
+                <a:cs typeface="Helvetica Neue" pitchFamily="34" charset="-120"/>
+              </a:rPr>
+              <a:t>static checks</a:t>
+            </a:r>
+            <a:endParaRPr lang="en-US" sz="1500" dirty="0"/>
+          </a:p>
+        </p:txBody>
+      </p:sp>
+      <p:sp>
+        <p:nvSpPr>
+          <p:cNvPr id="21" name="Text 18"/>
+          <p:cNvSpPr txBox="1"/>
+          <p:nvPr/>
+        </p:nvSpPr>
+        <p:spPr>
+          <a:xfrm>
+            <a:off x="9338081" y="2615184"/>
+            <a:ext cx="1939214" cy="914400"/>
+          </a:xfrm>
+          <a:prstGeom prst="rect">
+            <a:avLst/>
+          </a:prstGeom>
+          <a:noFill/>
+          <a:ln/>
+        </p:spPr>
+        <p:txBody>
+          <a:bodyPr wrap="square" lIns="0" tIns="0" rIns="0" bIns="0" rtlCol="0" anchor="t"/>
+          <a:lstStyle/>
+          <a:p>
+            <a:pPr indent="0" marL="0">
+              <a:buNone/>
+            </a:pPr>
+            <a:r>
+              <a:rPr lang="en-US" sz="1250" dirty="0">
                 <a:solidFill>
                   <a:srgbClr val="6E6E73"/>
                 </a:solidFill>
@@ -3424,26 +3669,26 @@
                 <a:ea typeface="Helvetica Neue" pitchFamily="34" charset="-122"/>
                 <a:cs typeface="Helvetica Neue" pitchFamily="34" charset="-120"/>
               </a:rPr>
-              <a:t>third-party dependencies, lint warnings</a:t>
-            </a:r>
-            <a:endParaRPr lang="en-US" sz="1300" dirty="0"/>
-          </a:p>
-        </p:txBody>
-      </p:sp>
-      <p:sp>
-        <p:nvSpPr>
-          <p:cNvPr id="18" name="Shape 15"/>
+              <a:t>SwiftLint and SwiftFormat, clean, on every push alongside the tests.</a:t>
+            </a:r>
+            <a:endParaRPr lang="en-US" sz="1250" dirty="0"/>
+          </a:p>
+        </p:txBody>
+      </p:sp>
+      <p:sp>
+        <p:nvSpPr>
+          <p:cNvPr id="22" name="Shape 19"/>
           <p:cNvSpPr/>
           <p:nvPr/>
         </p:nvSpPr>
         <p:spPr>
           <a:xfrm>
-            <a:off x="640080" y="3611880"/>
-            <a:ext cx="5227168" cy="2651760"/>
+            <a:off x="640080" y="3886200"/>
+            <a:ext cx="5227168" cy="2377440"/>
           </a:xfrm>
           <a:prstGeom prst="roundRect">
             <a:avLst>
-              <a:gd name="adj" fmla="val 6207"/>
+              <a:gd name="adj" fmla="val 6923"/>
             </a:avLst>
           </a:prstGeom>
           <a:solidFill>
@@ -3466,13 +3711,13 @@
       </p:sp>
       <p:sp>
         <p:nvSpPr>
-          <p:cNvPr id="19" name="Text 16"/>
-          <p:cNvSpPr txBox="1"/>
-          <p:nvPr/>
-        </p:nvSpPr>
-        <p:spPr>
-          <a:xfrm>
-            <a:off x="1005840" y="3794760"/>
+          <p:cNvPr id="23" name="Text 20"/>
+          <p:cNvSpPr txBox="1"/>
+          <p:nvPr/>
+        </p:nvSpPr>
+        <p:spPr>
+          <a:xfrm>
+            <a:off x="1005840" y="4069080"/>
             <a:ext cx="4495648" cy="365760"/>
           </a:xfrm>
           <a:prstGeom prst="rect">
@@ -3489,30 +3734,30 @@
               <a:buNone/>
             </a:pPr>
             <a:r>
-              <a:rPr lang="en-US" sz="1300" b="1" dirty="0">
-                <a:solidFill>
-                  <a:srgbClr val="6E6E73"/>
-                </a:solidFill>
-                <a:latin typeface="Helvetica Neue" pitchFamily="34" charset="0"/>
-                <a:ea typeface="Helvetica Neue" pitchFamily="34" charset="-122"/>
-                <a:cs typeface="Helvetica Neue" pitchFamily="34" charset="-120"/>
-              </a:rPr>
-              <a:t>Code</a:t>
-            </a:r>
-            <a:endParaRPr lang="en-US" sz="1300" dirty="0"/>
-          </a:p>
-        </p:txBody>
-      </p:sp>
-      <p:sp>
-        <p:nvSpPr>
-          <p:cNvPr id="20" name="Text 17"/>
-          <p:cNvSpPr txBox="1"/>
-          <p:nvPr/>
-        </p:nvSpPr>
-        <p:spPr>
-          <a:xfrm>
-            <a:off x="1005840" y="4206240"/>
-            <a:ext cx="4495648" cy="2011680"/>
+              <a:rPr lang="en-US" sz="1700" b="1" dirty="0">
+                <a:solidFill>
+                  <a:srgbClr val="1D1D1F"/>
+                </a:solidFill>
+                <a:latin typeface="Helvetica Neue" pitchFamily="34" charset="0"/>
+                <a:ea typeface="Helvetica Neue" pitchFamily="34" charset="-122"/>
+                <a:cs typeface="Helvetica Neue" pitchFamily="34" charset="-120"/>
+              </a:rPr>
+              <a:t>Kept deterministic</a:t>
+            </a:r>
+            <a:endParaRPr lang="en-US" sz="1700" dirty="0"/>
+          </a:p>
+        </p:txBody>
+      </p:sp>
+      <p:sp>
+        <p:nvSpPr>
+          <p:cNvPr id="24" name="Text 21"/>
+          <p:cNvSpPr txBox="1"/>
+          <p:nvPr/>
+        </p:nvSpPr>
+        <p:spPr>
+          <a:xfrm>
+            <a:off x="1005840" y="4462272"/>
+            <a:ext cx="4495648" cy="1783080"/>
           </a:xfrm>
           <a:prstGeom prst="rect">
             <a:avLst/>
@@ -3526,13 +3771,13 @@
           <a:p>
             <a:pPr marL="203200" indent="-203200">
               <a:spcAft>
-                <a:spcPts val="600"/>
+                <a:spcPts val="400"/>
               </a:spcAft>
               <a:buSzPct val="100000"/>
               <a:buChar char="•"/>
             </a:pPr>
             <a:r>
-              <a:rPr lang="en-US" sz="1400" dirty="0">
+              <a:rPr lang="en-US" sz="1250" dirty="0">
                 <a:solidFill>
                   <a:srgbClr val="1D1D1F"/>
                 </a:solidFill>
@@ -3540,20 +3785,20 @@
                 <a:ea typeface="Helvetica Neue" pitchFamily="34" charset="-122"/>
                 <a:cs typeface="Helvetica Neue" pitchFamily="34" charset="-120"/>
               </a:rPr>
-              <a:t>ReportCore package (no UI imports) + app layer</a:t>
-            </a:r>
-            <a:endParaRPr lang="en-US" sz="1400" dirty="0"/>
+              <a:t>Never the real clipboard, network or files: named pasteboards, temporary directories, an in-memory store, a stubbed client</a:t>
+            </a:r>
+            <a:endParaRPr lang="en-US" sz="1250" dirty="0"/>
           </a:p>
           <a:p>
             <a:pPr marL="203200" indent="-203200">
               <a:spcAft>
-                <a:spcPts val="600"/>
+                <a:spcPts val="400"/>
               </a:spcAft>
               <a:buSzPct val="100000"/>
               <a:buChar char="•"/>
             </a:pPr>
             <a:r>
-              <a:rPr lang="en-US" sz="1400" dirty="0">
+              <a:rPr lang="en-US" sz="1250" dirty="0">
                 <a:solidFill>
                   <a:srgbClr val="1D1D1F"/>
                 </a:solidFill>
@@ -3561,20 +3806,20 @@
                 <a:ea typeface="Helvetica Neue" pitchFamily="34" charset="-122"/>
                 <a:cs typeface="Helvetica Neue" pitchFamily="34" charset="-120"/>
               </a:rPr>
-              <a:t>Swift 6 language mode, strict concurrency</a:t>
-            </a:r>
-            <a:endParaRPr lang="en-US" sz="1400" dirty="0"/>
+              <a:t>One exception, on purpose: the Copy for Email test uses the real pasteboard, because that is what it tests</a:t>
+            </a:r>
+            <a:endParaRPr lang="en-US" sz="1250" dirty="0"/>
           </a:p>
           <a:p>
             <a:pPr marL="203200" indent="-203200">
               <a:spcAft>
-                <a:spcPts val="600"/>
+                <a:spcPts val="400"/>
               </a:spcAft>
               <a:buSzPct val="100000"/>
               <a:buChar char="•"/>
             </a:pPr>
             <a:r>
-              <a:rPr lang="en-US" sz="1400" dirty="0">
+              <a:rPr lang="en-US" sz="1250" dirty="0">
                 <a:solidFill>
                   <a:srgbClr val="1D1D1F"/>
                 </a:solidFill>
@@ -3582,20 +3827,20 @@
                 <a:ea typeface="Helvetica Neue" pitchFamily="34" charset="-122"/>
                 <a:cs typeface="Helvetica Neue" pitchFamily="34" charset="-120"/>
               </a:rPr>
-              <a:t>Documented public API; comments say why, not what</a:t>
-            </a:r>
-            <a:endParaRPr lang="en-US" sz="1400" dirty="0"/>
+              <a:t>Dates and locale are injected, so a footer never depends on the test machine</a:t>
+            </a:r>
+            <a:endParaRPr lang="en-US" sz="1250" dirty="0"/>
           </a:p>
           <a:p>
             <a:pPr marL="203200" indent="-203200">
               <a:spcAft>
-                <a:spcPts val="600"/>
+                <a:spcPts val="400"/>
               </a:spcAft>
               <a:buSzPct val="100000"/>
               <a:buChar char="•"/>
             </a:pPr>
             <a:r>
-              <a:rPr lang="en-US" sz="1400" dirty="0">
+              <a:rPr lang="en-US" sz="1250" dirty="0">
                 <a:solidFill>
                   <a:srgbClr val="1D1D1F"/>
                 </a:solidFill>
@@ -3603,47 +3848,26 @@
                 <a:ea typeface="Helvetica Neue" pitchFamily="34" charset="-122"/>
                 <a:cs typeface="Helvetica Neue" pitchFamily="34" charset="-120"/>
               </a:rPr>
-              <a:t>Model replies are untrusted input: parsed, bounded, linted</a:t>
-            </a:r>
-            <a:endParaRPr lang="en-US" sz="1400" dirty="0"/>
-          </a:p>
-          <a:p>
-            <a:pPr marL="203200" indent="-203200">
-              <a:spcAft>
-                <a:spcPts val="600"/>
-              </a:spcAft>
-              <a:buSzPct val="100000"/>
-              <a:buChar char="•"/>
-            </a:pPr>
-            <a:r>
-              <a:rPr lang="en-US" sz="1400" dirty="0">
-                <a:solidFill>
-                  <a:srgbClr val="1D1D1F"/>
-                </a:solidFill>
-                <a:latin typeface="Helvetica Neue" pitchFamily="34" charset="0"/>
-                <a:ea typeface="Helvetica Neue" pitchFamily="34" charset="-122"/>
-                <a:cs typeface="Helvetica Neue" pitchFamily="34" charset="-120"/>
-              </a:rPr>
-              <a:t>Conventional commits; both UI versions in history</a:t>
-            </a:r>
-            <a:endParaRPr lang="en-US" sz="1400" dirty="0"/>
-          </a:p>
-        </p:txBody>
-      </p:sp>
-      <p:sp>
-        <p:nvSpPr>
-          <p:cNvPr id="21" name="Shape 18"/>
+              <a:t>Launch arguments open the app in a known state: a seeded card, a missing description, a canned model</a:t>
+            </a:r>
+            <a:endParaRPr lang="en-US" sz="1250" dirty="0"/>
+          </a:p>
+        </p:txBody>
+      </p:sp>
+      <p:sp>
+        <p:nvSpPr>
+          <p:cNvPr id="25" name="Shape 22"/>
           <p:cNvSpPr/>
           <p:nvPr/>
         </p:nvSpPr>
         <p:spPr>
           <a:xfrm>
-            <a:off x="6324448" y="3611880"/>
-            <a:ext cx="5227168" cy="2651760"/>
+            <a:off x="6324448" y="3886200"/>
+            <a:ext cx="5227168" cy="2377440"/>
           </a:xfrm>
           <a:prstGeom prst="roundRect">
             <a:avLst>
-              <a:gd name="adj" fmla="val 6207"/>
+              <a:gd name="adj" fmla="val 6923"/>
             </a:avLst>
           </a:prstGeom>
           <a:solidFill>
@@ -3666,13 +3890,13 @@
       </p:sp>
       <p:sp>
         <p:nvSpPr>
-          <p:cNvPr id="22" name="Text 19"/>
-          <p:cNvSpPr txBox="1"/>
-          <p:nvPr/>
-        </p:nvSpPr>
-        <p:spPr>
-          <a:xfrm>
-            <a:off x="6690208" y="3794760"/>
+          <p:cNvPr id="26" name="Text 23"/>
+          <p:cNvSpPr txBox="1"/>
+          <p:nvPr/>
+        </p:nvSpPr>
+        <p:spPr>
+          <a:xfrm>
+            <a:off x="6690208" y="4069080"/>
             <a:ext cx="4495648" cy="365760"/>
           </a:xfrm>
           <a:prstGeom prst="rect">
@@ -3689,30 +3913,30 @@
               <a:buNone/>
             </a:pPr>
             <a:r>
-              <a:rPr lang="en-US" sz="1300" b="1" dirty="0">
-                <a:solidFill>
-                  <a:srgbClr val="6E6E73"/>
-                </a:solidFill>
-                <a:latin typeface="Helvetica Neue" pitchFamily="34" charset="0"/>
-                <a:ea typeface="Helvetica Neue" pitchFamily="34" charset="-122"/>
-                <a:cs typeface="Helvetica Neue" pitchFamily="34" charset="-120"/>
-              </a:rPr>
-              <a:t>Configuration, testing, CI</a:t>
-            </a:r>
-            <a:endParaRPr lang="en-US" sz="1300" dirty="0"/>
-          </a:p>
-        </p:txBody>
-      </p:sp>
-      <p:sp>
-        <p:nvSpPr>
-          <p:cNvPr id="23" name="Text 20"/>
-          <p:cNvSpPr txBox="1"/>
-          <p:nvPr/>
-        </p:nvSpPr>
-        <p:spPr>
-          <a:xfrm>
-            <a:off x="6690208" y="4206240"/>
-            <a:ext cx="4495648" cy="2011680"/>
+              <a:rPr lang="en-US" sz="1700" b="1" dirty="0">
+                <a:solidFill>
+                  <a:srgbClr val="1D1D1F"/>
+                </a:solidFill>
+                <a:latin typeface="Helvetica Neue" pitchFamily="34" charset="0"/>
+                <a:ea typeface="Helvetica Neue" pitchFamily="34" charset="-122"/>
+                <a:cs typeface="Helvetica Neue" pitchFamily="34" charset="-120"/>
+              </a:rPr>
+              <a:t>Not covered by a test, and said so</a:t>
+            </a:r>
+            <a:endParaRPr lang="en-US" sz="1700" dirty="0"/>
+          </a:p>
+        </p:txBody>
+      </p:sp>
+      <p:sp>
+        <p:nvSpPr>
+          <p:cNvPr id="27" name="Text 24"/>
+          <p:cNvSpPr txBox="1"/>
+          <p:nvPr/>
+        </p:nvSpPr>
+        <p:spPr>
+          <a:xfrm>
+            <a:off x="6690208" y="4462272"/>
+            <a:ext cx="4495648" cy="1783080"/>
           </a:xfrm>
           <a:prstGeom prst="rect">
             <a:avLst/>
@@ -3726,13 +3950,13 @@
           <a:p>
             <a:pPr marL="203200" indent="-203200">
               <a:spcAft>
-                <a:spcPts val="600"/>
+                <a:spcPts val="400"/>
               </a:spcAft>
               <a:buSzPct val="100000"/>
               <a:buChar char="•"/>
             </a:pPr>
             <a:r>
-              <a:rPr lang="en-US" sz="1400" dirty="0">
+              <a:rPr lang="en-US" sz="1250" dirty="0">
                 <a:solidFill>
                   <a:srgbClr val="1D1D1F"/>
                 </a:solidFill>
@@ -3740,20 +3964,20 @@
                 <a:ea typeface="Helvetica Neue" pitchFamily="34" charset="-122"/>
                 <a:cs typeface="Helvetica Neue" pitchFamily="34" charset="-120"/>
               </a:rPr>
-              <a:t>xcconfig versions and feature flags; XcodeGen project from YAML</a:t>
-            </a:r>
-            <a:endParaRPr lang="en-US" sz="1400" dirty="0"/>
+              <a:t>How Mail and Slack actually render a paste: each destination is marked verified or expected in the docs</a:t>
+            </a:r>
+            <a:endParaRPr lang="en-US" sz="1250" dirty="0"/>
           </a:p>
           <a:p>
             <a:pPr marL="203200" indent="-203200">
               <a:spcAft>
-                <a:spcPts val="600"/>
+                <a:spcPts val="400"/>
               </a:spcAft>
               <a:buSzPct val="100000"/>
               <a:buChar char="•"/>
             </a:pPr>
             <a:r>
-              <a:rPr lang="en-US" sz="1400" dirty="0">
+              <a:rPr lang="en-US" sz="1250" dirty="0">
                 <a:solidFill>
                   <a:srgbClr val="1D1D1F"/>
                 </a:solidFill>
@@ -3761,20 +3985,20 @@
                 <a:ea typeface="Helvetica Neue" pitchFamily="34" charset="-122"/>
                 <a:cs typeface="Helvetica Neue" pitchFamily="34" charset="-120"/>
               </a:rPr>
-              <a:t>Swift Testing + XCUITest with the accessibility audit</a:t>
-            </a:r>
-            <a:endParaRPr lang="en-US" sz="1400" dirty="0"/>
+              <a:t>The VoiceOver experience: the data is tested, the experience needs a person who uses it daily</a:t>
+            </a:r>
+            <a:endParaRPr lang="en-US" sz="1250" dirty="0"/>
           </a:p>
           <a:p>
             <a:pPr marL="203200" indent="-203200">
               <a:spcAft>
-                <a:spcPts val="600"/>
+                <a:spcPts val="400"/>
               </a:spcAft>
               <a:buSzPct val="100000"/>
               <a:buChar char="•"/>
             </a:pPr>
             <a:r>
-              <a:rPr lang="en-US" sz="1400" dirty="0">
+              <a:rPr lang="en-US" sz="1250" dirty="0">
                 <a:solidFill>
                   <a:srgbClr val="1D1D1F"/>
                 </a:solidFill>
@@ -3782,20 +4006,20 @@
                 <a:ea typeface="Helvetica Neue" pitchFamily="34" charset="-122"/>
                 <a:cs typeface="Helvetica Neue" pitchFamily="34" charset="-120"/>
               </a:rPr>
-              <a:t>Unit tests never touch the real clipboard, network or user data</a:t>
-            </a:r>
-            <a:endParaRPr lang="en-US" sz="1400" dirty="0"/>
+              <a:t>PDF/UA conformance: the structure tree is checked, a validator is not run</a:t>
+            </a:r>
+            <a:endParaRPr lang="en-US" sz="1250" dirty="0"/>
           </a:p>
           <a:p>
             <a:pPr marL="203200" indent="-203200">
               <a:spcAft>
-                <a:spcPts val="600"/>
+                <a:spcPts val="400"/>
               </a:spcAft>
               <a:buSzPct val="100000"/>
               <a:buChar char="•"/>
             </a:pPr>
             <a:r>
-              <a:rPr lang="en-US" sz="1400" dirty="0">
+              <a:rPr lang="en-US" sz="1250" dirty="0">
                 <a:solidFill>
                   <a:srgbClr val="1D1D1F"/>
                 </a:solidFill>
@@ -3803,9 +4027,9 @@
                 <a:ea typeface="Helvetica Neue" pitchFamily="34" charset="-122"/>
                 <a:cs typeface="Helvetica Neue" pitchFamily="34" charset="-120"/>
               </a:rPr>
-              <a:t>GitHub Actions: tests, SwiftLint, SwiftFormat, CLI smoke test</a:t>
-            </a:r>
-            <a:endParaRPr lang="en-US" sz="1400" dirty="0"/>
+              <a:t>Each of these sits in the documentation next to the feature it limits</a:t>
+            </a:r>
+            <a:endParaRPr lang="en-US" sz="1250" dirty="0"/>
           </a:p>
         </p:txBody>
       </p:sp>
@@ -3913,7 +4137,7 @@
                 <a:ea typeface="Helvetica Neue" pitchFamily="34" charset="-122"/>
                 <a:cs typeface="Helvetica Neue" pitchFamily="34" charset="-120"/>
               </a:rPr>
-              <a:t>CLOUD AND DELIVERY</a:t>
+              <a:t>ENGINEERING</a:t>
             </a:r>
             <a:endParaRPr lang="en-US" sz="1200" dirty="0"/>
           </a:p>
@@ -3952,7 +4176,7 @@
                 <a:ea typeface="Helvetica Neue" pitchFamily="34" charset="-122"/>
                 <a:cs typeface="Helvetica Neue" pitchFamily="34" charset="-120"/>
               </a:rPr>
-              <a:t>The cloud carries the software, not your data</a:t>
+              <a:t>Built to be read and changed</a:t>
             </a:r>
             <a:endParaRPr lang="en-US" sz="3400" dirty="0"/>
           </a:p>
@@ -3966,12 +4190,12 @@
         </p:nvSpPr>
         <p:spPr>
           <a:xfrm>
-            <a:off x="640080" y="1600200"/>
-            <a:ext cx="2350694" cy="1234440"/>
+            <a:off x="640080" y="1508760"/>
+            <a:ext cx="2487854" cy="1783080"/>
           </a:xfrm>
           <a:prstGeom prst="roundRect">
             <a:avLst>
-              <a:gd name="adj" fmla="val 13333"/>
+              <a:gd name="adj" fmla="val 9231"/>
             </a:avLst>
           </a:prstGeom>
           <a:solidFill>
@@ -4000,34 +4224,34 @@
         </p:nvSpPr>
         <p:spPr>
           <a:xfrm>
-            <a:off x="868680" y="1810512"/>
-            <a:ext cx="1893494" cy="411480"/>
-          </a:xfrm>
-          <a:prstGeom prst="rect">
-            <a:avLst/>
-          </a:prstGeom>
-          <a:noFill/>
-          <a:ln/>
-        </p:spPr>
-        <p:txBody>
-          <a:bodyPr wrap="square" lIns="0" tIns="0" rIns="0" bIns="0" rtlCol="0" anchor="t"/>
-          <a:lstStyle/>
-          <a:p>
-            <a:pPr indent="0" marL="0">
-              <a:buNone/>
-            </a:pPr>
-            <a:r>
-              <a:rPr lang="en-US" sz="1600" b="1" dirty="0">
-                <a:solidFill>
-                  <a:srgbClr val="1D1D1F"/>
-                </a:solidFill>
-                <a:latin typeface="Helvetica Neue" pitchFamily="34" charset="0"/>
-                <a:ea typeface="Helvetica Neue" pitchFamily="34" charset="-122"/>
-                <a:cs typeface="Helvetica Neue" pitchFamily="34" charset="-120"/>
-              </a:rPr>
-              <a:t>git push</a:t>
-            </a:r>
-            <a:endParaRPr lang="en-US" sz="1600" dirty="0"/>
+            <a:off x="914400" y="1691640"/>
+            <a:ext cx="1939214" cy="822960"/>
+          </a:xfrm>
+          <a:prstGeom prst="rect">
+            <a:avLst/>
+          </a:prstGeom>
+          <a:noFill/>
+          <a:ln/>
+        </p:spPr>
+        <p:txBody>
+          <a:bodyPr wrap="square" lIns="0" tIns="0" rIns="0" bIns="0" rtlCol="0" anchor="t"/>
+          <a:lstStyle/>
+          <a:p>
+            <a:pPr indent="0" marL="0">
+              <a:buNone/>
+            </a:pPr>
+            <a:r>
+              <a:rPr lang="en-US" sz="4400" b="1" dirty="0">
+                <a:solidFill>
+                  <a:srgbClr val="0066CC"/>
+                </a:solidFill>
+                <a:latin typeface="Helvetica Neue" pitchFamily="34" charset="0"/>
+                <a:ea typeface="Helvetica Neue" pitchFamily="34" charset="-122"/>
+                <a:cs typeface="Helvetica Neue" pitchFamily="34" charset="-120"/>
+              </a:rPr>
+              <a:t>0</a:t>
+            </a:r>
+            <a:endParaRPr lang="en-US" sz="4400" dirty="0"/>
           </a:p>
         </p:txBody>
       </p:sp>
@@ -4039,24 +4263,24 @@
         </p:nvSpPr>
         <p:spPr>
           <a:xfrm>
-            <a:off x="868680" y="2267712"/>
-            <a:ext cx="1893494" cy="365760"/>
-          </a:xfrm>
-          <a:prstGeom prst="rect">
-            <a:avLst/>
-          </a:prstGeom>
-          <a:noFill/>
-          <a:ln/>
-        </p:spPr>
-        <p:txBody>
-          <a:bodyPr wrap="square" lIns="0" tIns="0" rIns="0" bIns="0" rtlCol="0" anchor="t"/>
-          <a:lstStyle/>
-          <a:p>
-            <a:pPr indent="0" marL="0">
-              <a:buNone/>
-            </a:pPr>
-            <a:r>
-              <a:rPr lang="en-US" sz="1250" dirty="0">
+            <a:off x="914400" y="2560320"/>
+            <a:ext cx="1939214" cy="640080"/>
+          </a:xfrm>
+          <a:prstGeom prst="rect">
+            <a:avLst/>
+          </a:prstGeom>
+          <a:noFill/>
+          <a:ln/>
+        </p:spPr>
+        <p:txBody>
+          <a:bodyPr wrap="square" lIns="0" tIns="0" rIns="0" bIns="0" rtlCol="0" anchor="t"/>
+          <a:lstStyle/>
+          <a:p>
+            <a:pPr indent="0" marL="0">
+              <a:buNone/>
+            </a:pPr>
+            <a:r>
+              <a:rPr lang="en-US" sz="1300" dirty="0">
                 <a:solidFill>
                   <a:srgbClr val="6E6E73"/>
                 </a:solidFill>
@@ -4064,65 +4288,26 @@
                 <a:ea typeface="Helvetica Neue" pitchFamily="34" charset="-122"/>
                 <a:cs typeface="Helvetica Neue" pitchFamily="34" charset="-120"/>
               </a:rPr>
-              <a:t>every commit</a:t>
-            </a:r>
-            <a:endParaRPr lang="en-US" sz="1250" dirty="0"/>
-          </a:p>
-        </p:txBody>
-      </p:sp>
-      <p:sp>
-        <p:nvSpPr>
-          <p:cNvPr id="9" name="Text 6"/>
-          <p:cNvSpPr txBox="1"/>
-          <p:nvPr/>
-        </p:nvSpPr>
-        <p:spPr>
-          <a:xfrm>
-            <a:off x="3063926" y="1920240"/>
-            <a:ext cx="365760" cy="457200"/>
-          </a:xfrm>
-          <a:prstGeom prst="rect">
-            <a:avLst/>
-          </a:prstGeom>
-          <a:noFill/>
-          <a:ln/>
-        </p:spPr>
-        <p:txBody>
-          <a:bodyPr wrap="square" lIns="0" tIns="0" rIns="0" bIns="0" rtlCol="0" anchor="t"/>
-          <a:lstStyle/>
-          <a:p>
-            <a:pPr algn="ctr" indent="0" marL="0">
-              <a:buNone/>
-            </a:pPr>
-            <a:r>
-              <a:rPr lang="en-US" sz="2200" dirty="0">
-                <a:solidFill>
-                  <a:srgbClr val="6E6E73"/>
-                </a:solidFill>
-                <a:latin typeface="Helvetica Neue" pitchFamily="34" charset="0"/>
-                <a:ea typeface="Helvetica Neue" pitchFamily="34" charset="-122"/>
-                <a:cs typeface="Helvetica Neue" pitchFamily="34" charset="-120"/>
-              </a:rPr>
-              <a:t>→</a:t>
-            </a:r>
-            <a:endParaRPr lang="en-US" sz="2200" dirty="0"/>
-          </a:p>
-        </p:txBody>
-      </p:sp>
-      <p:sp>
-        <p:nvSpPr>
-          <p:cNvPr id="10" name="Shape 7"/>
+              <a:t>third-party dependencies</a:t>
+            </a:r>
+            <a:endParaRPr lang="en-US" sz="1300" dirty="0"/>
+          </a:p>
+        </p:txBody>
+      </p:sp>
+      <p:sp>
+        <p:nvSpPr>
+          <p:cNvPr id="9" name="Shape 6"/>
           <p:cNvSpPr/>
           <p:nvPr/>
         </p:nvSpPr>
         <p:spPr>
           <a:xfrm>
-            <a:off x="3493694" y="1600200"/>
-            <a:ext cx="2350694" cy="1234440"/>
+            <a:off x="3447974" y="1508760"/>
+            <a:ext cx="2487854" cy="1783080"/>
           </a:xfrm>
           <a:prstGeom prst="roundRect">
             <a:avLst>
-              <a:gd name="adj" fmla="val 13333"/>
+              <a:gd name="adj" fmla="val 9231"/>
             </a:avLst>
           </a:prstGeom>
           <a:solidFill>
@@ -4145,69 +4330,69 @@
       </p:sp>
       <p:sp>
         <p:nvSpPr>
+          <p:cNvPr id="10" name="Text 7"/>
+          <p:cNvSpPr txBox="1"/>
+          <p:nvPr/>
+        </p:nvSpPr>
+        <p:spPr>
+          <a:xfrm>
+            <a:off x="3722294" y="1691640"/>
+            <a:ext cx="1939214" cy="822960"/>
+          </a:xfrm>
+          <a:prstGeom prst="rect">
+            <a:avLst/>
+          </a:prstGeom>
+          <a:noFill/>
+          <a:ln/>
+        </p:spPr>
+        <p:txBody>
+          <a:bodyPr wrap="square" lIns="0" tIns="0" rIns="0" bIns="0" rtlCol="0" anchor="t"/>
+          <a:lstStyle/>
+          <a:p>
+            <a:pPr indent="0" marL="0">
+              <a:buNone/>
+            </a:pPr>
+            <a:r>
+              <a:rPr lang="en-US" sz="4400" b="1" dirty="0">
+                <a:solidFill>
+                  <a:srgbClr val="0066CC"/>
+                </a:solidFill>
+                <a:latin typeface="Helvetica Neue" pitchFamily="34" charset="0"/>
+                <a:ea typeface="Helvetica Neue" pitchFamily="34" charset="-122"/>
+                <a:cs typeface="Helvetica Neue" pitchFamily="34" charset="-120"/>
+              </a:rPr>
+              <a:t>12</a:t>
+            </a:r>
+            <a:endParaRPr lang="en-US" sz="4400" dirty="0"/>
+          </a:p>
+        </p:txBody>
+      </p:sp>
+      <p:sp>
+        <p:nvSpPr>
           <p:cNvPr id="11" name="Text 8"/>
           <p:cNvSpPr txBox="1"/>
           <p:nvPr/>
         </p:nvSpPr>
         <p:spPr>
           <a:xfrm>
-            <a:off x="3722294" y="1810512"/>
-            <a:ext cx="1893494" cy="411480"/>
-          </a:xfrm>
-          <a:prstGeom prst="rect">
-            <a:avLst/>
-          </a:prstGeom>
-          <a:noFill/>
-          <a:ln/>
-        </p:spPr>
-        <p:txBody>
-          <a:bodyPr wrap="square" lIns="0" tIns="0" rIns="0" bIns="0" rtlCol="0" anchor="t"/>
-          <a:lstStyle/>
-          <a:p>
-            <a:pPr indent="0" marL="0">
-              <a:buNone/>
-            </a:pPr>
-            <a:r>
-              <a:rPr lang="en-US" sz="1600" b="1" dirty="0">
-                <a:solidFill>
-                  <a:srgbClr val="1D1D1F"/>
-                </a:solidFill>
-                <a:latin typeface="Helvetica Neue" pitchFamily="34" charset="0"/>
-                <a:ea typeface="Helvetica Neue" pitchFamily="34" charset="-122"/>
-                <a:cs typeface="Helvetica Neue" pitchFamily="34" charset="-120"/>
-              </a:rPr>
-              <a:t>Tests + lint</a:t>
-            </a:r>
-            <a:endParaRPr lang="en-US" sz="1600" dirty="0"/>
-          </a:p>
-        </p:txBody>
-      </p:sp>
-      <p:sp>
-        <p:nvSpPr>
-          <p:cNvPr id="12" name="Text 9"/>
-          <p:cNvSpPr txBox="1"/>
-          <p:nvPr/>
-        </p:nvSpPr>
-        <p:spPr>
-          <a:xfrm>
-            <a:off x="3722294" y="2267712"/>
-            <a:ext cx="1893494" cy="365760"/>
-          </a:xfrm>
-          <a:prstGeom prst="rect">
-            <a:avLst/>
-          </a:prstGeom>
-          <a:noFill/>
-          <a:ln/>
-        </p:spPr>
-        <p:txBody>
-          <a:bodyPr wrap="square" lIns="0" tIns="0" rIns="0" bIns="0" rtlCol="0" anchor="t"/>
-          <a:lstStyle/>
-          <a:p>
-            <a:pPr indent="0" marL="0">
-              <a:buNone/>
-            </a:pPr>
-            <a:r>
-              <a:rPr lang="en-US" sz="1250" dirty="0">
+            <a:off x="3722294" y="2560320"/>
+            <a:ext cx="1939214" cy="640080"/>
+          </a:xfrm>
+          <a:prstGeom prst="rect">
+            <a:avLst/>
+          </a:prstGeom>
+          <a:noFill/>
+          <a:ln/>
+        </p:spPr>
+        <p:txBody>
+          <a:bodyPr wrap="square" lIns="0" tIns="0" rIns="0" bIns="0" rtlCol="0" anchor="t"/>
+          <a:lstStyle/>
+          <a:p>
+            <a:pPr indent="0" marL="0">
+              <a:buNone/>
+            </a:pPr>
+            <a:r>
+              <a:rPr lang="en-US" sz="1300" dirty="0">
                 <a:solidFill>
                   <a:srgbClr val="6E6E73"/>
                 </a:solidFill>
@@ -4215,216 +4400,26 @@
                 <a:ea typeface="Helvetica Neue" pitchFamily="34" charset="-122"/>
                 <a:cs typeface="Helvetica Neue" pitchFamily="34" charset="-120"/>
               </a:rPr>
-              <a:t>GitHub Actions</a:t>
-            </a:r>
-            <a:endParaRPr lang="en-US" sz="1250" dirty="0"/>
-          </a:p>
-        </p:txBody>
-      </p:sp>
-      <p:sp>
-        <p:nvSpPr>
-          <p:cNvPr id="13" name="Text 10"/>
-          <p:cNvSpPr txBox="1"/>
-          <p:nvPr/>
-        </p:nvSpPr>
-        <p:spPr>
-          <a:xfrm>
-            <a:off x="5917540" y="1920240"/>
-            <a:ext cx="365760" cy="457200"/>
-          </a:xfrm>
-          <a:prstGeom prst="rect">
-            <a:avLst/>
-          </a:prstGeom>
-          <a:noFill/>
-          <a:ln/>
-        </p:spPr>
-        <p:txBody>
-          <a:bodyPr wrap="square" lIns="0" tIns="0" rIns="0" bIns="0" rtlCol="0" anchor="t"/>
-          <a:lstStyle/>
-          <a:p>
-            <a:pPr algn="ctr" indent="0" marL="0">
-              <a:buNone/>
-            </a:pPr>
-            <a:r>
-              <a:rPr lang="en-US" sz="2200" dirty="0">
-                <a:solidFill>
-                  <a:srgbClr val="6E6E73"/>
-                </a:solidFill>
-                <a:latin typeface="Helvetica Neue" pitchFamily="34" charset="0"/>
-                <a:ea typeface="Helvetica Neue" pitchFamily="34" charset="-122"/>
-                <a:cs typeface="Helvetica Neue" pitchFamily="34" charset="-120"/>
-              </a:rPr>
-              <a:t>→</a:t>
-            </a:r>
-            <a:endParaRPr lang="en-US" sz="2200" dirty="0"/>
-          </a:p>
-        </p:txBody>
-      </p:sp>
-      <p:sp>
-        <p:nvSpPr>
-          <p:cNvPr id="14" name="Shape 11"/>
+              <a:t>architecture decision records</a:t>
+            </a:r>
+            <a:endParaRPr lang="en-US" sz="1300" dirty="0"/>
+          </a:p>
+        </p:txBody>
+      </p:sp>
+      <p:sp>
+        <p:nvSpPr>
+          <p:cNvPr id="12" name="Shape 9"/>
           <p:cNvSpPr/>
           <p:nvPr/>
         </p:nvSpPr>
         <p:spPr>
           <a:xfrm>
-            <a:off x="6347308" y="1600200"/>
-            <a:ext cx="2350694" cy="1234440"/>
+            <a:off x="6255868" y="1508760"/>
+            <a:ext cx="2487854" cy="1783080"/>
           </a:xfrm>
           <a:prstGeom prst="roundRect">
             <a:avLst>
-              <a:gd name="adj" fmla="val 13333"/>
-            </a:avLst>
-          </a:prstGeom>
-          <a:solidFill>
-            <a:srgbClr val="1D1D1F"/>
-          </a:solidFill>
-          <a:ln w="12700">
-            <a:solidFill>
-              <a:srgbClr val="1D1D1F"/>
-            </a:solidFill>
-            <a:prstDash val="solid"/>
-          </a:ln>
-          <a:effectLst>
-            <a:outerShdw sx="100000" sy="100000" kx="0" ky="0" algn="bl" rotWithShape="0" blurRad="152400" dist="38100" dir="5400000">
-              <a:srgbClr val="000000">
-                <a:alpha val="10000"/>
-              </a:srgbClr>
-            </a:outerShdw>
-          </a:effectLst>
-        </p:spPr>
-      </p:sp>
-      <p:sp>
-        <p:nvSpPr>
-          <p:cNvPr id="15" name="Text 12"/>
-          <p:cNvSpPr txBox="1"/>
-          <p:nvPr/>
-        </p:nvSpPr>
-        <p:spPr>
-          <a:xfrm>
-            <a:off x="6575908" y="1810512"/>
-            <a:ext cx="1893494" cy="411480"/>
-          </a:xfrm>
-          <a:prstGeom prst="rect">
-            <a:avLst/>
-          </a:prstGeom>
-          <a:noFill/>
-          <a:ln/>
-        </p:spPr>
-        <p:txBody>
-          <a:bodyPr wrap="square" lIns="0" tIns="0" rIns="0" bIns="0" rtlCol="0" anchor="t"/>
-          <a:lstStyle/>
-          <a:p>
-            <a:pPr indent="0" marL="0">
-              <a:buNone/>
-            </a:pPr>
-            <a:r>
-              <a:rPr lang="en-US" sz="1600" b="1" dirty="0">
-                <a:solidFill>
-                  <a:srgbClr val="FFFFFF"/>
-                </a:solidFill>
-                <a:latin typeface="Helvetica Neue" pitchFamily="34" charset="0"/>
-                <a:ea typeface="Helvetica Neue" pitchFamily="34" charset="-122"/>
-                <a:cs typeface="Helvetica Neue" pitchFamily="34" charset="-120"/>
-              </a:rPr>
-              <a:t>reportcard lint</a:t>
-            </a:r>
-            <a:endParaRPr lang="en-US" sz="1600" dirty="0"/>
-          </a:p>
-        </p:txBody>
-      </p:sp>
-      <p:sp>
-        <p:nvSpPr>
-          <p:cNvPr id="16" name="Text 13"/>
-          <p:cNvSpPr txBox="1"/>
-          <p:nvPr/>
-        </p:nvSpPr>
-        <p:spPr>
-          <a:xfrm>
-            <a:off x="6575908" y="2267712"/>
-            <a:ext cx="1893494" cy="365760"/>
-          </a:xfrm>
-          <a:prstGeom prst="rect">
-            <a:avLst/>
-          </a:prstGeom>
-          <a:noFill/>
-          <a:ln/>
-        </p:spPr>
-        <p:txBody>
-          <a:bodyPr wrap="square" lIns="0" tIns="0" rIns="0" bIns="0" rtlCol="0" anchor="t"/>
-          <a:lstStyle/>
-          <a:p>
-            <a:pPr indent="0" marL="0">
-              <a:buNone/>
-            </a:pPr>
-            <a:r>
-              <a:rPr lang="en-US" sz="1250" dirty="0">
-                <a:solidFill>
-                  <a:srgbClr val="A1A1A6"/>
-                </a:solidFill>
-                <a:latin typeface="Helvetica Neue" pitchFamily="34" charset="0"/>
-                <a:ea typeface="Helvetica Neue" pitchFamily="34" charset="-122"/>
-                <a:cs typeface="Helvetica Neue" pitchFamily="34" charset="-120"/>
-              </a:rPr>
-              <a:t>accessibility gate</a:t>
-            </a:r>
-            <a:endParaRPr lang="en-US" sz="1250" dirty="0"/>
-          </a:p>
-        </p:txBody>
-      </p:sp>
-      <p:sp>
-        <p:nvSpPr>
-          <p:cNvPr id="17" name="Text 14"/>
-          <p:cNvSpPr txBox="1"/>
-          <p:nvPr/>
-        </p:nvSpPr>
-        <p:spPr>
-          <a:xfrm>
-            <a:off x="8771153" y="1920240"/>
-            <a:ext cx="365760" cy="457200"/>
-          </a:xfrm>
-          <a:prstGeom prst="rect">
-            <a:avLst/>
-          </a:prstGeom>
-          <a:noFill/>
-          <a:ln/>
-        </p:spPr>
-        <p:txBody>
-          <a:bodyPr wrap="square" lIns="0" tIns="0" rIns="0" bIns="0" rtlCol="0" anchor="t"/>
-          <a:lstStyle/>
-          <a:p>
-            <a:pPr algn="ctr" indent="0" marL="0">
-              <a:buNone/>
-            </a:pPr>
-            <a:r>
-              <a:rPr lang="en-US" sz="2200" dirty="0">
-                <a:solidFill>
-                  <a:srgbClr val="6E6E73"/>
-                </a:solidFill>
-                <a:latin typeface="Helvetica Neue" pitchFamily="34" charset="0"/>
-                <a:ea typeface="Helvetica Neue" pitchFamily="34" charset="-122"/>
-                <a:cs typeface="Helvetica Neue" pitchFamily="34" charset="-120"/>
-              </a:rPr>
-              <a:t>→</a:t>
-            </a:r>
-            <a:endParaRPr lang="en-US" sz="2200" dirty="0"/>
-          </a:p>
-        </p:txBody>
-      </p:sp>
-      <p:sp>
-        <p:nvSpPr>
-          <p:cNvPr id="18" name="Shape 15"/>
-          <p:cNvSpPr/>
-          <p:nvPr/>
-        </p:nvSpPr>
-        <p:spPr>
-          <a:xfrm>
-            <a:off x="9200921" y="1600200"/>
-            <a:ext cx="2350694" cy="1234440"/>
-          </a:xfrm>
-          <a:prstGeom prst="roundRect">
-            <a:avLst>
-              <a:gd name="adj" fmla="val 13333"/>
+              <a:gd name="adj" fmla="val 9231"/>
             </a:avLst>
           </a:prstGeom>
           <a:solidFill>
@@ -4447,69 +4442,69 @@
       </p:sp>
       <p:sp>
         <p:nvSpPr>
-          <p:cNvPr id="19" name="Text 16"/>
-          <p:cNvSpPr txBox="1"/>
-          <p:nvPr/>
-        </p:nvSpPr>
-        <p:spPr>
-          <a:xfrm>
-            <a:off x="9429521" y="1810512"/>
-            <a:ext cx="1893494" cy="411480"/>
-          </a:xfrm>
-          <a:prstGeom prst="rect">
-            <a:avLst/>
-          </a:prstGeom>
-          <a:noFill/>
-          <a:ln/>
-        </p:spPr>
-        <p:txBody>
-          <a:bodyPr wrap="square" lIns="0" tIns="0" rIns="0" bIns="0" rtlCol="0" anchor="t"/>
-          <a:lstStyle/>
-          <a:p>
-            <a:pPr indent="0" marL="0">
-              <a:buNone/>
-            </a:pPr>
-            <a:r>
-              <a:rPr lang="en-US" sz="1600" b="1" dirty="0">
-                <a:solidFill>
-                  <a:srgbClr val="1D1D1F"/>
-                </a:solidFill>
-                <a:latin typeface="Helvetica Neue" pitchFamily="34" charset="0"/>
-                <a:ea typeface="Helvetica Neue" pitchFamily="34" charset="-122"/>
-                <a:cs typeface="Helvetica Neue" pitchFamily="34" charset="-120"/>
-              </a:rPr>
-              <a:t>Pages gallery</a:t>
-            </a:r>
-            <a:endParaRPr lang="en-US" sz="1600" dirty="0"/>
-          </a:p>
-        </p:txBody>
-      </p:sp>
-      <p:sp>
-        <p:nvSpPr>
-          <p:cNvPr id="20" name="Text 17"/>
-          <p:cNvSpPr txBox="1"/>
-          <p:nvPr/>
-        </p:nvSpPr>
-        <p:spPr>
-          <a:xfrm>
-            <a:off x="9429521" y="2267712"/>
-            <a:ext cx="1893494" cy="365760"/>
-          </a:xfrm>
-          <a:prstGeom prst="rect">
-            <a:avLst/>
-          </a:prstGeom>
-          <a:noFill/>
-          <a:ln/>
-        </p:spPr>
-        <p:txBody>
-          <a:bodyPr wrap="square" lIns="0" tIns="0" rIns="0" bIns="0" rtlCol="0" anchor="t"/>
-          <a:lstStyle/>
-          <a:p>
-            <a:pPr indent="0" marL="0">
-              <a:buNone/>
-            </a:pPr>
-            <a:r>
-              <a:rPr lang="en-US" sz="1250" dirty="0">
+          <p:cNvPr id="13" name="Text 10"/>
+          <p:cNvSpPr txBox="1"/>
+          <p:nvPr/>
+        </p:nvSpPr>
+        <p:spPr>
+          <a:xfrm>
+            <a:off x="6530188" y="1691640"/>
+            <a:ext cx="1939214" cy="822960"/>
+          </a:xfrm>
+          <a:prstGeom prst="rect">
+            <a:avLst/>
+          </a:prstGeom>
+          <a:noFill/>
+          <a:ln/>
+        </p:spPr>
+        <p:txBody>
+          <a:bodyPr wrap="square" lIns="0" tIns="0" rIns="0" bIns="0" rtlCol="0" anchor="t"/>
+          <a:lstStyle/>
+          <a:p>
+            <a:pPr indent="0" marL="0">
+              <a:buNone/>
+            </a:pPr>
+            <a:r>
+              <a:rPr lang="en-US" sz="4400" b="1" dirty="0">
+                <a:solidFill>
+                  <a:srgbClr val="0066CC"/>
+                </a:solidFill>
+                <a:latin typeface="Helvetica Neue" pitchFamily="34" charset="0"/>
+                <a:ea typeface="Helvetica Neue" pitchFamily="34" charset="-122"/>
+                <a:cs typeface="Helvetica Neue" pitchFamily="34" charset="-120"/>
+              </a:rPr>
+              <a:t>4</a:t>
+            </a:r>
+            <a:endParaRPr lang="en-US" sz="4400" dirty="0"/>
+          </a:p>
+        </p:txBody>
+      </p:sp>
+      <p:sp>
+        <p:nvSpPr>
+          <p:cNvPr id="14" name="Text 11"/>
+          <p:cNvSpPr txBox="1"/>
+          <p:nvPr/>
+        </p:nvSpPr>
+        <p:spPr>
+          <a:xfrm>
+            <a:off x="6530188" y="2560320"/>
+            <a:ext cx="1939214" cy="640080"/>
+          </a:xfrm>
+          <a:prstGeom prst="rect">
+            <a:avLst/>
+          </a:prstGeom>
+          <a:noFill/>
+          <a:ln/>
+        </p:spPr>
+        <p:txBody>
+          <a:bodyPr wrap="square" lIns="0" tIns="0" rIns="0" bIns="0" rtlCol="0" anchor="t"/>
+          <a:lstStyle/>
+          <a:p>
+            <a:pPr indent="0" marL="0">
+              <a:buNone/>
+            </a:pPr>
+            <a:r>
+              <a:rPr lang="en-US" sz="1300" dirty="0">
                 <a:solidFill>
                   <a:srgbClr val="6E6E73"/>
                 </a:solidFill>
@@ -4517,26 +4512,26 @@
                 <a:ea typeface="Helvetica Neue" pitchFamily="34" charset="-122"/>
                 <a:cs typeface="Helvetica Neue" pitchFamily="34" charset="-120"/>
               </a:rPr>
-              <a:t>same HTML renderer</a:t>
-            </a:r>
-            <a:endParaRPr lang="en-US" sz="1250" dirty="0"/>
-          </a:p>
-        </p:txBody>
-      </p:sp>
-      <p:sp>
-        <p:nvSpPr>
-          <p:cNvPr id="21" name="Shape 18"/>
+              <a:t>feature flags, set in xcconfig</a:t>
+            </a:r>
+            <a:endParaRPr lang="en-US" sz="1300" dirty="0"/>
+          </a:p>
+        </p:txBody>
+      </p:sp>
+      <p:sp>
+        <p:nvSpPr>
+          <p:cNvPr id="15" name="Shape 12"/>
           <p:cNvSpPr/>
           <p:nvPr/>
         </p:nvSpPr>
         <p:spPr>
           <a:xfrm>
-            <a:off x="640080" y="3154680"/>
-            <a:ext cx="5760720" cy="3108960"/>
+            <a:off x="9063761" y="1508760"/>
+            <a:ext cx="2487854" cy="1783080"/>
           </a:xfrm>
           <a:prstGeom prst="roundRect">
             <a:avLst>
-              <a:gd name="adj" fmla="val 5294"/>
+              <a:gd name="adj" fmla="val 9231"/>
             </a:avLst>
           </a:prstGeom>
           <a:solidFill>
@@ -4557,39 +4552,167 @@
           </a:effectLst>
         </p:spPr>
       </p:sp>
-      <p:pic>
-        <p:nvPicPr>
-          <p:cNvPr id="22" name="gallery-fade.png" descr="The published card gallery page, showing the weekly status and milestone templates rendered by the same HTML renderer the app uses for email.">    </p:cNvPr>
-          <p:cNvPicPr>
-            <a:picLocks noChangeAspect="1"/>
-          </p:cNvPicPr>
-          <p:nvPr/>
-        </p:nvPicPr>
-        <p:blipFill>
-          <a:blip r:embed="rId1"/>
-          <a:srcRect l="0" r="0" t="0" b="0"/>
-          <a:stretch/>
-        </p:blipFill>
-        <p:spPr>
-          <a:xfrm>
-            <a:off x="749808" y="3264408"/>
-            <a:ext cx="5541264" cy="2889504"/>
-          </a:xfrm>
-          <a:prstGeom prst="rect">
-            <a:avLst/>
-          </a:prstGeom>
-        </p:spPr>
-      </p:pic>
-      <p:sp>
-        <p:nvSpPr>
-          <p:cNvPr id="23" name="Text 19"/>
-          <p:cNvSpPr txBox="1"/>
-          <p:nvPr/>
-        </p:nvSpPr>
-        <p:spPr>
-          <a:xfrm>
-            <a:off x="6812280" y="3246120"/>
-            <a:ext cx="4510735" cy="3017520"/>
+      <p:sp>
+        <p:nvSpPr>
+          <p:cNvPr id="16" name="Text 13"/>
+          <p:cNvSpPr txBox="1"/>
+          <p:nvPr/>
+        </p:nvSpPr>
+        <p:spPr>
+          <a:xfrm>
+            <a:off x="9338081" y="1691640"/>
+            <a:ext cx="1939214" cy="822960"/>
+          </a:xfrm>
+          <a:prstGeom prst="rect">
+            <a:avLst/>
+          </a:prstGeom>
+          <a:noFill/>
+          <a:ln/>
+        </p:spPr>
+        <p:txBody>
+          <a:bodyPr wrap="square" lIns="0" tIns="0" rIns="0" bIns="0" rtlCol="0" anchor="t"/>
+          <a:lstStyle/>
+          <a:p>
+            <a:pPr indent="0" marL="0">
+              <a:buNone/>
+            </a:pPr>
+            <a:r>
+              <a:rPr lang="en-US" sz="4400" b="1" dirty="0">
+                <a:solidFill>
+                  <a:srgbClr val="0066CC"/>
+                </a:solidFill>
+                <a:latin typeface="Helvetica Neue" pitchFamily="34" charset="0"/>
+                <a:ea typeface="Helvetica Neue" pitchFamily="34" charset="-122"/>
+                <a:cs typeface="Helvetica Neue" pitchFamily="34" charset="-120"/>
+              </a:rPr>
+              <a:t>1</a:t>
+            </a:r>
+            <a:endParaRPr lang="en-US" sz="4400" dirty="0"/>
+          </a:p>
+        </p:txBody>
+      </p:sp>
+      <p:sp>
+        <p:nvSpPr>
+          <p:cNvPr id="17" name="Text 14"/>
+          <p:cNvSpPr txBox="1"/>
+          <p:nvPr/>
+        </p:nvSpPr>
+        <p:spPr>
+          <a:xfrm>
+            <a:off x="9338081" y="2560320"/>
+            <a:ext cx="1939214" cy="640080"/>
+          </a:xfrm>
+          <a:prstGeom prst="rect">
+            <a:avLst/>
+          </a:prstGeom>
+          <a:noFill/>
+          <a:ln/>
+        </p:spPr>
+        <p:txBody>
+          <a:bodyPr wrap="square" lIns="0" tIns="0" rIns="0" bIns="0" rtlCol="0" anchor="t"/>
+          <a:lstStyle/>
+          <a:p>
+            <a:pPr indent="0" marL="0">
+              <a:buNone/>
+            </a:pPr>
+            <a:r>
+              <a:rPr lang="en-US" sz="1300" dirty="0">
+                <a:solidFill>
+                  <a:srgbClr val="6E6E73"/>
+                </a:solidFill>
+                <a:latin typeface="Helvetica Neue" pitchFamily="34" charset="0"/>
+                <a:ea typeface="Helvetica Neue" pitchFamily="34" charset="-122"/>
+                <a:cs typeface="Helvetica Neue" pitchFamily="34" charset="-120"/>
+              </a:rPr>
+              <a:t>YAML spec generates the Xcode project</a:t>
+            </a:r>
+            <a:endParaRPr lang="en-US" sz="1300" dirty="0"/>
+          </a:p>
+        </p:txBody>
+      </p:sp>
+      <p:sp>
+        <p:nvSpPr>
+          <p:cNvPr id="18" name="Shape 15"/>
+          <p:cNvSpPr/>
+          <p:nvPr/>
+        </p:nvSpPr>
+        <p:spPr>
+          <a:xfrm>
+            <a:off x="640080" y="3611880"/>
+            <a:ext cx="5227168" cy="2651760"/>
+          </a:xfrm>
+          <a:prstGeom prst="roundRect">
+            <a:avLst>
+              <a:gd name="adj" fmla="val 6207"/>
+            </a:avLst>
+          </a:prstGeom>
+          <a:solidFill>
+            <a:srgbClr val="FFFFFF"/>
+          </a:solidFill>
+          <a:ln w="12700">
+            <a:solidFill>
+              <a:srgbClr val="FFFFFF"/>
+            </a:solidFill>
+            <a:prstDash val="solid"/>
+          </a:ln>
+          <a:effectLst>
+            <a:outerShdw sx="100000" sy="100000" kx="0" ky="0" algn="bl" rotWithShape="0" blurRad="152400" dist="38100" dir="5400000">
+              <a:srgbClr val="000000">
+                <a:alpha val="10000"/>
+              </a:srgbClr>
+            </a:outerShdw>
+          </a:effectLst>
+        </p:spPr>
+      </p:sp>
+      <p:sp>
+        <p:nvSpPr>
+          <p:cNvPr id="19" name="Text 16"/>
+          <p:cNvSpPr txBox="1"/>
+          <p:nvPr/>
+        </p:nvSpPr>
+        <p:spPr>
+          <a:xfrm>
+            <a:off x="1005840" y="3794760"/>
+            <a:ext cx="4495648" cy="365760"/>
+          </a:xfrm>
+          <a:prstGeom prst="rect">
+            <a:avLst/>
+          </a:prstGeom>
+          <a:noFill/>
+          <a:ln/>
+        </p:spPr>
+        <p:txBody>
+          <a:bodyPr wrap="square" lIns="0" tIns="0" rIns="0" bIns="0" rtlCol="0" anchor="t"/>
+          <a:lstStyle/>
+          <a:p>
+            <a:pPr indent="0" marL="0">
+              <a:buNone/>
+            </a:pPr>
+            <a:r>
+              <a:rPr lang="en-US" sz="1300" b="1" dirty="0">
+                <a:solidFill>
+                  <a:srgbClr val="6E6E73"/>
+                </a:solidFill>
+                <a:latin typeface="Helvetica Neue" pitchFamily="34" charset="0"/>
+                <a:ea typeface="Helvetica Neue" pitchFamily="34" charset="-122"/>
+                <a:cs typeface="Helvetica Neue" pitchFamily="34" charset="-120"/>
+              </a:rPr>
+              <a:t>Code</a:t>
+            </a:r>
+            <a:endParaRPr lang="en-US" sz="1300" dirty="0"/>
+          </a:p>
+        </p:txBody>
+      </p:sp>
+      <p:sp>
+        <p:nvSpPr>
+          <p:cNvPr id="20" name="Text 17"/>
+          <p:cNvSpPr txBox="1"/>
+          <p:nvPr/>
+        </p:nvSpPr>
+        <p:spPr>
+          <a:xfrm>
+            <a:off x="1005840" y="4206240"/>
+            <a:ext cx="4495648" cy="2011680"/>
           </a:xfrm>
           <a:prstGeom prst="rect">
             <a:avLst/>
@@ -4603,7 +4726,7 @@
           <a:p>
             <a:pPr marL="203200" indent="-203200">
               <a:spcAft>
-                <a:spcPts val="800"/>
+                <a:spcPts val="600"/>
               </a:spcAft>
               <a:buSzPct val="100000"/>
               <a:buChar char="•"/>
@@ -4617,14 +4740,14 @@
                 <a:ea typeface="Helvetica Neue" pitchFamily="34" charset="-122"/>
                 <a:cs typeface="Helvetica Neue" pitchFamily="34" charset="-120"/>
               </a:rPr>
-              <a:t>User data stays on the Mac by design</a:t>
+              <a:t>Documented public API; comments say why, not what</a:t>
             </a:r>
             <a:endParaRPr lang="en-US" sz="1400" dirty="0"/>
           </a:p>
           <a:p>
             <a:pPr marL="203200" indent="-203200">
               <a:spcAft>
-                <a:spcPts val="800"/>
+                <a:spcPts val="600"/>
               </a:spcAft>
               <a:buSzPct val="100000"/>
               <a:buChar char="•"/>
@@ -4638,14 +4761,14 @@
                 <a:ea typeface="Helvetica Neue" pitchFamily="34" charset="-122"/>
                 <a:cs typeface="Helvetica Neue" pitchFamily="34" charset="-120"/>
               </a:rPr>
-              <a:t>Release workflow on a version tag: zipped app and checksum</a:t>
+              <a:t>Model replies are untrusted input: parsed, bounded, linted</a:t>
             </a:r>
             <a:endParaRPr lang="en-US" sz="1400" dirty="0"/>
           </a:p>
           <a:p>
             <a:pPr marL="203200" indent="-203200">
               <a:spcAft>
-                <a:spcPts val="800"/>
+                <a:spcPts val="600"/>
               </a:spcAft>
               <a:buSzPct val="100000"/>
               <a:buChar char="•"/>
@@ -4659,14 +4782,14 @@
                 <a:ea typeface="Helvetica Neue" pitchFamily="34" charset="-122"/>
                 <a:cs typeface="Helvetica Neue" pitchFamily="34" charset="-120"/>
               </a:rPr>
-              <a:t>Headless CLI: render from JSON, lint in any pipeline</a:t>
+              <a:t>One concern per type; the compiler lists every place a new block kind touches</a:t>
             </a:r>
             <a:endParaRPr lang="en-US" sz="1400" dirty="0"/>
           </a:p>
           <a:p>
             <a:pPr marL="203200" indent="-203200">
               <a:spcAft>
-                <a:spcPts val="800"/>
+                <a:spcPts val="600"/>
               </a:spcAft>
               <a:buSzPct val="100000"/>
               <a:buChar char="•"/>
@@ -4680,14 +4803,109 @@
                 <a:ea typeface="Helvetica Neue" pitchFamily="34" charset="-122"/>
                 <a:cs typeface="Helvetica Neue" pitchFamily="34" charset="-120"/>
               </a:rPr>
-              <a:t>Enterprise path: notarise, then Apple Business Manager or MDM</a:t>
+              <a:t>Conventional commits, one change each, readable in order</a:t>
             </a:r>
             <a:endParaRPr lang="en-US" sz="1400" dirty="0"/>
           </a:p>
+        </p:txBody>
+      </p:sp>
+      <p:sp>
+        <p:nvSpPr>
+          <p:cNvPr id="21" name="Shape 18"/>
+          <p:cNvSpPr/>
+          <p:nvPr/>
+        </p:nvSpPr>
+        <p:spPr>
+          <a:xfrm>
+            <a:off x="6324448" y="3611880"/>
+            <a:ext cx="5227168" cy="2651760"/>
+          </a:xfrm>
+          <a:prstGeom prst="roundRect">
+            <a:avLst>
+              <a:gd name="adj" fmla="val 6207"/>
+            </a:avLst>
+          </a:prstGeom>
+          <a:solidFill>
+            <a:srgbClr val="FFFFFF"/>
+          </a:solidFill>
+          <a:ln w="12700">
+            <a:solidFill>
+              <a:srgbClr val="FFFFFF"/>
+            </a:solidFill>
+            <a:prstDash val="solid"/>
+          </a:ln>
+          <a:effectLst>
+            <a:outerShdw sx="100000" sy="100000" kx="0" ky="0" algn="bl" rotWithShape="0" blurRad="152400" dist="38100" dir="5400000">
+              <a:srgbClr val="000000">
+                <a:alpha val="10000"/>
+              </a:srgbClr>
+            </a:outerShdw>
+          </a:effectLst>
+        </p:spPr>
+      </p:sp>
+      <p:sp>
+        <p:nvSpPr>
+          <p:cNvPr id="22" name="Text 19"/>
+          <p:cNvSpPr txBox="1"/>
+          <p:nvPr/>
+        </p:nvSpPr>
+        <p:spPr>
+          <a:xfrm>
+            <a:off x="6690208" y="3794760"/>
+            <a:ext cx="4495648" cy="365760"/>
+          </a:xfrm>
+          <a:prstGeom prst="rect">
+            <a:avLst/>
+          </a:prstGeom>
+          <a:noFill/>
+          <a:ln/>
+        </p:spPr>
+        <p:txBody>
+          <a:bodyPr wrap="square" lIns="0" tIns="0" rIns="0" bIns="0" rtlCol="0" anchor="t"/>
+          <a:lstStyle/>
+          <a:p>
+            <a:pPr indent="0" marL="0">
+              <a:buNone/>
+            </a:pPr>
+            <a:r>
+              <a:rPr lang="en-US" sz="1300" b="1" dirty="0">
+                <a:solidFill>
+                  <a:srgbClr val="6E6E73"/>
+                </a:solidFill>
+                <a:latin typeface="Helvetica Neue" pitchFamily="34" charset="0"/>
+                <a:ea typeface="Helvetica Neue" pitchFamily="34" charset="-122"/>
+                <a:cs typeface="Helvetica Neue" pitchFamily="34" charset="-120"/>
+              </a:rPr>
+              <a:t>Configuration and delivery</a:t>
+            </a:r>
+            <a:endParaRPr lang="en-US" sz="1300" dirty="0"/>
+          </a:p>
+        </p:txBody>
+      </p:sp>
+      <p:sp>
+        <p:nvSpPr>
+          <p:cNvPr id="23" name="Text 20"/>
+          <p:cNvSpPr txBox="1"/>
+          <p:nvPr/>
+        </p:nvSpPr>
+        <p:spPr>
+          <a:xfrm>
+            <a:off x="6690208" y="4206240"/>
+            <a:ext cx="4495648" cy="2011680"/>
+          </a:xfrm>
+          <a:prstGeom prst="rect">
+            <a:avLst/>
+          </a:prstGeom>
+          <a:noFill/>
+          <a:ln/>
+        </p:spPr>
+        <p:txBody>
+          <a:bodyPr wrap="square" lIns="0" tIns="0" rIns="0" bIns="0" rtlCol="0" anchor="t"/>
+          <a:lstStyle/>
           <a:p>
             <a:pPr marL="203200" indent="-203200">
               <a:spcAft>
-                <a:spcPts val="800"/>
+                <a:spcPts val="600"/>
               </a:spcAft>
               <a:buSzPct val="100000"/>
               <a:buChar char="•"/>
@@ -4701,7 +4919,70 @@
                 <a:ea typeface="Helvetica Neue" pitchFamily="34" charset="-122"/>
                 <a:cs typeface="Helvetica Neue" pitchFamily="34" charset="-120"/>
               </a:rPr>
-              <a:t>Next: share links via CloudKit or an internal Swift service; the renderers do not change</a:t>
+              <a:t>Versions, flags and signing live in xcconfig, not buried in the project file</a:t>
+            </a:r>
+            <a:endParaRPr lang="en-US" sz="1400" dirty="0"/>
+          </a:p>
+          <a:p>
+            <a:pPr marL="203200" indent="-203200">
+              <a:spcAft>
+                <a:spcPts val="600"/>
+              </a:spcAft>
+              <a:buSzPct val="100000"/>
+              <a:buChar char="•"/>
+            </a:pPr>
+            <a:r>
+              <a:rPr lang="en-US" sz="1400" dirty="0">
+                <a:solidFill>
+                  <a:srgbClr val="1D1D1F"/>
+                </a:solidFill>
+                <a:latin typeface="Helvetica Neue" pitchFamily="34" charset="0"/>
+                <a:ea typeface="Helvetica Neue" pitchFamily="34" charset="-122"/>
+                <a:cs typeface="Helvetica Neue" pitchFamily="34" charset="-120"/>
+              </a:rPr>
+              <a:t>XcodeGen writes the .xcodeproj from YAML, so the build is reviewable</a:t>
+            </a:r>
+            <a:endParaRPr lang="en-US" sz="1400" dirty="0"/>
+          </a:p>
+          <a:p>
+            <a:pPr marL="203200" indent="-203200">
+              <a:spcAft>
+                <a:spcPts val="600"/>
+              </a:spcAft>
+              <a:buSzPct val="100000"/>
+              <a:buChar char="•"/>
+            </a:pPr>
+            <a:r>
+              <a:rPr lang="en-US" sz="1400" dirty="0">
+                <a:solidFill>
+                  <a:srgbClr val="1D1D1F"/>
+                </a:solidFill>
+                <a:latin typeface="Helvetica Neue" pitchFamily="34" charset="0"/>
+                <a:ea typeface="Helvetica Neue" pitchFamily="34" charset="-122"/>
+                <a:cs typeface="Helvetica Neue" pitchFamily="34" charset="-120"/>
+              </a:rPr>
+              <a:t>One flag removes writing assistance and its network entitlement</a:t>
+            </a:r>
+            <a:endParaRPr lang="en-US" sz="1400" dirty="0"/>
+          </a:p>
+          <a:p>
+            <a:pPr marL="203200" indent="-203200">
+              <a:spcAft>
+                <a:spcPts val="600"/>
+              </a:spcAft>
+              <a:buSzPct val="100000"/>
+              <a:buChar char="•"/>
+            </a:pPr>
+            <a:r>
+              <a:rPr lang="en-US" sz="1400" dirty="0">
+                <a:solidFill>
+                  <a:srgbClr val="1D1D1F"/>
+                </a:solidFill>
+                <a:latin typeface="Helvetica Neue" pitchFamily="34" charset="0"/>
+                <a:ea typeface="Helvetica Neue" pitchFamily="34" charset="-122"/>
+                <a:cs typeface="Helvetica Neue" pitchFamily="34" charset="-120"/>
+              </a:rPr>
+              <a:t>GitHub Actions on every push: tests, SwiftLint, SwiftFormat, CLI smoke test</a:t>
             </a:r>
             <a:endParaRPr lang="en-US" sz="1400" dirty="0"/>
           </a:p>
@@ -4811,7 +5092,7 @@
                 <a:ea typeface="Helvetica Neue" pitchFamily="34" charset="-122"/>
                 <a:cs typeface="Helvetica Neue" pitchFamily="34" charset="-120"/>
               </a:rPr>
-              <a:t>TRADE-OFFS</a:t>
+              <a:t>CLOUD AND DELIVERY</a:t>
             </a:r>
             <a:endParaRPr lang="en-US" sz="1200" dirty="0"/>
           </a:p>
@@ -4850,7 +5131,7 @@
                 <a:ea typeface="Helvetica Neue" pitchFamily="34" charset="-122"/>
                 <a:cs typeface="Helvetica Neue" pitchFamily="34" charset="-120"/>
               </a:rPr>
-              <a:t>What I would not claim yet</a:t>
+              <a:t>The cloud carries the software, not your data</a:t>
             </a:r>
             <a:endParaRPr lang="en-US" sz="3400" dirty="0"/>
           </a:p>
@@ -4864,12 +5145,12 @@
         </p:nvSpPr>
         <p:spPr>
           <a:xfrm>
-            <a:off x="640080" y="1508760"/>
-            <a:ext cx="5227168" cy="3749040"/>
+            <a:off x="640080" y="1600200"/>
+            <a:ext cx="2350694" cy="1234440"/>
           </a:xfrm>
           <a:prstGeom prst="roundRect">
             <a:avLst>
-              <a:gd name="adj" fmla="val 4390"/>
+              <a:gd name="adj" fmla="val 13333"/>
             </a:avLst>
           </a:prstGeom>
           <a:solidFill>
@@ -4898,24 +5179,24 @@
         </p:nvSpPr>
         <p:spPr>
           <a:xfrm>
-            <a:off x="1005840" y="1737360"/>
-            <a:ext cx="4495648" cy="365760"/>
-          </a:xfrm>
-          <a:prstGeom prst="rect">
-            <a:avLst/>
-          </a:prstGeom>
-          <a:noFill/>
-          <a:ln/>
-        </p:spPr>
-        <p:txBody>
-          <a:bodyPr wrap="square" lIns="0" tIns="0" rIns="0" bIns="0" rtlCol="0" anchor="t"/>
-          <a:lstStyle/>
-          <a:p>
-            <a:pPr indent="0" marL="0">
-              <a:buNone/>
-            </a:pPr>
-            <a:r>
-              <a:rPr lang="en-US" sz="1700" b="1" dirty="0">
+            <a:off x="868680" y="1810512"/>
+            <a:ext cx="1893494" cy="411480"/>
+          </a:xfrm>
+          <a:prstGeom prst="rect">
+            <a:avLst/>
+          </a:prstGeom>
+          <a:noFill/>
+          <a:ln/>
+        </p:spPr>
+        <p:txBody>
+          <a:bodyPr wrap="square" lIns="0" tIns="0" rIns="0" bIns="0" rtlCol="0" anchor="t"/>
+          <a:lstStyle/>
+          <a:p>
+            <a:pPr indent="0" marL="0">
+              <a:buNone/>
+            </a:pPr>
+            <a:r>
+              <a:rPr lang="en-US" sz="1600" b="1" dirty="0">
                 <a:solidFill>
                   <a:srgbClr val="1D1D1F"/>
                 </a:solidFill>
@@ -4923,9 +5204,9 @@
                 <a:ea typeface="Helvetica Neue" pitchFamily="34" charset="-122"/>
                 <a:cs typeface="Helvetica Neue" pitchFamily="34" charset="-120"/>
               </a:rPr>
-              <a:t>Not verified, and documented as such</a:t>
-            </a:r>
-            <a:endParaRPr lang="en-US" sz="1700" dirty="0"/>
+              <a:t>git push</a:t>
+            </a:r>
+            <a:endParaRPr lang="en-US" sz="1600" dirty="0"/>
           </a:p>
         </p:txBody>
       </p:sp>
@@ -4937,139 +5218,90 @@
         </p:nvSpPr>
         <p:spPr>
           <a:xfrm>
-            <a:off x="1005840" y="2240280"/>
-            <a:ext cx="4495648" cy="2926080"/>
-          </a:xfrm>
-          <a:prstGeom prst="rect">
-            <a:avLst/>
-          </a:prstGeom>
-          <a:noFill/>
-          <a:ln/>
-        </p:spPr>
-        <p:txBody>
-          <a:bodyPr wrap="square" lIns="0" tIns="0" rIns="0" bIns="0" rtlCol="0" anchor="t"/>
-          <a:lstStyle/>
-          <a:p>
-            <a:pPr marL="203200" indent="-203200">
-              <a:spcAft>
-                <a:spcPts val="900"/>
-              </a:spcAft>
-              <a:buSzPct val="100000"/>
-              <a:buChar char="•"/>
-            </a:pPr>
-            <a:r>
-              <a:rPr lang="en-US" sz="1400" dirty="0">
-                <a:solidFill>
-                  <a:srgbClr val="1D1D1F"/>
-                </a:solidFill>
-                <a:latin typeface="Helvetica Neue" pitchFamily="34" charset="0"/>
-                <a:ea typeface="Helvetica Neue" pitchFamily="34" charset="-122"/>
-                <a:cs typeface="Helvetica Neue" pitchFamily="34" charset="-120"/>
-              </a:rPr>
-              <a:t>On-device model: compiles with availability checks, not run (my Mac is on macOS 15)</a:t>
-            </a:r>
-            <a:endParaRPr lang="en-US" sz="1400" dirty="0"/>
-          </a:p>
-          <a:p>
-            <a:pPr marL="203200" indent="-203200">
-              <a:spcAft>
-                <a:spcPts val="900"/>
-              </a:spcAft>
-              <a:buSzPct val="100000"/>
-              <a:buChar char="•"/>
-            </a:pPr>
-            <a:r>
-              <a:rPr lang="en-US" sz="1400" dirty="0">
-                <a:solidFill>
-                  <a:srgbClr val="1D1D1F"/>
-                </a:solidFill>
-                <a:latin typeface="Helvetica Neue" pitchFamily="34" charset="0"/>
-                <a:ea typeface="Helvetica Neue" pitchFamily="34" charset="-122"/>
-                <a:cs typeface="Helvetica Neue" pitchFamily="34" charset="-120"/>
-              </a:rPr>
-              <a:t>Paste targets: “verified” and “expected” are kept apart in the docs</a:t>
-            </a:r>
-            <a:endParaRPr lang="en-US" sz="1400" dirty="0"/>
-          </a:p>
-          <a:p>
-            <a:pPr marL="203200" indent="-203200">
-              <a:spcAft>
-                <a:spcPts val="900"/>
-              </a:spcAft>
-              <a:buSzPct val="100000"/>
-              <a:buChar char="•"/>
-            </a:pPr>
-            <a:r>
-              <a:rPr lang="en-US" sz="1400" dirty="0">
-                <a:solidFill>
-                  <a:srgbClr val="1D1D1F"/>
-                </a:solidFill>
-                <a:latin typeface="Helvetica Neue" pitchFamily="34" charset="0"/>
-                <a:ea typeface="Helvetica Neue" pitchFamily="34" charset="-122"/>
-                <a:cs typeface="Helvetica Neue" pitchFamily="34" charset="-120"/>
-              </a:rPr>
-              <a:t>VoiceOver features: data is tested, the experience needs a human</a:t>
-            </a:r>
-            <a:endParaRPr lang="en-US" sz="1400" dirty="0"/>
-          </a:p>
-          <a:p>
-            <a:pPr marL="203200" indent="-203200">
-              <a:spcAft>
-                <a:spcPts val="900"/>
-              </a:spcAft>
-              <a:buSzPct val="100000"/>
-              <a:buChar char="•"/>
-            </a:pPr>
-            <a:r>
-              <a:rPr lang="en-US" sz="1400" dirty="0">
-                <a:solidFill>
-                  <a:srgbClr val="1D1D1F"/>
-                </a:solidFill>
-                <a:latin typeface="Helvetica Neue" pitchFamily="34" charset="0"/>
-                <a:ea typeface="Helvetica Neue" pitchFamily="34" charset="-122"/>
-                <a:cs typeface="Helvetica Neue" pitchFamily="34" charset="-120"/>
-              </a:rPr>
-              <a:t>Tagged PDF: structure tree present, not validated against PDF/UA</a:t>
-            </a:r>
-            <a:endParaRPr lang="en-US" sz="1400" dirty="0"/>
-          </a:p>
-          <a:p>
-            <a:pPr marL="203200" indent="-203200">
-              <a:spcAft>
-                <a:spcPts val="900"/>
-              </a:spcAft>
-              <a:buSzPct val="100000"/>
-              <a:buChar char="•"/>
-            </a:pPr>
-            <a:r>
-              <a:rPr lang="en-US" sz="1400" dirty="0">
-                <a:solidFill>
-                  <a:srgbClr val="1D1D1F"/>
-                </a:solidFill>
-                <a:latin typeface="Helvetica Neue" pitchFamily="34" charset="0"/>
-                <a:ea typeface="Helvetica Neue" pitchFamily="34" charset="-122"/>
-                <a:cs typeface="Helvetica Neue" pitchFamily="34" charset="-120"/>
-              </a:rPr>
-              <a:t>Ad-hoc signed; notarisation needs a Developer ID</a:t>
-            </a:r>
-            <a:endParaRPr lang="en-US" sz="1400" dirty="0"/>
-          </a:p>
-        </p:txBody>
-      </p:sp>
-      <p:sp>
-        <p:nvSpPr>
-          <p:cNvPr id="9" name="Shape 6"/>
+            <a:off x="868680" y="2267712"/>
+            <a:ext cx="1893494" cy="365760"/>
+          </a:xfrm>
+          <a:prstGeom prst="rect">
+            <a:avLst/>
+          </a:prstGeom>
+          <a:noFill/>
+          <a:ln/>
+        </p:spPr>
+        <p:txBody>
+          <a:bodyPr wrap="square" lIns="0" tIns="0" rIns="0" bIns="0" rtlCol="0" anchor="t"/>
+          <a:lstStyle/>
+          <a:p>
+            <a:pPr indent="0" marL="0">
+              <a:buNone/>
+            </a:pPr>
+            <a:r>
+              <a:rPr lang="en-US" sz="1250" dirty="0">
+                <a:solidFill>
+                  <a:srgbClr val="6E6E73"/>
+                </a:solidFill>
+                <a:latin typeface="Helvetica Neue" pitchFamily="34" charset="0"/>
+                <a:ea typeface="Helvetica Neue" pitchFamily="34" charset="-122"/>
+                <a:cs typeface="Helvetica Neue" pitchFamily="34" charset="-120"/>
+              </a:rPr>
+              <a:t>every commit</a:t>
+            </a:r>
+            <a:endParaRPr lang="en-US" sz="1250" dirty="0"/>
+          </a:p>
+        </p:txBody>
+      </p:sp>
+      <p:sp>
+        <p:nvSpPr>
+          <p:cNvPr id="9" name="Text 6"/>
+          <p:cNvSpPr txBox="1"/>
+          <p:nvPr/>
+        </p:nvSpPr>
+        <p:spPr>
+          <a:xfrm>
+            <a:off x="3063926" y="1920240"/>
+            <a:ext cx="365760" cy="457200"/>
+          </a:xfrm>
+          <a:prstGeom prst="rect">
+            <a:avLst/>
+          </a:prstGeom>
+          <a:noFill/>
+          <a:ln/>
+        </p:spPr>
+        <p:txBody>
+          <a:bodyPr wrap="square" lIns="0" tIns="0" rIns="0" bIns="0" rtlCol="0" anchor="t"/>
+          <a:lstStyle/>
+          <a:p>
+            <a:pPr algn="ctr" indent="0" marL="0">
+              <a:buNone/>
+            </a:pPr>
+            <a:r>
+              <a:rPr lang="en-US" sz="2200" dirty="0">
+                <a:solidFill>
+                  <a:srgbClr val="6E6E73"/>
+                </a:solidFill>
+                <a:latin typeface="Helvetica Neue" pitchFamily="34" charset="0"/>
+                <a:ea typeface="Helvetica Neue" pitchFamily="34" charset="-122"/>
+                <a:cs typeface="Helvetica Neue" pitchFamily="34" charset="-120"/>
+              </a:rPr>
+              <a:t>→</a:t>
+            </a:r>
+            <a:endParaRPr lang="en-US" sz="2200" dirty="0"/>
+          </a:p>
+        </p:txBody>
+      </p:sp>
+      <p:sp>
+        <p:nvSpPr>
+          <p:cNvPr id="10" name="Shape 7"/>
           <p:cNvSpPr/>
           <p:nvPr/>
         </p:nvSpPr>
         <p:spPr>
           <a:xfrm>
-            <a:off x="6324448" y="1508760"/>
-            <a:ext cx="5227168" cy="3749040"/>
+            <a:off x="3493694" y="1600200"/>
+            <a:ext cx="2350694" cy="1234440"/>
           </a:xfrm>
           <a:prstGeom prst="roundRect">
             <a:avLst>
-              <a:gd name="adj" fmla="val 4390"/>
+              <a:gd name="adj" fmla="val 13333"/>
             </a:avLst>
           </a:prstGeom>
           <a:solidFill>
@@ -5092,30 +5324,30 @@
       </p:sp>
       <p:sp>
         <p:nvSpPr>
-          <p:cNvPr id="10" name="Text 7"/>
-          <p:cNvSpPr txBox="1"/>
-          <p:nvPr/>
-        </p:nvSpPr>
-        <p:spPr>
-          <a:xfrm>
-            <a:off x="6690208" y="1737360"/>
-            <a:ext cx="4495648" cy="365760"/>
-          </a:xfrm>
-          <a:prstGeom prst="rect">
-            <a:avLst/>
-          </a:prstGeom>
-          <a:noFill/>
-          <a:ln/>
-        </p:spPr>
-        <p:txBody>
-          <a:bodyPr wrap="square" lIns="0" tIns="0" rIns="0" bIns="0" rtlCol="0" anchor="t"/>
-          <a:lstStyle/>
-          <a:p>
-            <a:pPr indent="0" marL="0">
-              <a:buNone/>
-            </a:pPr>
-            <a:r>
-              <a:rPr lang="en-US" sz="1700" b="1" dirty="0">
+          <p:cNvPr id="11" name="Text 8"/>
+          <p:cNvSpPr txBox="1"/>
+          <p:nvPr/>
+        </p:nvSpPr>
+        <p:spPr>
+          <a:xfrm>
+            <a:off x="3722294" y="1810512"/>
+            <a:ext cx="1893494" cy="411480"/>
+          </a:xfrm>
+          <a:prstGeom prst="rect">
+            <a:avLst/>
+          </a:prstGeom>
+          <a:noFill/>
+          <a:ln/>
+        </p:spPr>
+        <p:txBody>
+          <a:bodyPr wrap="square" lIns="0" tIns="0" rIns="0" bIns="0" rtlCol="0" anchor="t"/>
+          <a:lstStyle/>
+          <a:p>
+            <a:pPr indent="0" marL="0">
+              <a:buNone/>
+            </a:pPr>
+            <a:r>
+              <a:rPr lang="en-US" sz="1600" b="1" dirty="0">
                 <a:solidFill>
                   <a:srgbClr val="1D1D1F"/>
                 </a:solidFill>
@@ -5123,22 +5355,420 @@
                 <a:ea typeface="Helvetica Neue" pitchFamily="34" charset="-122"/>
                 <a:cs typeface="Helvetica Neue" pitchFamily="34" charset="-120"/>
               </a:rPr>
-              <a:t>Deliberate limits and next steps</a:t>
-            </a:r>
-            <a:endParaRPr lang="en-US" sz="1700" dirty="0"/>
-          </a:p>
-        </p:txBody>
-      </p:sp>
-      <p:sp>
-        <p:nvSpPr>
-          <p:cNvPr id="11" name="Text 8"/>
-          <p:cNvSpPr txBox="1"/>
-          <p:nvPr/>
-        </p:nvSpPr>
-        <p:spPr>
-          <a:xfrm>
-            <a:off x="6690208" y="2240280"/>
-            <a:ext cx="4495648" cy="2926080"/>
+              <a:t>Tests + lint</a:t>
+            </a:r>
+            <a:endParaRPr lang="en-US" sz="1600" dirty="0"/>
+          </a:p>
+        </p:txBody>
+      </p:sp>
+      <p:sp>
+        <p:nvSpPr>
+          <p:cNvPr id="12" name="Text 9"/>
+          <p:cNvSpPr txBox="1"/>
+          <p:nvPr/>
+        </p:nvSpPr>
+        <p:spPr>
+          <a:xfrm>
+            <a:off x="3722294" y="2267712"/>
+            <a:ext cx="1893494" cy="365760"/>
+          </a:xfrm>
+          <a:prstGeom prst="rect">
+            <a:avLst/>
+          </a:prstGeom>
+          <a:noFill/>
+          <a:ln/>
+        </p:spPr>
+        <p:txBody>
+          <a:bodyPr wrap="square" lIns="0" tIns="0" rIns="0" bIns="0" rtlCol="0" anchor="t"/>
+          <a:lstStyle/>
+          <a:p>
+            <a:pPr indent="0" marL="0">
+              <a:buNone/>
+            </a:pPr>
+            <a:r>
+              <a:rPr lang="en-US" sz="1250" dirty="0">
+                <a:solidFill>
+                  <a:srgbClr val="6E6E73"/>
+                </a:solidFill>
+                <a:latin typeface="Helvetica Neue" pitchFamily="34" charset="0"/>
+                <a:ea typeface="Helvetica Neue" pitchFamily="34" charset="-122"/>
+                <a:cs typeface="Helvetica Neue" pitchFamily="34" charset="-120"/>
+              </a:rPr>
+              <a:t>GitHub Actions</a:t>
+            </a:r>
+            <a:endParaRPr lang="en-US" sz="1250" dirty="0"/>
+          </a:p>
+        </p:txBody>
+      </p:sp>
+      <p:sp>
+        <p:nvSpPr>
+          <p:cNvPr id="13" name="Text 10"/>
+          <p:cNvSpPr txBox="1"/>
+          <p:nvPr/>
+        </p:nvSpPr>
+        <p:spPr>
+          <a:xfrm>
+            <a:off x="5917540" y="1920240"/>
+            <a:ext cx="365760" cy="457200"/>
+          </a:xfrm>
+          <a:prstGeom prst="rect">
+            <a:avLst/>
+          </a:prstGeom>
+          <a:noFill/>
+          <a:ln/>
+        </p:spPr>
+        <p:txBody>
+          <a:bodyPr wrap="square" lIns="0" tIns="0" rIns="0" bIns="0" rtlCol="0" anchor="t"/>
+          <a:lstStyle/>
+          <a:p>
+            <a:pPr algn="ctr" indent="0" marL="0">
+              <a:buNone/>
+            </a:pPr>
+            <a:r>
+              <a:rPr lang="en-US" sz="2200" dirty="0">
+                <a:solidFill>
+                  <a:srgbClr val="6E6E73"/>
+                </a:solidFill>
+                <a:latin typeface="Helvetica Neue" pitchFamily="34" charset="0"/>
+                <a:ea typeface="Helvetica Neue" pitchFamily="34" charset="-122"/>
+                <a:cs typeface="Helvetica Neue" pitchFamily="34" charset="-120"/>
+              </a:rPr>
+              <a:t>→</a:t>
+            </a:r>
+            <a:endParaRPr lang="en-US" sz="2200" dirty="0"/>
+          </a:p>
+        </p:txBody>
+      </p:sp>
+      <p:sp>
+        <p:nvSpPr>
+          <p:cNvPr id="14" name="Shape 11"/>
+          <p:cNvSpPr/>
+          <p:nvPr/>
+        </p:nvSpPr>
+        <p:spPr>
+          <a:xfrm>
+            <a:off x="6347308" y="1600200"/>
+            <a:ext cx="2350694" cy="1234440"/>
+          </a:xfrm>
+          <a:prstGeom prst="roundRect">
+            <a:avLst>
+              <a:gd name="adj" fmla="val 13333"/>
+            </a:avLst>
+          </a:prstGeom>
+          <a:solidFill>
+            <a:srgbClr val="1D1D1F"/>
+          </a:solidFill>
+          <a:ln w="12700">
+            <a:solidFill>
+              <a:srgbClr val="1D1D1F"/>
+            </a:solidFill>
+            <a:prstDash val="solid"/>
+          </a:ln>
+          <a:effectLst>
+            <a:outerShdw sx="100000" sy="100000" kx="0" ky="0" algn="bl" rotWithShape="0" blurRad="152400" dist="38100" dir="5400000">
+              <a:srgbClr val="000000">
+                <a:alpha val="10000"/>
+              </a:srgbClr>
+            </a:outerShdw>
+          </a:effectLst>
+        </p:spPr>
+      </p:sp>
+      <p:sp>
+        <p:nvSpPr>
+          <p:cNvPr id="15" name="Text 12"/>
+          <p:cNvSpPr txBox="1"/>
+          <p:nvPr/>
+        </p:nvSpPr>
+        <p:spPr>
+          <a:xfrm>
+            <a:off x="6575908" y="1810512"/>
+            <a:ext cx="1893494" cy="411480"/>
+          </a:xfrm>
+          <a:prstGeom prst="rect">
+            <a:avLst/>
+          </a:prstGeom>
+          <a:noFill/>
+          <a:ln/>
+        </p:spPr>
+        <p:txBody>
+          <a:bodyPr wrap="square" lIns="0" tIns="0" rIns="0" bIns="0" rtlCol="0" anchor="t"/>
+          <a:lstStyle/>
+          <a:p>
+            <a:pPr indent="0" marL="0">
+              <a:buNone/>
+            </a:pPr>
+            <a:r>
+              <a:rPr lang="en-US" sz="1600" b="1" dirty="0">
+                <a:solidFill>
+                  <a:srgbClr val="FFFFFF"/>
+                </a:solidFill>
+                <a:latin typeface="Helvetica Neue" pitchFamily="34" charset="0"/>
+                <a:ea typeface="Helvetica Neue" pitchFamily="34" charset="-122"/>
+                <a:cs typeface="Helvetica Neue" pitchFamily="34" charset="-120"/>
+              </a:rPr>
+              <a:t>reportcard lint</a:t>
+            </a:r>
+            <a:endParaRPr lang="en-US" sz="1600" dirty="0"/>
+          </a:p>
+        </p:txBody>
+      </p:sp>
+      <p:sp>
+        <p:nvSpPr>
+          <p:cNvPr id="16" name="Text 13"/>
+          <p:cNvSpPr txBox="1"/>
+          <p:nvPr/>
+        </p:nvSpPr>
+        <p:spPr>
+          <a:xfrm>
+            <a:off x="6575908" y="2267712"/>
+            <a:ext cx="1893494" cy="365760"/>
+          </a:xfrm>
+          <a:prstGeom prst="rect">
+            <a:avLst/>
+          </a:prstGeom>
+          <a:noFill/>
+          <a:ln/>
+        </p:spPr>
+        <p:txBody>
+          <a:bodyPr wrap="square" lIns="0" tIns="0" rIns="0" bIns="0" rtlCol="0" anchor="t"/>
+          <a:lstStyle/>
+          <a:p>
+            <a:pPr indent="0" marL="0">
+              <a:buNone/>
+            </a:pPr>
+            <a:r>
+              <a:rPr lang="en-US" sz="1250" dirty="0">
+                <a:solidFill>
+                  <a:srgbClr val="A1A1A6"/>
+                </a:solidFill>
+                <a:latin typeface="Helvetica Neue" pitchFamily="34" charset="0"/>
+                <a:ea typeface="Helvetica Neue" pitchFamily="34" charset="-122"/>
+                <a:cs typeface="Helvetica Neue" pitchFamily="34" charset="-120"/>
+              </a:rPr>
+              <a:t>accessibility gate</a:t>
+            </a:r>
+            <a:endParaRPr lang="en-US" sz="1250" dirty="0"/>
+          </a:p>
+        </p:txBody>
+      </p:sp>
+      <p:sp>
+        <p:nvSpPr>
+          <p:cNvPr id="17" name="Text 14"/>
+          <p:cNvSpPr txBox="1"/>
+          <p:nvPr/>
+        </p:nvSpPr>
+        <p:spPr>
+          <a:xfrm>
+            <a:off x="8771153" y="1920240"/>
+            <a:ext cx="365760" cy="457200"/>
+          </a:xfrm>
+          <a:prstGeom prst="rect">
+            <a:avLst/>
+          </a:prstGeom>
+          <a:noFill/>
+          <a:ln/>
+        </p:spPr>
+        <p:txBody>
+          <a:bodyPr wrap="square" lIns="0" tIns="0" rIns="0" bIns="0" rtlCol="0" anchor="t"/>
+          <a:lstStyle/>
+          <a:p>
+            <a:pPr algn="ctr" indent="0" marL="0">
+              <a:buNone/>
+            </a:pPr>
+            <a:r>
+              <a:rPr lang="en-US" sz="2200" dirty="0">
+                <a:solidFill>
+                  <a:srgbClr val="6E6E73"/>
+                </a:solidFill>
+                <a:latin typeface="Helvetica Neue" pitchFamily="34" charset="0"/>
+                <a:ea typeface="Helvetica Neue" pitchFamily="34" charset="-122"/>
+                <a:cs typeface="Helvetica Neue" pitchFamily="34" charset="-120"/>
+              </a:rPr>
+              <a:t>→</a:t>
+            </a:r>
+            <a:endParaRPr lang="en-US" sz="2200" dirty="0"/>
+          </a:p>
+        </p:txBody>
+      </p:sp>
+      <p:sp>
+        <p:nvSpPr>
+          <p:cNvPr id="18" name="Shape 15"/>
+          <p:cNvSpPr/>
+          <p:nvPr/>
+        </p:nvSpPr>
+        <p:spPr>
+          <a:xfrm>
+            <a:off x="9200921" y="1600200"/>
+            <a:ext cx="2350694" cy="1234440"/>
+          </a:xfrm>
+          <a:prstGeom prst="roundRect">
+            <a:avLst>
+              <a:gd name="adj" fmla="val 13333"/>
+            </a:avLst>
+          </a:prstGeom>
+          <a:solidFill>
+            <a:srgbClr val="FFFFFF"/>
+          </a:solidFill>
+          <a:ln w="12700">
+            <a:solidFill>
+              <a:srgbClr val="FFFFFF"/>
+            </a:solidFill>
+            <a:prstDash val="solid"/>
+          </a:ln>
+          <a:effectLst>
+            <a:outerShdw sx="100000" sy="100000" kx="0" ky="0" algn="bl" rotWithShape="0" blurRad="152400" dist="38100" dir="5400000">
+              <a:srgbClr val="000000">
+                <a:alpha val="10000"/>
+              </a:srgbClr>
+            </a:outerShdw>
+          </a:effectLst>
+        </p:spPr>
+      </p:sp>
+      <p:sp>
+        <p:nvSpPr>
+          <p:cNvPr id="19" name="Text 16"/>
+          <p:cNvSpPr txBox="1"/>
+          <p:nvPr/>
+        </p:nvSpPr>
+        <p:spPr>
+          <a:xfrm>
+            <a:off x="9429521" y="1810512"/>
+            <a:ext cx="1893494" cy="411480"/>
+          </a:xfrm>
+          <a:prstGeom prst="rect">
+            <a:avLst/>
+          </a:prstGeom>
+          <a:noFill/>
+          <a:ln/>
+        </p:spPr>
+        <p:txBody>
+          <a:bodyPr wrap="square" lIns="0" tIns="0" rIns="0" bIns="0" rtlCol="0" anchor="t"/>
+          <a:lstStyle/>
+          <a:p>
+            <a:pPr indent="0" marL="0">
+              <a:buNone/>
+            </a:pPr>
+            <a:r>
+              <a:rPr lang="en-US" sz="1600" b="1" dirty="0">
+                <a:solidFill>
+                  <a:srgbClr val="1D1D1F"/>
+                </a:solidFill>
+                <a:latin typeface="Helvetica Neue" pitchFamily="34" charset="0"/>
+                <a:ea typeface="Helvetica Neue" pitchFamily="34" charset="-122"/>
+                <a:cs typeface="Helvetica Neue" pitchFamily="34" charset="-120"/>
+              </a:rPr>
+              <a:t>Pages gallery</a:t>
+            </a:r>
+            <a:endParaRPr lang="en-US" sz="1600" dirty="0"/>
+          </a:p>
+        </p:txBody>
+      </p:sp>
+      <p:sp>
+        <p:nvSpPr>
+          <p:cNvPr id="20" name="Text 17"/>
+          <p:cNvSpPr txBox="1"/>
+          <p:nvPr/>
+        </p:nvSpPr>
+        <p:spPr>
+          <a:xfrm>
+            <a:off x="9429521" y="2267712"/>
+            <a:ext cx="1893494" cy="365760"/>
+          </a:xfrm>
+          <a:prstGeom prst="rect">
+            <a:avLst/>
+          </a:prstGeom>
+          <a:noFill/>
+          <a:ln/>
+        </p:spPr>
+        <p:txBody>
+          <a:bodyPr wrap="square" lIns="0" tIns="0" rIns="0" bIns="0" rtlCol="0" anchor="t"/>
+          <a:lstStyle/>
+          <a:p>
+            <a:pPr indent="0" marL="0">
+              <a:buNone/>
+            </a:pPr>
+            <a:r>
+              <a:rPr lang="en-US" sz="1250" dirty="0">
+                <a:solidFill>
+                  <a:srgbClr val="6E6E73"/>
+                </a:solidFill>
+                <a:latin typeface="Helvetica Neue" pitchFamily="34" charset="0"/>
+                <a:ea typeface="Helvetica Neue" pitchFamily="34" charset="-122"/>
+                <a:cs typeface="Helvetica Neue" pitchFamily="34" charset="-120"/>
+              </a:rPr>
+              <a:t>same HTML renderer</a:t>
+            </a:r>
+            <a:endParaRPr lang="en-US" sz="1250" dirty="0"/>
+          </a:p>
+        </p:txBody>
+      </p:sp>
+      <p:sp>
+        <p:nvSpPr>
+          <p:cNvPr id="21" name="Shape 18"/>
+          <p:cNvSpPr/>
+          <p:nvPr/>
+        </p:nvSpPr>
+        <p:spPr>
+          <a:xfrm>
+            <a:off x="640080" y="3154680"/>
+            <a:ext cx="5760720" cy="3108960"/>
+          </a:xfrm>
+          <a:prstGeom prst="roundRect">
+            <a:avLst>
+              <a:gd name="adj" fmla="val 5294"/>
+            </a:avLst>
+          </a:prstGeom>
+          <a:solidFill>
+            <a:srgbClr val="FFFFFF"/>
+          </a:solidFill>
+          <a:ln w="12700">
+            <a:solidFill>
+              <a:srgbClr val="FFFFFF"/>
+            </a:solidFill>
+            <a:prstDash val="solid"/>
+          </a:ln>
+          <a:effectLst>
+            <a:outerShdw sx="100000" sy="100000" kx="0" ky="0" algn="bl" rotWithShape="0" blurRad="152400" dist="38100" dir="5400000">
+              <a:srgbClr val="000000">
+                <a:alpha val="10000"/>
+              </a:srgbClr>
+            </a:outerShdw>
+          </a:effectLst>
+        </p:spPr>
+      </p:sp>
+      <p:pic>
+        <p:nvPicPr>
+          <p:cNvPr id="22" name="gallery-fade.png" descr="The published card gallery page, showing the weekly status and milestone templates rendered by the same HTML renderer the app uses for email.">    </p:cNvPr>
+          <p:cNvPicPr>
+            <a:picLocks noChangeAspect="1"/>
+          </p:cNvPicPr>
+          <p:nvPr/>
+        </p:nvPicPr>
+        <p:blipFill>
+          <a:blip r:embed="rId1"/>
+          <a:srcRect l="0" r="0" t="0" b="0"/>
+          <a:stretch/>
+        </p:blipFill>
+        <p:spPr>
+          <a:xfrm>
+            <a:off x="749808" y="3264408"/>
+            <a:ext cx="5541264" cy="2889504"/>
+          </a:xfrm>
+          <a:prstGeom prst="rect">
+            <a:avLst/>
+          </a:prstGeom>
+        </p:spPr>
+      </p:pic>
+      <p:sp>
+        <p:nvSpPr>
+          <p:cNvPr id="23" name="Text 19"/>
+          <p:cNvSpPr txBox="1"/>
+          <p:nvPr/>
+        </p:nvSpPr>
+        <p:spPr>
+          <a:xfrm>
+            <a:off x="6812280" y="3246120"/>
+            <a:ext cx="4510735" cy="3017520"/>
           </a:xfrm>
           <a:prstGeom prst="rect">
             <a:avLst/>
@@ -5152,7 +5782,7 @@
           <a:p>
             <a:pPr marL="203200" indent="-203200">
               <a:spcAft>
-                <a:spcPts val="900"/>
+                <a:spcPts val="800"/>
               </a:spcAft>
               <a:buSzPct val="100000"/>
               <a:buChar char="•"/>
@@ -5166,14 +5796,14 @@
                 <a:ea typeface="Helvetica Neue" pitchFamily="34" charset="-122"/>
                 <a:cs typeface="Helvetica Neue" pitchFamily="34" charset="-120"/>
               </a:rPr>
-              <a:t>Tiny text markup on purpose, so every renderer agrees</a:t>
+              <a:t>User data stays on the Mac by design</a:t>
             </a:r>
             <a:endParaRPr lang="en-US" sz="1400" dirty="0"/>
           </a:p>
           <a:p>
             <a:pPr marL="203200" indent="-203200">
               <a:spcAft>
-                <a:spcPts val="900"/>
+                <a:spcPts val="800"/>
               </a:spcAft>
               <a:buSzPct val="100000"/>
               <a:buChar char="•"/>
@@ -5187,14 +5817,14 @@
                 <a:ea typeface="Helvetica Neue" pitchFamily="34" charset="-122"/>
                 <a:cs typeface="Helvetica Neue" pitchFamily="34" charset="-120"/>
               </a:rPr>
-              <a:t>Rich text has no alt text: Mail gets the caption; HTML and PDF keep the description</a:t>
+              <a:t>Release workflow on a version tag: zipped app and checksum</a:t>
             </a:r>
             <a:endParaRPr lang="en-US" sz="1400" dirty="0"/>
           </a:p>
           <a:p>
             <a:pPr marL="203200" indent="-203200">
               <a:spcAft>
-                <a:spcPts val="900"/>
+                <a:spcPts val="800"/>
               </a:spcAft>
               <a:buSzPct val="100000"/>
               <a:buChar char="•"/>
@@ -5208,14 +5838,14 @@
                 <a:ea typeface="Helvetica Neue" pitchFamily="34" charset="-122"/>
                 <a:cs typeface="Helvetica Neue" pitchFamily="34" charset="-120"/>
               </a:rPr>
-              <a:t>Colour-vision matrices are an approximation, not a clinical tool</a:t>
+              <a:t>Headless CLI: render from JSON, lint in any pipeline</a:t>
             </a:r>
             <a:endParaRPr lang="en-US" sz="1400" dirty="0"/>
           </a:p>
           <a:p>
             <a:pPr marL="203200" indent="-203200">
               <a:spcAft>
-                <a:spcPts val="900"/>
+                <a:spcPts val="800"/>
               </a:spcAft>
               <a:buSzPct val="100000"/>
               <a:buChar char="•"/>
@@ -5229,38 +5859,20 @@
                 <a:ea typeface="Helvetica Neue" pitchFamily="34" charset="-122"/>
                 <a:cs typeface="Helvetica Neue" pitchFamily="34" charset="-120"/>
               </a:rPr>
-              <a:t>Next: iPad target on the same core, share links, localisation</a:t>
+              <a:t>Enterprise path: notarise, then Apple Business Manager or MDM</a:t>
             </a:r>
             <a:endParaRPr lang="en-US" sz="1400" dirty="0"/>
           </a:p>
-        </p:txBody>
-      </p:sp>
-      <p:sp>
-        <p:nvSpPr>
-          <p:cNvPr id="12" name="Text 9"/>
-          <p:cNvSpPr txBox="1"/>
-          <p:nvPr/>
-        </p:nvSpPr>
-        <p:spPr>
-          <a:xfrm>
-            <a:off x="640080" y="5577840"/>
-            <a:ext cx="10911535" cy="640080"/>
-          </a:xfrm>
-          <a:prstGeom prst="rect">
-            <a:avLst/>
-          </a:prstGeom>
-          <a:noFill/>
-          <a:ln/>
-        </p:spPr>
-        <p:txBody>
-          <a:bodyPr wrap="square" lIns="0" tIns="0" rIns="0" bIns="0" rtlCol="0" anchor="t"/>
-          <a:lstStyle/>
-          <a:p>
-            <a:pPr indent="0" marL="0">
-              <a:buNone/>
-            </a:pPr>
-            <a:r>
-              <a:rPr lang="en-US" sz="1600" i="1" dirty="0">
+          <a:p>
+            <a:pPr marL="203200" indent="-203200">
+              <a:spcAft>
+                <a:spcPts val="800"/>
+              </a:spcAft>
+              <a:buSzPct val="100000"/>
+              <a:buChar char="•"/>
+            </a:pPr>
+            <a:r>
+              <a:rPr lang="en-US" sz="1400" dirty="0">
                 <a:solidFill>
                   <a:srgbClr val="1D1D1F"/>
                 </a:solidFill>
@@ -5268,9 +5880,9 @@
                 <a:ea typeface="Helvetica Neue" pitchFamily="34" charset="-122"/>
                 <a:cs typeface="Helvetica Neue" pitchFamily="34" charset="-120"/>
               </a:rPr>
-              <a:t>Each of these is written down in the repository, next to the feature it limits: the paste matrix, the accessibility notes and the decision records.</a:t>
-            </a:r>
-            <a:endParaRPr lang="en-US" sz="1600" dirty="0"/>
+              <a:t>Next: share links via CloudKit or an internal Swift service; the renderers do not change</a:t>
+            </a:r>
+            <a:endParaRPr lang="en-US" sz="1400" dirty="0"/>
           </a:p>
         </p:txBody>
       </p:sp>
@@ -5285,6 +5897,573 @@
 <file path=ppt/slides/slide14.xml><?xml version="1.0" encoding="utf-8"?>
 <p:sld xmlns:a="http://schemas.openxmlformats.org/drawingml/2006/main" xmlns:r="http://schemas.openxmlformats.org/officeDocument/2006/relationships" xmlns:p="http://schemas.openxmlformats.org/presentationml/2006/main">
   <p:cSld name="Slide 14">
+    <p:bg>
+      <p:bgPr>
+        <a:solidFill>
+          <a:srgbClr val="F5F5F7"/>
+        </a:solidFill>
+      </p:bgPr>
+    </p:bg>
+    <p:spTree>
+      <p:nvGrpSpPr>
+        <p:cNvPr id="1" name=""/>
+        <p:cNvGrpSpPr/>
+        <p:nvPr/>
+      </p:nvGrpSpPr>
+      <p:grpSpPr>
+        <a:xfrm>
+          <a:off x="0" y="0"/>
+          <a:ext cx="0" cy="0"/>
+          <a:chOff x="0" y="0"/>
+          <a:chExt cx="0" cy="0"/>
+        </a:xfrm>
+      </p:grpSpPr>
+      <p:sp>
+        <p:nvSpPr>
+          <p:cNvPr id="2" name="Text 0"/>
+          <p:cNvSpPr txBox="1"/>
+          <p:nvPr/>
+        </p:nvSpPr>
+        <p:spPr>
+          <a:xfrm>
+            <a:off x="11094415" y="6400800"/>
+            <a:ext cx="640080" cy="274320"/>
+          </a:xfrm>
+          <a:prstGeom prst="rect">
+            <a:avLst/>
+          </a:prstGeom>
+          <a:noFill/>
+          <a:ln/>
+        </p:spPr>
+        <p:txBody>
+          <a:bodyPr wrap="square" lIns="0" tIns="0" rIns="0" bIns="0" rtlCol="0" anchor="ctr"/>
+          <a:lstStyle/>
+          <a:p>
+            <a:pPr algn="r" indent="0" marL="0">
+              <a:buNone/>
+            </a:pPr>
+            <a:r>
+              <a:rPr lang="en-US" sz="1000" dirty="0">
+                <a:solidFill>
+                  <a:srgbClr val="6E6E73"/>
+                </a:solidFill>
+                <a:latin typeface="Helvetica Neue" pitchFamily="34" charset="0"/>
+                <a:ea typeface="Helvetica Neue" pitchFamily="34" charset="-122"/>
+                <a:cs typeface="Helvetica Neue" pitchFamily="34" charset="-120"/>
+              </a:rPr>
+              <a:t>14</a:t>
+            </a:r>
+            <a:endParaRPr lang="en-US" sz="1000" dirty="0"/>
+          </a:p>
+        </p:txBody>
+      </p:sp>
+      <p:sp>
+        <p:nvSpPr>
+          <p:cNvPr id="4" name="Text 1"/>
+          <p:cNvSpPr txBox="1"/>
+          <p:nvPr/>
+        </p:nvSpPr>
+        <p:spPr>
+          <a:xfrm>
+            <a:off x="640080" y="274320"/>
+            <a:ext cx="10911535" cy="274320"/>
+          </a:xfrm>
+          <a:prstGeom prst="rect">
+            <a:avLst/>
+          </a:prstGeom>
+          <a:noFill/>
+          <a:ln/>
+        </p:spPr>
+        <p:txBody>
+          <a:bodyPr wrap="square" lIns="0" tIns="0" rIns="0" bIns="0" rtlCol="0" anchor="ctr"/>
+          <a:lstStyle/>
+          <a:p>
+            <a:pPr indent="0" marL="0">
+              <a:buNone/>
+            </a:pPr>
+            <a:r>
+              <a:rPr lang="en-US" sz="1200" b="1" spc="150" kern="0" dirty="0">
+                <a:solidFill>
+                  <a:srgbClr val="6E6E73"/>
+                </a:solidFill>
+                <a:latin typeface="Helvetica Neue" pitchFamily="34" charset="0"/>
+                <a:ea typeface="Helvetica Neue" pitchFamily="34" charset="-122"/>
+                <a:cs typeface="Helvetica Neue" pitchFamily="34" charset="-120"/>
+              </a:rPr>
+              <a:t>TRADE-OFFS</a:t>
+            </a:r>
+            <a:endParaRPr lang="en-US" sz="1200" dirty="0"/>
+          </a:p>
+        </p:txBody>
+      </p:sp>
+      <p:sp>
+        <p:nvSpPr>
+          <p:cNvPr id="5" name="Text 2"/>
+          <p:cNvSpPr txBox="1"/>
+          <p:nvPr/>
+        </p:nvSpPr>
+        <p:spPr>
+          <a:xfrm>
+            <a:off x="640080" y="502920"/>
+            <a:ext cx="10911535" cy="822960"/>
+          </a:xfrm>
+          <a:prstGeom prst="rect">
+            <a:avLst/>
+          </a:prstGeom>
+          <a:noFill/>
+          <a:ln/>
+        </p:spPr>
+        <p:txBody>
+          <a:bodyPr wrap="square" lIns="0" tIns="0" rIns="0" bIns="0" rtlCol="0" anchor="t"/>
+          <a:lstStyle/>
+          <a:p>
+            <a:pPr indent="0" marL="0">
+              <a:buNone/>
+            </a:pPr>
+            <a:r>
+              <a:rPr lang="en-US" sz="3400" b="1" dirty="0">
+                <a:solidFill>
+                  <a:srgbClr val="1D1D1F"/>
+                </a:solidFill>
+                <a:latin typeface="Helvetica Neue" pitchFamily="34" charset="0"/>
+                <a:ea typeface="Helvetica Neue" pitchFamily="34" charset="-122"/>
+                <a:cs typeface="Helvetica Neue" pitchFamily="34" charset="-120"/>
+              </a:rPr>
+              <a:t>What I would not claim yet</a:t>
+            </a:r>
+            <a:endParaRPr lang="en-US" sz="3400" dirty="0"/>
+          </a:p>
+        </p:txBody>
+      </p:sp>
+      <p:sp>
+        <p:nvSpPr>
+          <p:cNvPr id="6" name="Shape 3"/>
+          <p:cNvSpPr/>
+          <p:nvPr/>
+        </p:nvSpPr>
+        <p:spPr>
+          <a:xfrm>
+            <a:off x="640080" y="1508760"/>
+            <a:ext cx="5227168" cy="3749040"/>
+          </a:xfrm>
+          <a:prstGeom prst="roundRect">
+            <a:avLst>
+              <a:gd name="adj" fmla="val 4390"/>
+            </a:avLst>
+          </a:prstGeom>
+          <a:solidFill>
+            <a:srgbClr val="FFFFFF"/>
+          </a:solidFill>
+          <a:ln w="12700">
+            <a:solidFill>
+              <a:srgbClr val="FFFFFF"/>
+            </a:solidFill>
+            <a:prstDash val="solid"/>
+          </a:ln>
+          <a:effectLst>
+            <a:outerShdw sx="100000" sy="100000" kx="0" ky="0" algn="bl" rotWithShape="0" blurRad="152400" dist="38100" dir="5400000">
+              <a:srgbClr val="000000">
+                <a:alpha val="10000"/>
+              </a:srgbClr>
+            </a:outerShdw>
+          </a:effectLst>
+        </p:spPr>
+      </p:sp>
+      <p:sp>
+        <p:nvSpPr>
+          <p:cNvPr id="7" name="Text 4"/>
+          <p:cNvSpPr txBox="1"/>
+          <p:nvPr/>
+        </p:nvSpPr>
+        <p:spPr>
+          <a:xfrm>
+            <a:off x="1005840" y="1737360"/>
+            <a:ext cx="4495648" cy="365760"/>
+          </a:xfrm>
+          <a:prstGeom prst="rect">
+            <a:avLst/>
+          </a:prstGeom>
+          <a:noFill/>
+          <a:ln/>
+        </p:spPr>
+        <p:txBody>
+          <a:bodyPr wrap="square" lIns="0" tIns="0" rIns="0" bIns="0" rtlCol="0" anchor="t"/>
+          <a:lstStyle/>
+          <a:p>
+            <a:pPr indent="0" marL="0">
+              <a:buNone/>
+            </a:pPr>
+            <a:r>
+              <a:rPr lang="en-US" sz="1700" b="1" dirty="0">
+                <a:solidFill>
+                  <a:srgbClr val="1D1D1F"/>
+                </a:solidFill>
+                <a:latin typeface="Helvetica Neue" pitchFamily="34" charset="0"/>
+                <a:ea typeface="Helvetica Neue" pitchFamily="34" charset="-122"/>
+                <a:cs typeface="Helvetica Neue" pitchFamily="34" charset="-120"/>
+              </a:rPr>
+              <a:t>Not verified, and documented as such</a:t>
+            </a:r>
+            <a:endParaRPr lang="en-US" sz="1700" dirty="0"/>
+          </a:p>
+        </p:txBody>
+      </p:sp>
+      <p:sp>
+        <p:nvSpPr>
+          <p:cNvPr id="8" name="Text 5"/>
+          <p:cNvSpPr txBox="1"/>
+          <p:nvPr/>
+        </p:nvSpPr>
+        <p:spPr>
+          <a:xfrm>
+            <a:off x="1005840" y="2240280"/>
+            <a:ext cx="4495648" cy="2926080"/>
+          </a:xfrm>
+          <a:prstGeom prst="rect">
+            <a:avLst/>
+          </a:prstGeom>
+          <a:noFill/>
+          <a:ln/>
+        </p:spPr>
+        <p:txBody>
+          <a:bodyPr wrap="square" lIns="0" tIns="0" rIns="0" bIns="0" rtlCol="0" anchor="t"/>
+          <a:lstStyle/>
+          <a:p>
+            <a:pPr marL="203200" indent="-203200">
+              <a:spcAft>
+                <a:spcPts val="900"/>
+              </a:spcAft>
+              <a:buSzPct val="100000"/>
+              <a:buChar char="•"/>
+            </a:pPr>
+            <a:r>
+              <a:rPr lang="en-US" sz="1400" dirty="0">
+                <a:solidFill>
+                  <a:srgbClr val="1D1D1F"/>
+                </a:solidFill>
+                <a:latin typeface="Helvetica Neue" pitchFamily="34" charset="0"/>
+                <a:ea typeface="Helvetica Neue" pitchFamily="34" charset="-122"/>
+                <a:cs typeface="Helvetica Neue" pitchFamily="34" charset="-120"/>
+              </a:rPr>
+              <a:t>On-device model: compiles with availability checks, not run (my Mac is on macOS 15)</a:t>
+            </a:r>
+            <a:endParaRPr lang="en-US" sz="1400" dirty="0"/>
+          </a:p>
+          <a:p>
+            <a:pPr marL="203200" indent="-203200">
+              <a:spcAft>
+                <a:spcPts val="900"/>
+              </a:spcAft>
+              <a:buSzPct val="100000"/>
+              <a:buChar char="•"/>
+            </a:pPr>
+            <a:r>
+              <a:rPr lang="en-US" sz="1400" dirty="0">
+                <a:solidFill>
+                  <a:srgbClr val="1D1D1F"/>
+                </a:solidFill>
+                <a:latin typeface="Helvetica Neue" pitchFamily="34" charset="0"/>
+                <a:ea typeface="Helvetica Neue" pitchFamily="34" charset="-122"/>
+                <a:cs typeface="Helvetica Neue" pitchFamily="34" charset="-120"/>
+              </a:rPr>
+              <a:t>Paste targets: “verified” and “expected” are kept apart in the docs</a:t>
+            </a:r>
+            <a:endParaRPr lang="en-US" sz="1400" dirty="0"/>
+          </a:p>
+          <a:p>
+            <a:pPr marL="203200" indent="-203200">
+              <a:spcAft>
+                <a:spcPts val="900"/>
+              </a:spcAft>
+              <a:buSzPct val="100000"/>
+              <a:buChar char="•"/>
+            </a:pPr>
+            <a:r>
+              <a:rPr lang="en-US" sz="1400" dirty="0">
+                <a:solidFill>
+                  <a:srgbClr val="1D1D1F"/>
+                </a:solidFill>
+                <a:latin typeface="Helvetica Neue" pitchFamily="34" charset="0"/>
+                <a:ea typeface="Helvetica Neue" pitchFamily="34" charset="-122"/>
+                <a:cs typeface="Helvetica Neue" pitchFamily="34" charset="-120"/>
+              </a:rPr>
+              <a:t>VoiceOver features: data is tested, the experience needs a human</a:t>
+            </a:r>
+            <a:endParaRPr lang="en-US" sz="1400" dirty="0"/>
+          </a:p>
+          <a:p>
+            <a:pPr marL="203200" indent="-203200">
+              <a:spcAft>
+                <a:spcPts val="900"/>
+              </a:spcAft>
+              <a:buSzPct val="100000"/>
+              <a:buChar char="•"/>
+            </a:pPr>
+            <a:r>
+              <a:rPr lang="en-US" sz="1400" dirty="0">
+                <a:solidFill>
+                  <a:srgbClr val="1D1D1F"/>
+                </a:solidFill>
+                <a:latin typeface="Helvetica Neue" pitchFamily="34" charset="0"/>
+                <a:ea typeface="Helvetica Neue" pitchFamily="34" charset="-122"/>
+                <a:cs typeface="Helvetica Neue" pitchFamily="34" charset="-120"/>
+              </a:rPr>
+              <a:t>Tagged PDF: structure tree present, not validated against PDF/UA</a:t>
+            </a:r>
+            <a:endParaRPr lang="en-US" sz="1400" dirty="0"/>
+          </a:p>
+          <a:p>
+            <a:pPr marL="203200" indent="-203200">
+              <a:spcAft>
+                <a:spcPts val="900"/>
+              </a:spcAft>
+              <a:buSzPct val="100000"/>
+              <a:buChar char="•"/>
+            </a:pPr>
+            <a:r>
+              <a:rPr lang="en-US" sz="1400" dirty="0">
+                <a:solidFill>
+                  <a:srgbClr val="1D1D1F"/>
+                </a:solidFill>
+                <a:latin typeface="Helvetica Neue" pitchFamily="34" charset="0"/>
+                <a:ea typeface="Helvetica Neue" pitchFamily="34" charset="-122"/>
+                <a:cs typeface="Helvetica Neue" pitchFamily="34" charset="-120"/>
+              </a:rPr>
+              <a:t>Ad-hoc signed; notarisation needs a Developer ID</a:t>
+            </a:r>
+            <a:endParaRPr lang="en-US" sz="1400" dirty="0"/>
+          </a:p>
+        </p:txBody>
+      </p:sp>
+      <p:sp>
+        <p:nvSpPr>
+          <p:cNvPr id="9" name="Shape 6"/>
+          <p:cNvSpPr/>
+          <p:nvPr/>
+        </p:nvSpPr>
+        <p:spPr>
+          <a:xfrm>
+            <a:off x="6324448" y="1508760"/>
+            <a:ext cx="5227168" cy="3749040"/>
+          </a:xfrm>
+          <a:prstGeom prst="roundRect">
+            <a:avLst>
+              <a:gd name="adj" fmla="val 4390"/>
+            </a:avLst>
+          </a:prstGeom>
+          <a:solidFill>
+            <a:srgbClr val="FFFFFF"/>
+          </a:solidFill>
+          <a:ln w="12700">
+            <a:solidFill>
+              <a:srgbClr val="FFFFFF"/>
+            </a:solidFill>
+            <a:prstDash val="solid"/>
+          </a:ln>
+          <a:effectLst>
+            <a:outerShdw sx="100000" sy="100000" kx="0" ky="0" algn="bl" rotWithShape="0" blurRad="152400" dist="38100" dir="5400000">
+              <a:srgbClr val="000000">
+                <a:alpha val="10000"/>
+              </a:srgbClr>
+            </a:outerShdw>
+          </a:effectLst>
+        </p:spPr>
+      </p:sp>
+      <p:sp>
+        <p:nvSpPr>
+          <p:cNvPr id="10" name="Text 7"/>
+          <p:cNvSpPr txBox="1"/>
+          <p:nvPr/>
+        </p:nvSpPr>
+        <p:spPr>
+          <a:xfrm>
+            <a:off x="6690208" y="1737360"/>
+            <a:ext cx="4495648" cy="365760"/>
+          </a:xfrm>
+          <a:prstGeom prst="rect">
+            <a:avLst/>
+          </a:prstGeom>
+          <a:noFill/>
+          <a:ln/>
+        </p:spPr>
+        <p:txBody>
+          <a:bodyPr wrap="square" lIns="0" tIns="0" rIns="0" bIns="0" rtlCol="0" anchor="t"/>
+          <a:lstStyle/>
+          <a:p>
+            <a:pPr indent="0" marL="0">
+              <a:buNone/>
+            </a:pPr>
+            <a:r>
+              <a:rPr lang="en-US" sz="1700" b="1" dirty="0">
+                <a:solidFill>
+                  <a:srgbClr val="1D1D1F"/>
+                </a:solidFill>
+                <a:latin typeface="Helvetica Neue" pitchFamily="34" charset="0"/>
+                <a:ea typeface="Helvetica Neue" pitchFamily="34" charset="-122"/>
+                <a:cs typeface="Helvetica Neue" pitchFamily="34" charset="-120"/>
+              </a:rPr>
+              <a:t>Deliberate limits and next steps</a:t>
+            </a:r>
+            <a:endParaRPr lang="en-US" sz="1700" dirty="0"/>
+          </a:p>
+        </p:txBody>
+      </p:sp>
+      <p:sp>
+        <p:nvSpPr>
+          <p:cNvPr id="11" name="Text 8"/>
+          <p:cNvSpPr txBox="1"/>
+          <p:nvPr/>
+        </p:nvSpPr>
+        <p:spPr>
+          <a:xfrm>
+            <a:off x="6690208" y="2240280"/>
+            <a:ext cx="4495648" cy="2926080"/>
+          </a:xfrm>
+          <a:prstGeom prst="rect">
+            <a:avLst/>
+          </a:prstGeom>
+          <a:noFill/>
+          <a:ln/>
+        </p:spPr>
+        <p:txBody>
+          <a:bodyPr wrap="square" lIns="0" tIns="0" rIns="0" bIns="0" rtlCol="0" anchor="t"/>
+          <a:lstStyle/>
+          <a:p>
+            <a:pPr marL="203200" indent="-203200">
+              <a:spcAft>
+                <a:spcPts val="900"/>
+              </a:spcAft>
+              <a:buSzPct val="100000"/>
+              <a:buChar char="•"/>
+            </a:pPr>
+            <a:r>
+              <a:rPr lang="en-US" sz="1400" dirty="0">
+                <a:solidFill>
+                  <a:srgbClr val="1D1D1F"/>
+                </a:solidFill>
+                <a:latin typeface="Helvetica Neue" pitchFamily="34" charset="0"/>
+                <a:ea typeface="Helvetica Neue" pitchFamily="34" charset="-122"/>
+                <a:cs typeface="Helvetica Neue" pitchFamily="34" charset="-120"/>
+              </a:rPr>
+              <a:t>Tiny text markup on purpose, so every renderer agrees</a:t>
+            </a:r>
+            <a:endParaRPr lang="en-US" sz="1400" dirty="0"/>
+          </a:p>
+          <a:p>
+            <a:pPr marL="203200" indent="-203200">
+              <a:spcAft>
+                <a:spcPts val="900"/>
+              </a:spcAft>
+              <a:buSzPct val="100000"/>
+              <a:buChar char="•"/>
+            </a:pPr>
+            <a:r>
+              <a:rPr lang="en-US" sz="1400" dirty="0">
+                <a:solidFill>
+                  <a:srgbClr val="1D1D1F"/>
+                </a:solidFill>
+                <a:latin typeface="Helvetica Neue" pitchFamily="34" charset="0"/>
+                <a:ea typeface="Helvetica Neue" pitchFamily="34" charset="-122"/>
+                <a:cs typeface="Helvetica Neue" pitchFamily="34" charset="-120"/>
+              </a:rPr>
+              <a:t>Rich text has no alt text: Mail gets the caption; HTML and PDF keep the description</a:t>
+            </a:r>
+            <a:endParaRPr lang="en-US" sz="1400" dirty="0"/>
+          </a:p>
+          <a:p>
+            <a:pPr marL="203200" indent="-203200">
+              <a:spcAft>
+                <a:spcPts val="900"/>
+              </a:spcAft>
+              <a:buSzPct val="100000"/>
+              <a:buChar char="•"/>
+            </a:pPr>
+            <a:r>
+              <a:rPr lang="en-US" sz="1400" dirty="0">
+                <a:solidFill>
+                  <a:srgbClr val="1D1D1F"/>
+                </a:solidFill>
+                <a:latin typeface="Helvetica Neue" pitchFamily="34" charset="0"/>
+                <a:ea typeface="Helvetica Neue" pitchFamily="34" charset="-122"/>
+                <a:cs typeface="Helvetica Neue" pitchFamily="34" charset="-120"/>
+              </a:rPr>
+              <a:t>Colour-vision matrices are an approximation, not a clinical tool</a:t>
+            </a:r>
+            <a:endParaRPr lang="en-US" sz="1400" dirty="0"/>
+          </a:p>
+          <a:p>
+            <a:pPr marL="203200" indent="-203200">
+              <a:spcAft>
+                <a:spcPts val="900"/>
+              </a:spcAft>
+              <a:buSzPct val="100000"/>
+              <a:buChar char="•"/>
+            </a:pPr>
+            <a:r>
+              <a:rPr lang="en-US" sz="1400" dirty="0">
+                <a:solidFill>
+                  <a:srgbClr val="1D1D1F"/>
+                </a:solidFill>
+                <a:latin typeface="Helvetica Neue" pitchFamily="34" charset="0"/>
+                <a:ea typeface="Helvetica Neue" pitchFamily="34" charset="-122"/>
+                <a:cs typeface="Helvetica Neue" pitchFamily="34" charset="-120"/>
+              </a:rPr>
+              <a:t>Next: iPad target on the same core, share links, localisation</a:t>
+            </a:r>
+            <a:endParaRPr lang="en-US" sz="1400" dirty="0"/>
+          </a:p>
+        </p:txBody>
+      </p:sp>
+      <p:sp>
+        <p:nvSpPr>
+          <p:cNvPr id="12" name="Text 9"/>
+          <p:cNvSpPr txBox="1"/>
+          <p:nvPr/>
+        </p:nvSpPr>
+        <p:spPr>
+          <a:xfrm>
+            <a:off x="640080" y="5577840"/>
+            <a:ext cx="10911535" cy="640080"/>
+          </a:xfrm>
+          <a:prstGeom prst="rect">
+            <a:avLst/>
+          </a:prstGeom>
+          <a:noFill/>
+          <a:ln/>
+        </p:spPr>
+        <p:txBody>
+          <a:bodyPr wrap="square" lIns="0" tIns="0" rIns="0" bIns="0" rtlCol="0" anchor="t"/>
+          <a:lstStyle/>
+          <a:p>
+            <a:pPr indent="0" marL="0">
+              <a:buNone/>
+            </a:pPr>
+            <a:r>
+              <a:rPr lang="en-US" sz="1600" i="1" dirty="0">
+                <a:solidFill>
+                  <a:srgbClr val="1D1D1F"/>
+                </a:solidFill>
+                <a:latin typeface="Helvetica Neue" pitchFamily="34" charset="0"/>
+                <a:ea typeface="Helvetica Neue" pitchFamily="34" charset="-122"/>
+                <a:cs typeface="Helvetica Neue" pitchFamily="34" charset="-120"/>
+              </a:rPr>
+              <a:t>Each of these is written down in the repository, next to the feature it limits: the paste matrix, the accessibility notes and the decision records.</a:t>
+            </a:r>
+            <a:endParaRPr lang="en-US" sz="1600" dirty="0"/>
+          </a:p>
+        </p:txBody>
+      </p:sp>
+    </p:spTree>
+  </p:cSld>
+  <p:clrMapOvr>
+    <a:masterClrMapping/>
+  </p:clrMapOvr>
+</p:sld>
+</file>
+
+<file path=ppt/slides/slide15.xml><?xml version="1.0" encoding="utf-8"?>
+<p:sld xmlns:a="http://schemas.openxmlformats.org/drawingml/2006/main" xmlns:r="http://schemas.openxmlformats.org/officeDocument/2006/relationships" xmlns:p="http://schemas.openxmlformats.org/presentationml/2006/main">
+  <p:cSld name="Slide 15">
     <p:bg>
       <p:bgPr>
         <a:solidFill>
@@ -5339,7 +6518,7 @@
                 <a:ea typeface="Helvetica Neue" pitchFamily="34" charset="-122"/>
                 <a:cs typeface="Helvetica Neue" pitchFamily="34" charset="-120"/>
               </a:rPr>
-              <a:t>14</a:t>
+              <a:t>15</a:t>
             </a:r>
             <a:endParaRPr lang="en-US" sz="1000" dirty="0"/>
           </a:p>
@@ -8898,7 +10077,7 @@
                 <a:ea typeface="Helvetica Neue" pitchFamily="34" charset="-122"/>
                 <a:cs typeface="Helvetica Neue" pitchFamily="34" charset="-120"/>
               </a:rPr>
-              <a:t>PRINCIPLE 2</a:t>
+              <a:t>ARCHITECTURE</a:t>
             </a:r>
             <a:endParaRPr lang="en-US" sz="1200" dirty="0"/>
           </a:p>
@@ -8937,7 +10116,7 @@
                 <a:ea typeface="Helvetica Neue" pitchFamily="34" charset="-122"/>
                 <a:cs typeface="Helvetica Neue" pitchFamily="34" charset="-120"/>
               </a:rPr>
-              <a:t>The card is the editor</a:t>
+              <a:t>One package below, two consumers above</a:t>
             </a:r>
             <a:endParaRPr lang="en-US" sz="3400" dirty="0"/>
           </a:p>
@@ -8951,12 +10130,12 @@
         </p:nvSpPr>
         <p:spPr>
           <a:xfrm>
-            <a:off x="640080" y="1508760"/>
-            <a:ext cx="5227168" cy="3611880"/>
+            <a:off x="640080" y="1417320"/>
+            <a:ext cx="6675120" cy="1188720"/>
           </a:xfrm>
           <a:prstGeom prst="roundRect">
             <a:avLst>
-              <a:gd name="adj" fmla="val 4557"/>
+              <a:gd name="adj" fmla="val 13846"/>
             </a:avLst>
           </a:prstGeom>
           <a:solidFill>
@@ -8977,55 +10156,71 @@
           </a:effectLst>
         </p:spPr>
       </p:sp>
-      <p:pic>
-        <p:nvPicPr>
-          <p:cNvPr id="7" name="before.png" descr="The first interface: a form of fields on the left and a live preview on the right, with capital-letter labels and boxed tiles.">    </p:cNvPr>
-          <p:cNvPicPr>
-            <a:picLocks noChangeAspect="1"/>
-          </p:cNvPicPr>
-          <p:nvPr/>
-        </p:nvPicPr>
-        <p:blipFill>
-          <a:blip r:embed="rId1"/>
-          <a:srcRect l="0" r="0" t="0" b="0"/>
-          <a:stretch/>
-        </p:blipFill>
-        <p:spPr>
-          <a:xfrm>
-            <a:off x="749808" y="1618488"/>
-            <a:ext cx="5007712" cy="3108960"/>
-          </a:xfrm>
-          <a:prstGeom prst="rect">
-            <a:avLst/>
-          </a:prstGeom>
-        </p:spPr>
-      </p:pic>
-      <p:sp>
-        <p:nvSpPr>
-          <p:cNvPr id="8" name="Text 4"/>
-          <p:cNvSpPr txBox="1"/>
-          <p:nvPr/>
-        </p:nvSpPr>
-        <p:spPr>
-          <a:xfrm>
-            <a:off x="914400" y="4800600"/>
-            <a:ext cx="4678528" cy="274320"/>
-          </a:xfrm>
-          <a:prstGeom prst="rect">
-            <a:avLst/>
-          </a:prstGeom>
-          <a:noFill/>
-          <a:ln/>
-        </p:spPr>
-        <p:txBody>
-          <a:bodyPr wrap="square" lIns="0" tIns="0" rIns="0" bIns="0" rtlCol="0" anchor="t"/>
-          <a:lstStyle/>
-          <a:p>
-            <a:pPr indent="0" marL="0">
-              <a:buNone/>
-            </a:pPr>
-            <a:r>
-              <a:rPr lang="en-US" sz="1300" b="1" dirty="0">
+      <p:sp>
+        <p:nvSpPr>
+          <p:cNvPr id="7" name="Text 4"/>
+          <p:cNvSpPr txBox="1"/>
+          <p:nvPr/>
+        </p:nvSpPr>
+        <p:spPr>
+          <a:xfrm>
+            <a:off x="960120" y="1627632"/>
+            <a:ext cx="6035040" cy="365760"/>
+          </a:xfrm>
+          <a:prstGeom prst="rect">
+            <a:avLst/>
+          </a:prstGeom>
+          <a:noFill/>
+          <a:ln/>
+        </p:spPr>
+        <p:txBody>
+          <a:bodyPr wrap="square" lIns="0" tIns="0" rIns="0" bIns="0" rtlCol="0" anchor="t"/>
+          <a:lstStyle/>
+          <a:p>
+            <a:pPr indent="0" marL="0">
+              <a:buNone/>
+            </a:pPr>
+            <a:r>
+              <a:rPr lang="en-US" sz="1800" b="1" dirty="0">
+                <a:solidFill>
+                  <a:srgbClr val="1D1D1F"/>
+                </a:solidFill>
+                <a:latin typeface="Helvetica Neue" pitchFamily="34" charset="0"/>
+                <a:ea typeface="Helvetica Neue" pitchFamily="34" charset="-122"/>
+                <a:cs typeface="Helvetica Neue" pitchFamily="34" charset="-120"/>
+              </a:rPr>
+              <a:t>Reporting Builder.app</a:t>
+            </a:r>
+            <a:endParaRPr lang="en-US" sz="1800" dirty="0"/>
+          </a:p>
+        </p:txBody>
+      </p:sp>
+      <p:sp>
+        <p:nvSpPr>
+          <p:cNvPr id="8" name="Text 5"/>
+          <p:cNvSpPr txBox="1"/>
+          <p:nvPr/>
+        </p:nvSpPr>
+        <p:spPr>
+          <a:xfrm>
+            <a:off x="960120" y="2048256"/>
+            <a:ext cx="6035040" cy="457200"/>
+          </a:xfrm>
+          <a:prstGeom prst="rect">
+            <a:avLst/>
+          </a:prstGeom>
+          <a:noFill/>
+          <a:ln/>
+        </p:spPr>
+        <p:txBody>
+          <a:bodyPr wrap="square" lIns="0" tIns="0" rIns="0" bIns="0" rtlCol="0" anchor="t"/>
+          <a:lstStyle/>
+          <a:p>
+            <a:pPr indent="0" marL="0">
+              <a:buNone/>
+            </a:pPr>
+            <a:r>
+              <a:rPr lang="en-US" sz="1300" dirty="0">
                 <a:solidFill>
                   <a:srgbClr val="6E6E73"/>
                 </a:solidFill>
@@ -9033,7 +10228,7 @@
                 <a:ea typeface="Helvetica Neue" pitchFamily="34" charset="-122"/>
                 <a:cs typeface="Helvetica Neue" pitchFamily="34" charset="-120"/>
               </a:rPr>
-              <a:t>Version 1: form + preview</a:t>
+              <a:t>SwiftUI + AppKit · Store · Workspace · Canvas · Inspector · Export · Assistant</a:t>
             </a:r>
             <a:endParaRPr lang="en-US" sz="1300" dirty="0"/>
           </a:p>
@@ -9041,18 +10236,18 @@
       </p:sp>
       <p:sp>
         <p:nvSpPr>
-          <p:cNvPr id="9" name="Shape 5"/>
+          <p:cNvPr id="9" name="Shape 6"/>
           <p:cNvSpPr/>
           <p:nvPr/>
         </p:nvSpPr>
         <p:spPr>
           <a:xfrm>
-            <a:off x="6324448" y="1508760"/>
-            <a:ext cx="5227168" cy="3611880"/>
+            <a:off x="7680960" y="1417320"/>
+            <a:ext cx="3870655" cy="1188720"/>
           </a:xfrm>
           <a:prstGeom prst="roundRect">
             <a:avLst>
-              <a:gd name="adj" fmla="val 4557"/>
+              <a:gd name="adj" fmla="val 13846"/>
             </a:avLst>
           </a:prstGeom>
           <a:solidFill>
@@ -9073,63 +10268,79 @@
           </a:effectLst>
         </p:spPr>
       </p:sp>
-      <p:pic>
-        <p:nvPicPr>
-          <p:cNvPr id="10" name="hero.png" descr="The second interface: the card itself edited on a canvas, with its properties moved into a Format inspector.">    </p:cNvPr>
-          <p:cNvPicPr>
-            <a:picLocks noChangeAspect="1"/>
-          </p:cNvPicPr>
-          <p:nvPr/>
-        </p:nvPicPr>
-        <p:blipFill>
-          <a:blip r:embed="rId2"/>
-          <a:srcRect l="0" r="0" t="0" b="0"/>
-          <a:stretch/>
-        </p:blipFill>
-        <p:spPr>
-          <a:xfrm>
-            <a:off x="6434176" y="1618488"/>
-            <a:ext cx="5007712" cy="3108960"/>
-          </a:xfrm>
-          <a:prstGeom prst="rect">
-            <a:avLst/>
-          </a:prstGeom>
-        </p:spPr>
-      </p:pic>
-      <p:sp>
-        <p:nvSpPr>
-          <p:cNvPr id="11" name="Text 6"/>
-          <p:cNvSpPr txBox="1"/>
-          <p:nvPr/>
-        </p:nvSpPr>
-        <p:spPr>
-          <a:xfrm>
-            <a:off x="6598768" y="4800600"/>
-            <a:ext cx="4678528" cy="274320"/>
-          </a:xfrm>
-          <a:prstGeom prst="rect">
-            <a:avLst/>
-          </a:prstGeom>
-          <a:noFill/>
-          <a:ln/>
-        </p:spPr>
-        <p:txBody>
-          <a:bodyPr wrap="square" lIns="0" tIns="0" rIns="0" bIns="0" rtlCol="0" anchor="t"/>
-          <a:lstStyle/>
-          <a:p>
-            <a:pPr indent="0" marL="0">
-              <a:buNone/>
-            </a:pPr>
-            <a:r>
-              <a:rPr lang="en-US" sz="1300" b="1" dirty="0">
-                <a:solidFill>
-                  <a:srgbClr val="0066CC"/>
-                </a:solidFill>
-                <a:latin typeface="Helvetica Neue" pitchFamily="34" charset="0"/>
-                <a:ea typeface="Helvetica Neue" pitchFamily="34" charset="-122"/>
-                <a:cs typeface="Helvetica Neue" pitchFamily="34" charset="-120"/>
-              </a:rPr>
-              <a:t>Version 2: canvas + Format inspector</a:t>
+      <p:sp>
+        <p:nvSpPr>
+          <p:cNvPr id="10" name="Text 7"/>
+          <p:cNvSpPr txBox="1"/>
+          <p:nvPr/>
+        </p:nvSpPr>
+        <p:spPr>
+          <a:xfrm>
+            <a:off x="8001000" y="1627632"/>
+            <a:ext cx="3230575" cy="365760"/>
+          </a:xfrm>
+          <a:prstGeom prst="rect">
+            <a:avLst/>
+          </a:prstGeom>
+          <a:noFill/>
+          <a:ln/>
+        </p:spPr>
+        <p:txBody>
+          <a:bodyPr wrap="square" lIns="0" tIns="0" rIns="0" bIns="0" rtlCol="0" anchor="t"/>
+          <a:lstStyle/>
+          <a:p>
+            <a:pPr indent="0" marL="0">
+              <a:buNone/>
+            </a:pPr>
+            <a:r>
+              <a:rPr lang="en-US" sz="1800" b="1" dirty="0">
+                <a:solidFill>
+                  <a:srgbClr val="1D1D1F"/>
+                </a:solidFill>
+                <a:latin typeface="Helvetica Neue" pitchFamily="34" charset="0"/>
+                <a:ea typeface="Helvetica Neue" pitchFamily="34" charset="-122"/>
+                <a:cs typeface="Helvetica Neue" pitchFamily="34" charset="-120"/>
+              </a:rPr>
+              <a:t>reportcard</a:t>
+            </a:r>
+            <a:endParaRPr lang="en-US" sz="1800" dirty="0"/>
+          </a:p>
+        </p:txBody>
+      </p:sp>
+      <p:sp>
+        <p:nvSpPr>
+          <p:cNvPr id="11" name="Text 8"/>
+          <p:cNvSpPr txBox="1"/>
+          <p:nvPr/>
+        </p:nvSpPr>
+        <p:spPr>
+          <a:xfrm>
+            <a:off x="8001000" y="2048256"/>
+            <a:ext cx="3230575" cy="457200"/>
+          </a:xfrm>
+          <a:prstGeom prst="rect">
+            <a:avLst/>
+          </a:prstGeom>
+          <a:noFill/>
+          <a:ln/>
+        </p:spPr>
+        <p:txBody>
+          <a:bodyPr wrap="square" lIns="0" tIns="0" rIns="0" bIns="0" rtlCol="0" anchor="t"/>
+          <a:lstStyle/>
+          <a:p>
+            <a:pPr indent="0" marL="0">
+              <a:buNone/>
+            </a:pPr>
+            <a:r>
+              <a:rPr lang="en-US" sz="1300" dirty="0">
+                <a:solidFill>
+                  <a:srgbClr val="6E6E73"/>
+                </a:solidFill>
+                <a:latin typeface="Helvetica Neue" pitchFamily="34" charset="0"/>
+                <a:ea typeface="Helvetica Neue" pitchFamily="34" charset="-122"/>
+                <a:cs typeface="Helvetica Neue" pitchFamily="34" charset="-120"/>
+              </a:rPr>
+              <a:t>a command-line tool · render · lint · site</a:t>
             </a:r>
             <a:endParaRPr lang="en-US" sz="1300" dirty="0"/>
           </a:p>
@@ -9137,55 +10348,337 @@
       </p:sp>
       <p:sp>
         <p:nvSpPr>
-          <p:cNvPr id="12" name="Text 7"/>
-          <p:cNvSpPr txBox="1"/>
-          <p:nvPr/>
-        </p:nvSpPr>
-        <p:spPr>
-          <a:xfrm>
-            <a:off x="777240" y="5394960"/>
-            <a:ext cx="10774375" cy="1188720"/>
-          </a:xfrm>
-          <a:prstGeom prst="rect">
-            <a:avLst/>
-          </a:prstGeom>
-          <a:noFill/>
-          <a:ln/>
-        </p:spPr>
-        <p:txBody>
-          <a:bodyPr wrap="square" lIns="0" tIns="0" rIns="0" bIns="0" rtlCol="0" anchor="t"/>
-          <a:lstStyle/>
-          <a:p>
-            <a:pPr marL="203200" indent="-203200">
-              <a:spcAft>
-                <a:spcPts val="400"/>
-              </a:spcAft>
-              <a:buSzPct val="100000"/>
-              <a:buChar char="•"/>
+          <p:cNvPr id="12" name="Text 9"/>
+          <p:cNvSpPr txBox="1"/>
+          <p:nvPr/>
+        </p:nvSpPr>
+        <p:spPr>
+          <a:xfrm>
+            <a:off x="640080" y="2743200"/>
+            <a:ext cx="6675120" cy="320040"/>
+          </a:xfrm>
+          <a:prstGeom prst="rect">
+            <a:avLst/>
+          </a:prstGeom>
+          <a:noFill/>
+          <a:ln/>
+        </p:spPr>
+        <p:txBody>
+          <a:bodyPr wrap="square" lIns="0" tIns="0" rIns="0" bIns="0" rtlCol="0" anchor="t"/>
+          <a:lstStyle/>
+          <a:p>
+            <a:pPr algn="ctr" indent="0" marL="0">
+              <a:buNone/>
+            </a:pPr>
+            <a:r>
+              <a:rPr lang="en-US" sz="1300" dirty="0">
+                <a:solidFill>
+                  <a:srgbClr val="6E6E73"/>
+                </a:solidFill>
+                <a:latin typeface="Helvetica Neue" pitchFamily="34" charset="0"/>
+                <a:ea typeface="Helvetica Neue" pitchFamily="34" charset="-122"/>
+                <a:cs typeface="Helvetica Neue" pitchFamily="34" charset="-120"/>
+              </a:rPr>
+              <a:t>↓  imports</a:t>
+            </a:r>
+            <a:endParaRPr lang="en-US" sz="1300" dirty="0"/>
+          </a:p>
+        </p:txBody>
+      </p:sp>
+      <p:sp>
+        <p:nvSpPr>
+          <p:cNvPr id="13" name="Text 10"/>
+          <p:cNvSpPr txBox="1"/>
+          <p:nvPr/>
+        </p:nvSpPr>
+        <p:spPr>
+          <a:xfrm>
+            <a:off x="7680960" y="2743200"/>
+            <a:ext cx="3870655" cy="320040"/>
+          </a:xfrm>
+          <a:prstGeom prst="rect">
+            <a:avLst/>
+          </a:prstGeom>
+          <a:noFill/>
+          <a:ln/>
+        </p:spPr>
+        <p:txBody>
+          <a:bodyPr wrap="square" lIns="0" tIns="0" rIns="0" bIns="0" rtlCol="0" anchor="t"/>
+          <a:lstStyle/>
+          <a:p>
+            <a:pPr algn="ctr" indent="0" marL="0">
+              <a:buNone/>
+            </a:pPr>
+            <a:r>
+              <a:rPr lang="en-US" sz="1300" dirty="0">
+                <a:solidFill>
+                  <a:srgbClr val="6E6E73"/>
+                </a:solidFill>
+                <a:latin typeface="Helvetica Neue" pitchFamily="34" charset="0"/>
+                <a:ea typeface="Helvetica Neue" pitchFamily="34" charset="-122"/>
+                <a:cs typeface="Helvetica Neue" pitchFamily="34" charset="-120"/>
+              </a:rPr>
+              <a:t>↓  imports</a:t>
+            </a:r>
+            <a:endParaRPr lang="en-US" sz="1300" dirty="0"/>
+          </a:p>
+        </p:txBody>
+      </p:sp>
+      <p:sp>
+        <p:nvSpPr>
+          <p:cNvPr id="14" name="Shape 11"/>
+          <p:cNvSpPr/>
+          <p:nvPr/>
+        </p:nvSpPr>
+        <p:spPr>
+          <a:xfrm>
+            <a:off x="640080" y="3200400"/>
+            <a:ext cx="10911535" cy="1371600"/>
+          </a:xfrm>
+          <a:prstGeom prst="roundRect">
+            <a:avLst>
+              <a:gd name="adj" fmla="val 12000"/>
+            </a:avLst>
+          </a:prstGeom>
+          <a:solidFill>
+            <a:srgbClr val="1D1D1F"/>
+          </a:solidFill>
+          <a:ln w="12700">
+            <a:solidFill>
+              <a:srgbClr val="1D1D1F"/>
+            </a:solidFill>
+            <a:prstDash val="solid"/>
+          </a:ln>
+          <a:effectLst>
+            <a:outerShdw sx="100000" sy="100000" kx="0" ky="0" algn="bl" rotWithShape="0" blurRad="152400" dist="38100" dir="5400000">
+              <a:srgbClr val="000000">
+                <a:alpha val="10000"/>
+              </a:srgbClr>
+            </a:outerShdw>
+          </a:effectLst>
+        </p:spPr>
+      </p:sp>
+      <p:sp>
+        <p:nvSpPr>
+          <p:cNvPr id="15" name="Text 12"/>
+          <p:cNvSpPr txBox="1"/>
+          <p:nvPr/>
+        </p:nvSpPr>
+        <p:spPr>
+          <a:xfrm>
+            <a:off x="1051560" y="3401568"/>
+            <a:ext cx="10088575" cy="411480"/>
+          </a:xfrm>
+          <a:prstGeom prst="rect">
+            <a:avLst/>
+          </a:prstGeom>
+          <a:noFill/>
+          <a:ln/>
+        </p:spPr>
+        <p:txBody>
+          <a:bodyPr wrap="square" lIns="0" tIns="0" rIns="0" bIns="0" rtlCol="0" anchor="t"/>
+          <a:lstStyle/>
+          <a:p>
+            <a:pPr indent="0" marL="0">
+              <a:buNone/>
+            </a:pPr>
+            <a:r>
+              <a:rPr lang="en-US" sz="2200" b="1" dirty="0">
+                <a:solidFill>
+                  <a:srgbClr val="FFFFFF"/>
+                </a:solidFill>
+                <a:latin typeface="Helvetica Neue" pitchFamily="34" charset="0"/>
+                <a:ea typeface="Helvetica Neue" pitchFamily="34" charset="-122"/>
+                <a:cs typeface="Helvetica Neue" pitchFamily="34" charset="-120"/>
+              </a:rPr>
+              <a:t>ReportCore</a:t>
+            </a:r>
+            <a:endParaRPr lang="en-US" sz="2200" dirty="0"/>
+          </a:p>
+        </p:txBody>
+      </p:sp>
+      <p:sp>
+        <p:nvSpPr>
+          <p:cNvPr id="16" name="Text 13"/>
+          <p:cNvSpPr txBox="1"/>
+          <p:nvPr/>
+        </p:nvSpPr>
+        <p:spPr>
+          <a:xfrm>
+            <a:off x="1051560" y="3822192"/>
+            <a:ext cx="10088575" cy="320040"/>
+          </a:xfrm>
+          <a:prstGeom prst="rect">
+            <a:avLst/>
+          </a:prstGeom>
+          <a:noFill/>
+          <a:ln/>
+        </p:spPr>
+        <p:txBody>
+          <a:bodyPr wrap="square" lIns="0" tIns="0" rIns="0" bIns="0" rtlCol="0" anchor="t"/>
+          <a:lstStyle/>
+          <a:p>
+            <a:pPr indent="0" marL="0">
+              <a:buNone/>
+            </a:pPr>
+            <a:r>
+              <a:rPr lang="en-US" sz="1300" dirty="0">
+                <a:solidFill>
+                  <a:srgbClr val="A1A1A6"/>
+                </a:solidFill>
+                <a:latin typeface="Helvetica Neue" pitchFamily="34" charset="0"/>
+                <a:ea typeface="Helvetica Neue" pitchFamily="34" charset="-122"/>
+                <a:cs typeface="Helvetica Neue" pitchFamily="34" charset="-120"/>
+              </a:rPr>
+              <a:t>a Swift package that imports only Foundation</a:t>
+            </a:r>
+            <a:endParaRPr lang="en-US" sz="1300" dirty="0"/>
+          </a:p>
+        </p:txBody>
+      </p:sp>
+      <p:sp>
+        <p:nvSpPr>
+          <p:cNvPr id="17" name="Text 14"/>
+          <p:cNvSpPr txBox="1"/>
+          <p:nvPr/>
+        </p:nvSpPr>
+        <p:spPr>
+          <a:xfrm>
+            <a:off x="1051560" y="4133088"/>
+            <a:ext cx="10088575" cy="365760"/>
+          </a:xfrm>
+          <a:prstGeom prst="rect">
+            <a:avLst/>
+          </a:prstGeom>
+          <a:noFill/>
+          <a:ln/>
+        </p:spPr>
+        <p:txBody>
+          <a:bodyPr wrap="square" lIns="0" tIns="0" rIns="0" bIns="0" rtlCol="0" anchor="t"/>
+          <a:lstStyle/>
+          <a:p>
+            <a:pPr indent="0" marL="0">
+              <a:buNone/>
             </a:pPr>
             <a:r>
               <a:rPr lang="en-US" sz="1500" dirty="0">
                 <a:solidFill>
+                  <a:srgbClr val="FFFFFF"/>
+                </a:solidFill>
+                <a:latin typeface="Helvetica Neue" pitchFamily="34" charset="0"/>
+                <a:ea typeface="Helvetica Neue" pitchFamily="34" charset="-122"/>
+                <a:cs typeface="Helvetica Neue" pitchFamily="34" charset="-120"/>
+              </a:rPr>
+              <a:t>Model · Ingestion · Rendering · Accessibility linter · Templates · Assistant prompts</a:t>
+            </a:r>
+            <a:endParaRPr lang="en-US" sz="1500" dirty="0"/>
+          </a:p>
+        </p:txBody>
+      </p:sp>
+      <p:sp>
+        <p:nvSpPr>
+          <p:cNvPr id="18" name="Text 15"/>
+          <p:cNvSpPr txBox="1"/>
+          <p:nvPr/>
+        </p:nvSpPr>
+        <p:spPr>
+          <a:xfrm>
+            <a:off x="640080" y="4892040"/>
+            <a:ext cx="3393338" cy="320040"/>
+          </a:xfrm>
+          <a:prstGeom prst="rect">
+            <a:avLst/>
+          </a:prstGeom>
+          <a:noFill/>
+          <a:ln/>
+        </p:spPr>
+        <p:txBody>
+          <a:bodyPr wrap="square" lIns="0" tIns="0" rIns="0" bIns="0" rtlCol="0" anchor="t"/>
+          <a:lstStyle/>
+          <a:p>
+            <a:pPr indent="0" marL="0">
+              <a:buNone/>
+            </a:pPr>
+            <a:r>
+              <a:rPr lang="en-US" sz="1600" b="1" dirty="0">
+                <a:solidFill>
                   <a:srgbClr val="1D1D1F"/>
                 </a:solidFill>
                 <a:latin typeface="Helvetica Neue" pitchFamily="34" charset="0"/>
                 <a:ea typeface="Helvetica Neue" pitchFamily="34" charset="-122"/>
                 <a:cs typeface="Helvetica Neue" pitchFamily="34" charset="-120"/>
               </a:rPr>
-              <a:t>Direct manipulation: click the title and type, as in Pages and Keynote</a:t>
-            </a:r>
-            <a:endParaRPr lang="en-US" sz="1500" dirty="0"/>
-          </a:p>
-          <a:p>
-            <a:pPr marL="203200" indent="-203200">
-              <a:spcAft>
-                <a:spcPts val="400"/>
-              </a:spcAft>
-              <a:buSzPct val="100000"/>
-              <a:buChar char="•"/>
-            </a:pPr>
-            <a:r>
-              <a:rPr lang="en-US" sz="1500" dirty="0">
+              <a:t>Dependencies point one way</a:t>
+            </a:r>
+            <a:endParaRPr lang="en-US" sz="1600" dirty="0"/>
+          </a:p>
+        </p:txBody>
+      </p:sp>
+      <p:sp>
+        <p:nvSpPr>
+          <p:cNvPr id="19" name="Text 16"/>
+          <p:cNvSpPr txBox="1"/>
+          <p:nvPr/>
+        </p:nvSpPr>
+        <p:spPr>
+          <a:xfrm>
+            <a:off x="640080" y="5266944"/>
+            <a:ext cx="3393338" cy="914400"/>
+          </a:xfrm>
+          <a:prstGeom prst="rect">
+            <a:avLst/>
+          </a:prstGeom>
+          <a:noFill/>
+          <a:ln/>
+        </p:spPr>
+        <p:txBody>
+          <a:bodyPr wrap="square" lIns="0" tIns="0" rIns="0" bIns="0" rtlCol="0" anchor="t"/>
+          <a:lstStyle/>
+          <a:p>
+            <a:pPr indent="0" marL="0">
+              <a:buNone/>
+            </a:pPr>
+            <a:r>
+              <a:rPr lang="en-US" sz="1350" dirty="0">
+                <a:solidFill>
+                  <a:srgbClr val="6E6E73"/>
+                </a:solidFill>
+                <a:latin typeface="Helvetica Neue" pitchFamily="34" charset="0"/>
+                <a:ea typeface="Helvetica Neue" pitchFamily="34" charset="-122"/>
+                <a:cs typeface="Helvetica Neue" pitchFamily="34" charset="-120"/>
+              </a:rPr>
+              <a:t>ReportCore has never heard of SwiftUI, AppKit or the network, and nothing below it imports anything above.</a:t>
+            </a:r>
+            <a:endParaRPr lang="en-US" sz="1350" dirty="0"/>
+          </a:p>
+        </p:txBody>
+      </p:sp>
+      <p:sp>
+        <p:nvSpPr>
+          <p:cNvPr id="20" name="Text 17"/>
+          <p:cNvSpPr txBox="1"/>
+          <p:nvPr/>
+        </p:nvSpPr>
+        <p:spPr>
+          <a:xfrm>
+            <a:off x="4399178" y="4892040"/>
+            <a:ext cx="3393338" cy="320040"/>
+          </a:xfrm>
+          <a:prstGeom prst="rect">
+            <a:avLst/>
+          </a:prstGeom>
+          <a:noFill/>
+          <a:ln/>
+        </p:spPr>
+        <p:txBody>
+          <a:bodyPr wrap="square" lIns="0" tIns="0" rIns="0" bIns="0" rtlCol="0" anchor="t"/>
+          <a:lstStyle/>
+          <a:p>
+            <a:pPr indent="0" marL="0">
+              <a:buNone/>
+            </a:pPr>
+            <a:r>
+              <a:rPr lang="en-US" sz="1600" b="1" dirty="0">
                 <a:solidFill>
                   <a:srgbClr val="1D1D1F"/>
                 </a:solidFill>
@@ -9193,20 +10686,77 @@
                 <a:ea typeface="Helvetica Neue" pitchFamily="34" charset="-122"/>
                 <a:cs typeface="Helvetica Neue" pitchFamily="34" charset="-120"/>
               </a:rPr>
-              <a:t>What is not visible on the card lives in an inspector: theme, layout, image description</a:t>
-            </a:r>
-            <a:endParaRPr lang="en-US" sz="1500" dirty="0"/>
-          </a:p>
-          <a:p>
-            <a:pPr marL="203200" indent="-203200">
-              <a:spcAft>
-                <a:spcPts val="400"/>
-              </a:spcAft>
-              <a:buSzPct val="100000"/>
-              <a:buChar char="•"/>
-            </a:pPr>
-            <a:r>
-              <a:rPr lang="en-US" sz="1500" dirty="0">
+              <a:t>Testable without a window</a:t>
+            </a:r>
+            <a:endParaRPr lang="en-US" sz="1600" dirty="0"/>
+          </a:p>
+        </p:txBody>
+      </p:sp>
+      <p:sp>
+        <p:nvSpPr>
+          <p:cNvPr id="21" name="Text 18"/>
+          <p:cNvSpPr txBox="1"/>
+          <p:nvPr/>
+        </p:nvSpPr>
+        <p:spPr>
+          <a:xfrm>
+            <a:off x="4399178" y="5266944"/>
+            <a:ext cx="3393338" cy="914400"/>
+          </a:xfrm>
+          <a:prstGeom prst="rect">
+            <a:avLst/>
+          </a:prstGeom>
+          <a:noFill/>
+          <a:ln/>
+        </p:spPr>
+        <p:txBody>
+          <a:bodyPr wrap="square" lIns="0" tIns="0" rIns="0" bIns="0" rtlCol="0" anchor="t"/>
+          <a:lstStyle/>
+          <a:p>
+            <a:pPr indent="0" marL="0">
+              <a:buNone/>
+            </a:pPr>
+            <a:r>
+              <a:rPr lang="en-US" sz="1350" dirty="0">
+                <a:solidFill>
+                  <a:srgbClr val="6E6E73"/>
+                </a:solidFill>
+                <a:latin typeface="Helvetica Neue" pitchFamily="34" charset="0"/>
+                <a:ea typeface="Helvetica Neue" pitchFamily="34" charset="-122"/>
+                <a:cs typeface="Helvetica Neue" pitchFamily="34" charset="-120"/>
+              </a:rPr>
+              <a:t>Its ninety tests run in under a second, so the renderers and the linter stay cheap to change.</a:t>
+            </a:r>
+            <a:endParaRPr lang="en-US" sz="1350" dirty="0"/>
+          </a:p>
+        </p:txBody>
+      </p:sp>
+      <p:sp>
+        <p:nvSpPr>
+          <p:cNvPr id="22" name="Text 19"/>
+          <p:cNvSpPr txBox="1"/>
+          <p:nvPr/>
+        </p:nvSpPr>
+        <p:spPr>
+          <a:xfrm>
+            <a:off x="8158277" y="4892040"/>
+            <a:ext cx="3393338" cy="320040"/>
+          </a:xfrm>
+          <a:prstGeom prst="rect">
+            <a:avLst/>
+          </a:prstGeom>
+          <a:noFill/>
+          <a:ln/>
+        </p:spPr>
+        <p:txBody>
+          <a:bodyPr wrap="square" lIns="0" tIns="0" rIns="0" bIns="0" rtlCol="0" anchor="t"/>
+          <a:lstStyle/>
+          <a:p>
+            <a:pPr indent="0" marL="0">
+              <a:buNone/>
+            </a:pPr>
+            <a:r>
+              <a:rPr lang="en-US" sz="1600" b="1" dirty="0">
                 <a:solidFill>
                   <a:srgbClr val="1D1D1F"/>
                 </a:solidFill>
@@ -9214,9 +10764,87 @@
                 <a:ea typeface="Helvetica Neue" pitchFamily="34" charset="-122"/>
                 <a:cs typeface="Helvetica Neue" pitchFamily="34" charset="-120"/>
               </a:rPr>
-              <a:t>Typographic card: hierarchy from size and weight, not boxes, capitals or colour</a:t>
-            </a:r>
-            <a:endParaRPr lang="en-US" sz="1500" dirty="0"/>
+              <a:t>One target away from iPad</a:t>
+            </a:r>
+            <a:endParaRPr lang="en-US" sz="1600" dirty="0"/>
+          </a:p>
+        </p:txBody>
+      </p:sp>
+      <p:sp>
+        <p:nvSpPr>
+          <p:cNvPr id="23" name="Text 20"/>
+          <p:cNvSpPr txBox="1"/>
+          <p:nvPr/>
+        </p:nvSpPr>
+        <p:spPr>
+          <a:xfrm>
+            <a:off x="8158277" y="5266944"/>
+            <a:ext cx="3393338" cy="914400"/>
+          </a:xfrm>
+          <a:prstGeom prst="rect">
+            <a:avLst/>
+          </a:prstGeom>
+          <a:noFill/>
+          <a:ln/>
+        </p:spPr>
+        <p:txBody>
+          <a:bodyPr wrap="square" lIns="0" tIns="0" rIns="0" bIns="0" rtlCol="0" anchor="t"/>
+          <a:lstStyle/>
+          <a:p>
+            <a:pPr indent="0" marL="0">
+              <a:buNone/>
+            </a:pPr>
+            <a:r>
+              <a:rPr lang="en-US" sz="1350" dirty="0">
+                <a:solidFill>
+                  <a:srgbClr val="6E6E73"/>
+                </a:solidFill>
+                <a:latin typeface="Helvetica Neue" pitchFamily="34" charset="0"/>
+                <a:ea typeface="Helvetica Neue" pitchFamily="34" charset="-122"/>
+                <a:cs typeface="Helvetica Neue" pitchFamily="34" charset="-120"/>
+              </a:rPr>
+              <a:t>The package builds for iOS too. Only the views are specific to the Mac.</a:t>
+            </a:r>
+            <a:endParaRPr lang="en-US" sz="1350" dirty="0"/>
+          </a:p>
+        </p:txBody>
+      </p:sp>
+      <p:sp>
+        <p:nvSpPr>
+          <p:cNvPr id="24" name="Text 21"/>
+          <p:cNvSpPr txBox="1"/>
+          <p:nvPr/>
+        </p:nvSpPr>
+        <p:spPr>
+          <a:xfrm>
+            <a:off x="640080" y="6217920"/>
+            <a:ext cx="10911535" cy="365760"/>
+          </a:xfrm>
+          <a:prstGeom prst="rect">
+            <a:avLst/>
+          </a:prstGeom>
+          <a:noFill/>
+          <a:ln/>
+        </p:spPr>
+        <p:txBody>
+          <a:bodyPr wrap="square" lIns="0" tIns="0" rIns="0" bIns="0" rtlCol="0" anchor="t"/>
+          <a:lstStyle/>
+          <a:p>
+            <a:pPr indent="0" marL="0">
+              <a:buNone/>
+            </a:pPr>
+            <a:r>
+              <a:rPr lang="en-US" sz="1300" i="1" dirty="0">
+                <a:solidFill>
+                  <a:srgbClr val="6E6E73"/>
+                </a:solidFill>
+                <a:latin typeface="Helvetica Neue" pitchFamily="34" charset="0"/>
+                <a:ea typeface="Helvetica Neue" pitchFamily="34" charset="-122"/>
+                <a:cs typeface="Helvetica Neue" pitchFamily="34" charset="-120"/>
+              </a:rPr>
+              <a:t>Swift 6 language mode throughout: a card is a Sendable value type, and the stores are main-actor observable objects.</a:t>
+            </a:r>
+            <a:endParaRPr lang="en-US" sz="1300" dirty="0"/>
           </a:p>
         </p:txBody>
       </p:sp>

--- a/deck/Reporting-Builder.pptx
+++ b/deck/Reporting-Builder.pptx
@@ -956,7 +956,7 @@
           <a:p>
             <a:r>
               <a:rPr lang="en-US" dirty="0"/>
-              <a:t>I want to be straightforward about what I cannot claim. The on-device model path compiles behind availability checks, but I could not run it on macOS 15. The paste matrix separates what I verified by hand from what I expect from each app's documentation. The VoiceOver features are tested for their data; the experience needs someone who uses VoiceOver every day. The tagged PDF has a structure tree, but I have not run a PDF/UA validator. Next would be an iPad target on the same core, share links, and localisation.</a:t>
+              <a:t>I want to be straightforward about what I cannot claim. The on-device model path compiles behind availability checks, but I could not run it on macOS 15. The paste matrix separates what I verified by hand, which is Copy for Email into Mail, Notes, Messages and Slack, from what I expect from each app's documentation. The VoiceOver features are tested for their data; the experience needs someone who uses VoiceOver every day. The tagged PDF has a structure tree, but I have not run a PDF/UA validator. Next would be an iPad target on the same core, share links, and localisation.</a:t>
             </a:r>
             <a:endParaRPr lang="en-US" dirty="0"/>
           </a:p>
